--- a/reports/phase-review-v2/phase-review-v2.pptx
+++ b/reports/phase-review-v2/phase-review-v2.pptx
@@ -20,9 +20,10 @@
     <p:sldId id="268" r:id="rId14"/>
     <p:sldId id="269" r:id="rId15"/>
     <p:sldId id="270" r:id="rId16"/>
+    <p:sldId id="271" r:id="rId17"/>
   </p:sldIdLst>
   <p:notesMasterIdLst>
-    <p:notesMasterId r:id="rId17"/>
+    <p:notesMasterId r:id="rId18"/>
   </p:notesMasterIdLst>
   <p:sldSz cx="12192000" cy="6858000"/>
   <p:notesSz cx="6858000" cy="12192000"/>
@@ -121,14 +122,14 @@
   <p:extLst>
     <p:ext uri="{521415D9-36F7-43E2-AB2F-B90AF26B5E84}">
       <p14:sectionLst xmlns:p14="http://schemas.microsoft.com/office/powerpoint/2010/main">
-        <p14:section name="開場" id="{559b31c5-aa6e-e2c5-cce4-2ffda76b8515}">
+        <p14:section name="開場" id="{0cca77b6-8488-e5f7-c19f-1826a7980436}">
           <p14:sldIdLst>
             <p14:sldId id="256"/>
             <p14:sldId id="257"/>
             <p14:sldId id="258"/>
           </p14:sldIdLst>
         </p14:section>
-        <p14:section name="系統設計" id="{7becf219-4035-5b8e-aa6c-a5bce9148cd1}">
+        <p14:section name="系統設計" id="{62b4963e-3b8d-1e94-8678-ccf4f0ab643c}">
           <p14:sldIdLst>
             <p14:sldId id="259"/>
             <p14:sldId id="260"/>
@@ -136,28 +137,29 @@
             <p14:sldId id="262"/>
           </p14:sldIdLst>
         </p14:section>
-        <p14:section name="實際示範" id="{b6aa2037-6170-7512-0a19-ff6395ec453e}">
+        <p14:section name="實際示範" id="{f32f4bb9-97a8-2dda-02aa-50c469c5c2af}">
           <p14:sldIdLst>
             <p14:sldId id="263"/>
             <p14:sldId id="264"/>
           </p14:sldIdLst>
         </p14:section>
-        <p14:section name="PDF 預檢" id="{ea127328-b14a-8b9c-5281-20dee5166b25}">
+        <p14:section name="PDF 預檢" id="{992aba50-e4b6-f714-08de-7303eae1a1bd}">
           <p14:sldIdLst>
             <p14:sldId id="265"/>
             <p14:sldId id="266"/>
+            <p14:sldId id="267"/>
           </p14:sldIdLst>
         </p14:section>
-        <p14:section name="驗證與限制" id="{cf33004a-2ccd-878f-d978-515db75b43be}">
+        <p14:section name="驗證與限制" id="{75b64418-5965-d4dd-03a0-2472368f9b50}">
           <p14:sldIdLst>
-            <p14:sldId id="267"/>
             <p14:sldId id="268"/>
             <p14:sldId id="269"/>
+            <p14:sldId id="270"/>
           </p14:sldIdLst>
         </p14:section>
-        <p14:section name="結尾" id="{70807578-5a1c-8ad6-1c9d-1c99f6fa3bc2}">
+        <p14:section name="結尾" id="{cd3eaa52-0710-9780-2879-c780abb5f812}">
           <p14:sldIdLst>
-            <p14:sldId id="270"/>
+            <p14:sldId id="271"/>
           </p14:sldIdLst>
         </p14:section>
       </p14:sectionLst>
@@ -270,11 +272,22 @@
               <a:effectLst/>
             </c:spPr>
           </c:dPt>
+          <c:dPt>
+            <c:idx val="4"/>
+            <c:invertIfNegative val="0"/>
+            <c:bubble3D val="0"/>
+            <c:spPr>
+              <a:solidFill>
+                <a:srgbClr val="3D6BB3"/>
+              </a:solidFill>
+              <a:effectLst/>
+            </c:spPr>
+          </c:dPt>
           <c:cat>
             <c:multiLvlStrRef>
-              <c:f>Sheet1!$A$2:$A$5</c:f>
+              <c:f>Sheet1!$A$2:$A$6</c:f>
               <c:multiLvlStrCache>
-                <c:ptCount val="4"/>
+                <c:ptCount val="5"/>
                 <c:lvl>
                   <c:pt idx="0">
                     <c:v>W4</c:v>
@@ -288,16 +301,19 @@
                   <c:pt idx="3">
                     <c:v>v0.8</c:v>
                   </c:pt>
+                  <c:pt idx="4">
+                    <c:v>W6</c:v>
+                  </c:pt>
                 </c:lvl>
               </c:multiLvlStrCache>
             </c:multiLvlStrRef>
           </c:cat>
           <c:val>
             <c:numRef>
-              <c:f>Sheet1!$B$2:$B$5</c:f>
+              <c:f>Sheet1!$B$2:$B$6</c:f>
               <c:numCache>
                 <c:formatCode>General</c:formatCode>
-                <c:ptCount val="4"/>
+                <c:ptCount val="5"/>
                 <c:pt idx="0">
                   <c:v>107</c:v>
                 </c:pt>
@@ -309,6 +325,9 @@
                 </c:pt>
                 <c:pt idx="3">
                   <c:v>178</c:v>
+                </c:pt>
+                <c:pt idx="4">
+                  <c:v>213</c:v>
                 </c:pt>
               </c:numCache>
             </c:numRef>
@@ -387,7 +406,7 @@
         <c:axId val="2094734552"/>
         <c:scaling>
           <c:orientation val="minMax"/>
-          <c:max val="200"/>
+          <c:max val="240"/>
           <c:min val="0"/>
         </c:scaling>
         <c:delete val="1"/>
@@ -843,9 +862,9 @@
           <a:p>
             <a:r>
               <a:rPr lang="en-US" dirty="0"/>
-              <a:t>【講者】林崇偉　【時間】約 20 秒
+              <a:t>【講者】林崇瑋　【時間】約 20 秒
 【講稿】
-大家好，我們是第 02 組，題目是「作業規格與缺漏檢查助手」。我是林崇偉，隊長是陳冠友。
+大家好，我們是第 02 組，題目是「作業規格與缺漏檢查助手」。我是林崇瑋，隊長是陳冠友。
 簡單說，學生交作業前，系統會拿老師的範例和規格來比對，把每一項要求標成已完成、需補件或待確認，就像右邊這張卡片。今天展示的是本機的階段原型，所有資料都是合成的。
 【注意】
 ・不要說成「完整自動批改」或「正式校園服務」。</a:t>
@@ -936,15 +955,14 @@
           <a:p>
             <a:r>
               <a:rPr lang="en-US" dirty="0"/>
-              <a:t>【講者】陳冠友　【時間】約 1 分 10 秒
+              <a:t>【講者】陳冠友　【時間】約 1 分鐘
 【講稿】
 這是舊版簡報之後新增的 PDF 預檢。學生上傳老師的規格和自己的報告，每份最多 6 MiB、25 頁，兩份合計 35 頁。
-Host 先檢查檔案、擷取文字，並把每一行編號。GPT 同時讀文字和頁面圖片，判斷每項要求有沒有完成，但它只回傳證據的「行號」，引文由 Host 從原文直接複製，所以引用不會被模型改寫。
-估分有三道關卡：老師原文要明列配分、總和要是 100、使用者要確認配分正確。三個都成立才顯示估分區間，否則只列缺漏，不給分數。
-另外，只交 PDF 時看不到 C++ 原始碼，這只會列為待確認，不會直接算零分。估分區間也還沒和老師的真實成績校準，所以它是自我檢查，不是正式成績。
+Host 先擷取文字並把每一行編號。GPT 同時讀文字和頁面圖片，判斷每項要求有沒有完成，但它只回傳證據的「行號」，引文由 Host 從原文直接複製，所以引用不會被模型改寫。
+估分有三道關卡：老師原文要明列配分、總和要是 100、使用者要確認配分正確。三個都成立才顯示估分區間，否則只列缺漏。只交 PDF 時看不到 C++ 原始碼，這只會列為待確認，不會直接算零分。
 【注意】
-・一次操作只呼叫一次模型，沒有自動重試，會使用 API 額度。
-・除非上台前已確認 gpt-5.4 能成功執行，否則不要現場示範 PDF；只用合成或已授權的 PDF，不要投影真實學生作業。</a:t>
+・原版一次操作只呼叫一次模型，候選流程未通過時最多兩次，都會使用 API 額度。
+・正式時間內不現場跑 PDF（gpt-5.4 一次約 35 秒，會超出 14 分鐘）。問答時若要示範，只用 examples/week6 的合成 PDF，不要投影真實學生作業。估分區間未與老師成績校準，被問到再說明。</a:t>
             </a:r>
             <a:endParaRPr lang="en-US" dirty="0"/>
           </a:p>
@@ -1032,14 +1050,13 @@
           <a:p>
             <a:r>
               <a:rPr lang="en-US" dirty="0"/>
-              <a:t>【講者】陳冠友　【時間】約 1 分鐘
+              <a:t>【講者】陳冠友　【時間】約 50 秒
 【講稿】
-PDF 這條我們把真實呼叫紀錄都列出來。第一版用 gpt-4.1-mini，讓模型直接寫引文，結果模型把摘要當成逐字引文、還混用頁碼，Host 用 UNGROUNDED_PDF_REPORT 拒絕輸出成績。
-第二版改成模型只選行號、Host 複製原文。同一個模型又選了跨頁和過長的範圍，被 INVALID_SOURCE_REFERENCE 擋下；我們人工抽查還發現，它把目錄當成已完成的正文。
-第三版把 PDF 換成 gpt-5.4，保留行號驗證。最終結果還沒寫進公開紀錄，所以今天不宣稱成功。
-我們學到的是：格式通過、引用正確、語意判斷正確，是三件不同的事，要分開驗證。兩次失敗都被擋下，沒有給出錯誤的分數。
+PDF 這條我們把真實呼叫紀錄都列出來。第一版用 gpt-4.1-mini 讓模型直接寫引文，它把摘要當成逐字引文，被 UNGROUNDED_PDF_REPORT 擋下。第二版改成模型只選行號，它又選了跨頁、過長的範圍，被 INVALID_SOURCE_REFERENCE 擋下。
+第三版換成 gpt-5.4。Week 6 用合成 PDF 實測兩輪，都通過系統核對；但我們事先寫好的 7 項業務預期，每次只中 6 項：模型說學生第 2 頁有終端機截圖，實際上沒有，系統核對也擋不住這種錯。
+所以格式通過、引用正確、語意判斷正確，是三件不同的事，要分開驗證。
 【注意】
-・上台前確認 artifacts/pdf-precheck/verification.json 是否已產生。若有 LIVE_PASS 紀錄，才把第三張卡與這段講稿改成成功，且只能說「單一案例」，不能說準確率。
+・通過紀錄是合成 PDF、每版每輪一次，只能說「這組案例通過」，不能說準確率。
 ・真實學生作業、分數與引文只留本機，不要投影或公開。</a:t>
             </a:r>
             <a:endParaRPr lang="en-US" dirty="0"/>
@@ -1128,14 +1145,15 @@
           <a:p>
             <a:r>
               <a:rPr lang="en-US" dirty="0"/>
-              <a:t>【講者】林崇偉　【時間】約 45 秒
+              <a:t>【講者】陳冠友　【時間】約 1 分鐘
 【講稿】
-再來是測試。回歸測試從 Week 4 的 107 項、Week 5 的 131 項、Week 7 的 148 項，到加入 PDF 後的 178 項全部通過，其中 30 項是 PDF 的新測試。
-右邊是關鍵案例，每一列都標了執行模式：GPT 是真實呼叫，HTTP 是伺服器權限檢查，故障注入和離線是我們刻意製造的情境。例如跨使用者讀取，會回傳 RUN_NOT_FOUND，不會透露別人的資料存不存在。
-要提醒的是，離線測試通過不等於真實模型的準確率。Week 7 的真實呼叫一共 14 次、18,296 個 tokens。
+Week 6 的作業是挑一段子流程，用講義的五種 workflow 之一重構。我們選 PDF 預檢，用 Evaluator–optimizer。
+原本模型產生一次，系統遇到第一個錯就整份作廢。現在系統用同一套規則列出草稿 A 的問題和位置，連同 A 送回 GPT 修訂一次；修訂稿 B 用同一套規則重評，還是不過就停在第 2 份、不給分。A 一次就通過的話，呼叫次數和原版一樣。
+真實比較的結果，我們照實講：gpt-5.4 兩輪都是第一份就通過，候選沒有多花呼叫，但也沒有差異；gpt-4.1-mini 兩輪都失敗，而且修訂稿兩次都和 A 一字不差，tokens 約為原版的 2.3 倍。
+所以結論是「尚未證明改善」，預設維持原版。下一步是把草稿 A 改放在 user 訊息裡再重測。
 【注意】
-・178 項另有 1 個 AnyIO deprecation warning。
-・tokens 是用量，不是帳單金額。</a:t>
+・離線 15 個案例證明的是控制邏輯（修訂後通過、到上限停止、檔案放反不修訂），不是真實效果。
+・比較表與 ADR 在 docs/week06/，被問到細節可直接打開。</a:t>
             </a:r>
             <a:endParaRPr lang="en-US" dirty="0"/>
           </a:p>
@@ -1223,13 +1241,14 @@
           <a:p>
             <a:r>
               <a:rPr lang="en-US" dirty="0"/>
-              <a:t>【講者】林崇偉　【時間】約 45 秒
+              <a:t>【講者】林崇瑋　【時間】約 40 秒
 【講稿】
-我們也保留了一個真實失敗。原版和加了 Session 記憶的候選版，用同樣的輸入、同樣的模型、同樣的來源各跑一次。
-原版讀完資料後直接回答，跳過了草稿提案，Host 用 UNEXPECTED_TOOL_SEQUENCE 擋下，沒有寫入；候選版則正常完成。數字上，原版 2 次回覆、2,133 tokens，候選版 3 次、4,352 tokens。
-但這只有一組樣本，而且兩邊完成的終點不同，所以我們不能說記憶提升了品質或降低了成本。另外，課程指定的 Google Cloud Gemini 我們沒有執行，這部分還不符合要求。
+再來是測試。回歸測試從 Week 4 的 107 項、Week 5 的 131 項、Week 7 的 148 項，加入 PDF 後到 178 項，Week 6 補交後是 213 項，全部通過。
+右邊是關鍵案例，每一列都標了執行模式：GPT 是真實呼叫，HTTP 是伺服器權限檢查，故障注入和離線是我們刻意製造的情境。例如跨使用者讀取，會回傳 RUN_NOT_FOUND，不會透露別人的資料存不存在。
+要提醒的是，離線測試通過不等於真實模型的準確率。
 【注意】
-・完整 live index 是 all_passed=false，不要只挑候選成功說整組通過。</a:t>
+・W6 長條排在 v0.8 之後，因為 Week 6 是 10/30 才補交。
+・Week 7 共 14 次回覆、18,296 tokens；Week 6 共 10 次回覆、86,451 tokens。tokens 是用量，不是帳單金額。</a:t>
             </a:r>
             <a:endParaRPr lang="en-US" dirty="0"/>
           </a:p>
@@ -1317,14 +1336,13 @@
           <a:p>
             <a:r>
               <a:rPr lang="en-US" dirty="0"/>
-              <a:t>【講者】林崇偉　【時間】約 50 秒
+              <a:t>【講者】林崇瑋　【時間】約 40 秒
 【講稿】
-最後整理現況。已完成且驗證的有：文字語意比對、補件工具流程、Session 清除與跨人隔離。
-已經實作但還要真實驗證的有：PDF 預檢的 gpt-5.4 最終結果、來源 v2 排除目前只有離線測試、估分區間還沒和老師成績校準。
-期末前的第一優先，是把 PDF 和語意判讀的結果轉成不可變的評閱快照，再接進草稿工具；同時建立 20 組老師標註的案例。之後再做掃描 PDF 的 OCR、正式登入和教師角色。
-驗收方式是：20 組標註案例、跨人隔離、來源變更拒寫、可重現的 trace，並分開報告正確率和拒答率。
+我們也保留了一個真實失敗。原版和加了 Session 記憶的候選版，用同樣的輸入、同樣的模型、同樣的來源各跑一次。
+原版讀完資料後直接回答，跳過了草稿提案，Host 用 UNEXPECTED_TOOL_SEQUENCE 擋下，沒有寫入；候選版則正常完成。數字上，原版 2 次回覆、2,133 tokens，候選版 3 次、4,352 tokens。
+但這只有一組樣本，而且兩邊完成的終點不同，所以我們不能說記憶提升了品質或降低了成本。另外，課程指定的 Google Cloud Gemini 我們沒有執行，這部分還不符合要求。
 【注意】
-・正式登入尚未實作，不能放進「待驗證」那欄。外部通知與 LMS 串接需另行授權，仍是規劃。</a:t>
+・完整 live index 是 all_passed=false，不要只挑候選成功說整組通過。</a:t>
             </a:r>
             <a:endParaRPr lang="en-US" dirty="0"/>
           </a:p>
@@ -1412,13 +1430,14 @@
           <a:p>
             <a:r>
               <a:rPr lang="en-US" dirty="0"/>
-              <a:t>【講者】兩人　【時間】約 30 秒
+              <a:t>【講者】林崇瑋　【時間】約 50 秒
 【講稿】
-（陳冠友）分工上，目前的建議是：我負責後端、工具確認、Session 記憶和 PDF 預檢示範。
-（林崇偉）我負責使用情境、來源引用、測試和失敗分析。
-開發、測試和簡報製作有使用 Codex 和 Claude 協助。以上是我們的報告，謝謝，歡迎提問。
+最後整理現況。已完成且驗證的有：文字語意比對、補件工具流程、Session 清除與跨人隔離。
+已經實作、但效果還沒證明的有：Week 6 的評估後修訂，真實比較尚未證明改善；PDF 預檢在合成 PDF 上通過，但 7 項業務預期只中 6 項；來源 v2 排除只有離線測試，估分區間還沒和老師成績校準。
+期末前的第一優先，是把 PDF 和語意判讀的結果轉成不可變的評閱快照，再接進草稿工具；同時建立 20 組老師標註的案例。之後再做掃描 PDF 的 OCR、正式登入和教師角色。
+驗收方式是：20 組標註案例、跨人隔離、來源變更拒寫、可重現的 trace，並分開報告正確率和拒答率。
 【注意】
-・這是建議分工，上台前請改成兩人確認過的實際分工，不要把建議念成已完成的事實。</a:t>
+・正式登入尚未實作，不能放進「已實作，效果待證明」那欄。外部通知與 LMS 串接需另行授權，仍是規劃。</a:t>
             </a:r>
             <a:endParaRPr lang="en-US" dirty="0"/>
           </a:p>
@@ -1442,6 +1461,100 @@
             <a:fld id="{F7021451-1387-4CA6-816F-3879F97B5CBC}" type="slidenum">
               <a:rPr lang="en-US"/>
               <a:t>15</a:t>
+            </a:fld>
+            <a:endParaRPr lang="en-US"/>
+          </a:p>
+        </p:txBody>
+      </p:sp>
+    </p:spTree>
+    <p:extLst>
+      <p:ext uri="{BB962C8B-B14F-4D97-AF65-F5344CB8AC3E}">
+        <p14:creationId xmlns:p14="http://schemas.microsoft.com/office/powerpoint/2010/main" val="1024086991"/>
+      </p:ext>
+    </p:extLst>
+  </p:cSld>
+  <p:clrMapOvr>
+    <a:masterClrMapping/>
+  </p:clrMapOvr>
+</p:notes>
+</file>
+
+<file path=ppt/notesSlides/notesSlide16.xml><?xml version="1.0" encoding="utf-8"?>
+<p:notes xmlns:a="http://schemas.openxmlformats.org/drawingml/2006/main" xmlns:r="http://schemas.openxmlformats.org/officeDocument/2006/relationships" xmlns:p="http://schemas.openxmlformats.org/presentationml/2006/main">
+  <p:cSld>
+    <p:spTree>
+      <p:nvGrpSpPr>
+        <p:cNvPr id="1" name=""/>
+        <p:cNvGrpSpPr/>
+        <p:nvPr/>
+      </p:nvGrpSpPr>
+      <p:grpSpPr>
+        <a:xfrm>
+          <a:off x="0" y="0"/>
+          <a:ext cx="0" cy="0"/>
+          <a:chOff x="0" y="0"/>
+          <a:chExt cx="0" cy="0"/>
+        </a:xfrm>
+      </p:grpSpPr>
+      <p:sp>
+        <p:nvSpPr>
+          <p:cNvPr id="2" name="Slide Image Placeholder 1"/>
+          <p:cNvSpPr>
+            <a:spLocks noGrp="1" noRot="1" noChangeAspect="1"/>
+          </p:cNvSpPr>
+          <p:nvPr>
+            <p:ph type="sldImg"/>
+          </p:nvPr>
+        </p:nvSpPr>
+        <p:spPr/>
+      </p:sp>
+      <p:sp>
+        <p:nvSpPr>
+          <p:cNvPr id="3" name="Notes Placeholder 2"/>
+          <p:cNvSpPr>
+            <a:spLocks noGrp="1"/>
+          </p:cNvSpPr>
+          <p:nvPr>
+            <p:ph type="body" idx="1"/>
+          </p:nvPr>
+        </p:nvSpPr>
+        <p:spPr/>
+        <p:txBody>
+          <a:bodyPr/>
+          <a:lstStyle/>
+          <a:p>
+            <a:r>
+              <a:rPr lang="en-US" dirty="0"/>
+              <a:t>【講者】兩人　【時間】約 30 秒
+【講稿】
+（陳冠友）分工上，目前的建議是：我負責後端、工具確認、Session 記憶和 PDF 預檢示範。
+（林崇瑋）我負責使用情境、來源引用、測試和失敗分析。
+開發、測試和簡報製作有使用 Codex 和 Claude 協助。以上是我們的報告，謝謝，歡迎提問。
+【注意】
+・這是建議分工，上台前請改成兩人確認過的實際分工，不要把建議念成已完成的事實。</a:t>
+            </a:r>
+            <a:endParaRPr lang="en-US" dirty="0"/>
+          </a:p>
+        </p:txBody>
+      </p:sp>
+      <p:sp>
+        <p:nvSpPr>
+          <p:cNvPr id="4" name="Slide Number Placeholder 3"/>
+          <p:cNvSpPr>
+            <a:spLocks noGrp="1"/>
+          </p:cNvSpPr>
+          <p:nvPr>
+            <p:ph type="sldNum" sz="quarter" idx="10"/>
+          </p:nvPr>
+        </p:nvSpPr>
+        <p:spPr/>
+        <p:txBody>
+          <a:bodyPr/>
+          <a:lstStyle/>
+          <a:p>
+            <a:fld id="{F7021451-1387-4CA6-816F-3879F97B5CBC}" type="slidenum">
+              <a:rPr lang="en-US"/>
+              <a:t>16</a:t>
             </a:fld>
             <a:endParaRPr lang="en-US"/>
           </a:p>
@@ -1506,7 +1619,7 @@
           <a:p>
             <a:r>
               <a:rPr lang="en-US" dirty="0"/>
-              <a:t>【講者】林崇偉　【時間】約 50 秒
+              <a:t>【講者】林崇瑋　【時間】約 50 秒
 【講稿】
 先講問題。老師會給範例和必做要求，但學生交之前，常常不知道自己少了哪一段。難的地方在於：「有寫」不等於「符合」。
 看右邊三個例子。第一個，學生把「使用者」這一節寫成「誰會用」，標題不同，但內容有描述對象和情境，應該算已完成。第二個，失敗案例只寫了輸入和結果，沒寫原因，這是需補件。第三個，學生說測試紀錄在附錄，但系統讀不到附錄，不能直接判缺交，只能標待確認、交給老師。
@@ -1600,14 +1713,14 @@
           <a:p>
             <a:r>
               <a:rPr lang="en-US" dirty="0"/>
-              <a:t>【講者】林崇偉　【時間】約 50 秒
+              <a:t>【講者】林崇瑋　【時間】約 45 秒
 【講稿】
-這是我們七週的累積。綠點是有證據的完成項，下面橘色字是還沒補齊的缺口，例如 Week 3 缺教師費率案例的原文、Week 4 課程指定的 Gemini 沒有驗證。Week 6 沒有可核對的材料，所以我們不列為完成。最右邊黃色的 v0.8，是 10 月 28 日晚上新增的 PDF 預檢。
-整理下來有三條路徑：A 文字語意比對、B 補件工具流程，兩條都有真實呼叫成功的紀錄；C 是 PDF 預檢，已經實作，但最終的真實執行結果還在記錄中。
+這是我們七週的累積。綠點是有證據的完成項，下面橘色字是還沒補齊的缺口，例如 Week 4 課程指定的 Gemini 沒有驗證。Week 6 是 10 月 30 日補交的，在 PDF 預檢上加了「評估後修訂」，真實比較還沒證明有改善。最右邊黃色的 v0.8，是 10 月 28 日晚上新增的 PDF 預檢。
+整理下來有三條路徑：A 文字語意比對、B 補件工具流程、C PDF 預檢，三條都有真實呼叫成功的紀錄；但 C 用的是合成 PDF，而且事先寫好的 7 項業務預期只中 6 項。
 最大的缺口是：A 和 C 的判讀結果還沒接到 B 的草稿工具，B 目前讀的是預先寫好的合成評閱快照。
 【注意】
-・Week 4／5 的歷史驗證分別是 107／131 項測試，被問到再回答。
-・舊版簡報寫「PDF 規劃中」，現在要以這頁為準。</a:t>
+・Week 3 缺教師費率原文、Week 4／5 分別是 107／131 項測試，被問到再回答。
+・舊版簡報寫「PDF 規劃中」、Week 6「不列為完成」，現在要以這頁為準。</a:t>
             </a:r>
             <a:endParaRPr lang="en-US" dirty="0"/>
           </a:p>
@@ -1789,7 +1902,7 @@
           <a:p>
             <a:r>
               <a:rPr lang="en-US" dirty="0"/>
-              <a:t>【講者】陳冠友　【時間】約 1 分鐘
+              <a:t>【講者】陳冠友　【時間】約 55 秒
 【講稿】
 這是系統架構。使用者從瀏覽器的 /week7 進來，所有請求都先經過中間的 FastAPI 和 Host。Host 先驗證 Cookie 和 Session 身分，再把 context 送給 OpenAI。
 模型回來的只是「提出工具呼叫」，Host 會檢查參數和允許的工具順序，通過了才執行。下面四塊是 Host 管理的資料：來源與 RAG gate 管版本和 hash；MCP 唯讀伺服器提供既有的評閱快照；SQLite 存草稿、收據和稽核，只有使用者確認後才會寫；Session 記憶只留最近一筆成功摘要。
@@ -2072,7 +2185,7 @@
           <a:p>
             <a:r>
               <a:rPr lang="en-US" dirty="0"/>
-              <a:t>【講者】陳冠友操作、林崇偉補充　【時間】約 2 分鐘
+              <a:t>【講者】陳冠友操作、林崇瑋補充　【時間】約 1 分 50 秒
 【操作】
 ・開啟 /week7，選「示範學生 A」→「切換／開始」，執行方式選「GPT 實際 AI」。
 ・按「準備補件清單」，等結果出來。
@@ -2173,7 +2286,7 @@
           <a:p>
             <a:r>
               <a:rPr lang="en-US" dirty="0"/>
-              <a:t>【講者】林崇偉解說、陳冠友操作　【時間】約 1 分 30 秒
+              <a:t>【講者】林崇瑋解說、陳冠友操作　【時間】約 1 分 30 秒
 【操作】
 ・切到「文字語意比對」，勾選「我已核對以上項目為本次必做要求」，按「呼叫 GPT 進行語意檢查」。
 ・結束前按「清除對話，開始新 Session」，切回補件工具流程，展開「本次記憶範圍」。
@@ -3517,7 +3630,7 @@
                   <a:schemeClr val="bg1"/>
                 </a:solidFill>
               </a:rPr>
-              <a:t>陳冠友 S11259039（隊長）　林崇偉 S11259031（隊員）</a:t>
+              <a:t>陳冠友 S11259039（隊長）　林崇瑋 S11259031（隊員）</a:t>
             </a:r>
             <a:endParaRPr lang="zh-TW" sz="1600" dirty="0"/>
           </a:p>
@@ -3553,7 +3666,7 @@
                   <a:schemeClr val="bg2"/>
                 </a:solidFill>
               </a:rPr>
-              <a:t>證據日期 2026-10-28 · Week 7 程式 6a5bc9b · PDF 預檢程式 13b2b1e · 資料皆為合成</a:t>
+              <a:t>證據 2026-10-28／30 · W7 6a5bc9b · PDF 13b2b1e · W6 327b7e2 · 資料皆為合成</a:t>
             </a:r>
             <a:endParaRPr lang="zh-TW" sz="1200" dirty="0"/>
           </a:p>
@@ -6552,7 +6665,7 @@
                   <a:schemeClr val="tx1"/>
                 </a:solidFill>
               </a:rPr>
-              <a:t>兩次真實失敗都被 Host 擋下，沒有給出錯誤分數</a:t>
+              <a:t>兩次失敗被 Host 擋下；換模型後通過，判斷仍會錯</a:t>
             </a:r>
             <a:endParaRPr lang="zh-TW" sz="3000" dirty="0"/>
           </a:p>
@@ -7450,14 +7563,14 @@
       </p:sp>
       <p:sp>
         <p:nvSpPr>
-          <p:cNvPr id="34" name="chip-pending-398"/>
-          <p:cNvSpPr/>
-          <p:nvPr/>
-        </p:nvSpPr>
-        <p:spPr>
-          <a:xfrm>
-            <a:off x="10119360" y="1810512"/>
-            <a:ext cx="1261262" cy="298704"/>
+          <p:cNvPr id="34" name="chip-pass-398"/>
+          <p:cNvSpPr/>
+          <p:nvPr/>
+        </p:nvSpPr>
+        <p:spPr>
+          <a:xfrm>
+            <a:off x="10085832" y="1810512"/>
+            <a:ext cx="1294790" cy="298704"/>
           </a:xfrm>
           <a:prstGeom prst="roundRect">
             <a:avLst>
@@ -7465,14 +7578,14 @@
             </a:avLst>
           </a:prstGeom>
           <a:solidFill>
-            <a:schemeClr val="accent3"/>
+            <a:schemeClr val="accent2"/>
           </a:solidFill>
           <a:ln/>
         </p:spPr>
       </p:sp>
       <p:pic>
         <p:nvPicPr>
-          <p:cNvPr id="35" name="chip-icon-399" descr="結果待記錄">    </p:cNvPr>
+          <p:cNvPr id="35" name="chip-icon-399" descr="LIVE_PASS">    </p:cNvPr>
           <p:cNvPicPr>
             <a:picLocks noChangeAspect="1"/>
           </p:cNvPicPr>
@@ -7486,7 +7599,7 @@
         </p:blipFill>
         <p:spPr>
           <a:xfrm>
-            <a:off x="10229088" y="1870253"/>
+            <a:off x="10195560" y="1870253"/>
             <a:ext cx="179222" cy="179222"/>
           </a:xfrm>
           <a:prstGeom prst="rect">
@@ -7502,8 +7615,8 @@
         </p:nvSpPr>
         <p:spPr>
           <a:xfrm>
-            <a:off x="10472318" y="1810512"/>
-            <a:ext cx="899160" cy="298704"/>
+            <a:off x="10438790" y="1810512"/>
+            <a:ext cx="932688" cy="298704"/>
           </a:xfrm>
           <a:prstGeom prst="rect">
             <a:avLst/>
@@ -7524,7 +7637,7 @@
                   <a:schemeClr val="bg1"/>
                 </a:solidFill>
               </a:rPr>
-              <a:t>結果待記錄</a:t>
+              <a:t>LIVE_PASS</a:t>
             </a:r>
             <a:endParaRPr lang="zh-TW" sz="1200" dirty="0"/>
           </a:p>
@@ -7596,7 +7709,7 @@
                   <a:schemeClr val="tx1"/>
                 </a:solidFill>
               </a:rPr>
-              <a:t>保留行號驗證。最終執行狀態尚未寫入公開的 verification.json。</a:t>
+              <a:t>Week 6（c0403a3、327b7e2）以合成 PDF 實測兩輪都通過核對；但 7 項業務預期只中 6 項。</a:t>
             </a:r>
             <a:endParaRPr lang="zh-TW" sz="1400" dirty="0"/>
           </a:p>
@@ -7665,7 +7778,7 @@
       </p:sp>
       <p:pic>
         <p:nvPicPr>
-          <p:cNvPr id="41" name="icon-405" descr="Clock">    </p:cNvPr>
+          <p:cNvPr id="41" name="icon-405" descr="TriangleAlert">    </p:cNvPr>
           <p:cNvPicPr>
             <a:picLocks noChangeAspect="1"/>
           </p:cNvPicPr>
@@ -7717,7 +7830,7 @@
                   <a:schemeClr val="tx1"/>
                 </a:solidFill>
               </a:rPr>
-              <a:t>不宣稱成功，不當作準確率</a:t>
+              <a:t>引用過關，語意仍會錯</a:t>
             </a:r>
             <a:endParaRPr lang="zh-TW" sz="1400" dirty="0"/>
           </a:p>
@@ -8050,7 +8163,7 @@
                   <a:schemeClr val="accent6"/>
                 </a:solidFill>
               </a:rPr>
-              <a:t>schema 通過不代表判斷對，所以失敗也保留原始紀錄。</a:t>
+              <a:t>實測：模型說學生第 2 頁有終端機截圖，實際沒有，Host 核對仍放行。</a:t>
             </a:r>
             <a:endParaRPr lang="zh-TW" sz="1300" dirty="0"/>
           </a:p>
@@ -8158,7 +8271,7 @@
                   <a:schemeClr val="accent6"/>
                 </a:solidFill>
               </a:rPr>
-              <a:t>驗證</a:t>
+              <a:t>WEEK 06 · EVALUATOR–OPTIMIZER（10/30 補交）</a:t>
             </a:r>
             <a:endParaRPr lang="zh-TW" sz="1300" dirty="0"/>
           </a:p>
@@ -8196,239 +8309,111 @@
                   <a:schemeClr val="tx1"/>
                 </a:solidFill>
               </a:rPr>
-              <a:t>回歸測試從 107 項成長到 178 項</a:t>
+              <a:t>Week 6：系統指出錯處，再請 GPT 修訂一次</a:t>
             </a:r>
             <a:endParaRPr lang="zh-TW" sz="3000" dirty="0"/>
           </a:p>
         </p:txBody>
       </p:sp>
-      <p:graphicFrame>
-        <p:nvGraphicFramePr>
-          <p:cNvPr id="5" name="tests-chart" descr=""/>
-          <p:cNvGraphicFramePr/>
-          <p:nvPr/>
-        </p:nvGraphicFramePr>
-        <p:xfrm>
-          <a:off x="548640" y="1554480"/>
-          <a:ext cx="5120640" cy="3977640"/>
-        </p:xfrm>
-        <a:graphic xmlns:a="http://schemas.openxmlformats.org/drawingml/2006/main">
-          <a:graphicData uri="http://schemas.openxmlformats.org/drawingml/2006/chart">
-            <c:chart xmlns:c="http://schemas.openxmlformats.org/drawingml/2006/chart" r:id="rId1"/>
-          </a:graphicData>
-        </a:graphic>
-      </p:graphicFrame>
-      <p:sp>
-        <p:nvSpPr>
-          <p:cNvPr id="6" name="text-417"/>
-          <p:cNvSpPr txBox="1"/>
-          <p:nvPr/>
-        </p:nvSpPr>
-        <p:spPr>
-          <a:xfrm>
-            <a:off x="548640" y="5577840"/>
-            <a:ext cx="5120640" cy="548640"/>
-          </a:xfrm>
-          <a:prstGeom prst="rect">
-            <a:avLst/>
-          </a:prstGeom>
-          <a:noFill/>
-          <a:ln/>
-        </p:spPr>
-        <p:txBody>
-          <a:bodyPr wrap="square" lIns="0" tIns="0" rIns="0" bIns="0" rtlCol="0" anchor="t"/>
-          <a:lstStyle/>
-          <a:p>
-            <a:pPr indent="0" marL="0">
-              <a:buNone/>
-            </a:pPr>
-            <a:r>
-              <a:rPr lang="zh-TW" altLang="en-US" sz="1300" dirty="0">
-                <a:solidFill>
-                  <a:schemeClr val="accent6"/>
-                </a:solidFill>
-              </a:rPr>
-              <a:t>v0.8 新增 30 項 PDF 測試。</a:t>
+      <p:sp>
+        <p:nvSpPr>
+          <p:cNvPr id="5" name="card-417"/>
+          <p:cNvSpPr/>
+          <p:nvPr/>
+        </p:nvSpPr>
+        <p:spPr>
+          <a:xfrm>
+            <a:off x="548640" y="1600200"/>
+            <a:ext cx="2011680" cy="1325880"/>
+          </a:xfrm>
+          <a:prstGeom prst="roundRect">
+            <a:avLst>
+              <a:gd name="adj" fmla="val 5517"/>
+            </a:avLst>
+          </a:prstGeom>
+          <a:solidFill>
+            <a:schemeClr val="bg1"/>
+          </a:solidFill>
+          <a:ln w="12700">
+            <a:solidFill>
+              <a:schemeClr val="bg2"/>
+            </a:solidFill>
+            <a:prstDash val="solid"/>
+          </a:ln>
+          <a:effectLst>
+            <a:outerShdw sx="100000" sy="100000" kx="0" ky="0" algn="bl" rotWithShape="0" blurRad="127000" dist="25400" dir="5400000">
+              <a:srgbClr val="1A2233">
+                <a:alpha val="10000"/>
+              </a:srgbClr>
+            </a:outerShdw>
+          </a:effectLst>
+        </p:spPr>
+      </p:sp>
+      <p:sp>
+        <p:nvSpPr>
+          <p:cNvPr id="6" name="loop-dot-418"/>
+          <p:cNvSpPr/>
+          <p:nvPr/>
+        </p:nvSpPr>
+        <p:spPr>
+          <a:xfrm>
+            <a:off x="713232" y="1755648"/>
+            <a:ext cx="310896" cy="310896"/>
+          </a:xfrm>
+          <a:prstGeom prst="ellipse">
+            <a:avLst/>
+          </a:prstGeom>
+          <a:solidFill>
+            <a:schemeClr val="accent4"/>
+          </a:solidFill>
+          <a:ln/>
+        </p:spPr>
+      </p:sp>
+      <p:sp>
+        <p:nvSpPr>
+          <p:cNvPr id="7" name="text-419"/>
+          <p:cNvSpPr txBox="1"/>
+          <p:nvPr/>
+        </p:nvSpPr>
+        <p:spPr>
+          <a:xfrm>
+            <a:off x="713232" y="1755648"/>
+            <a:ext cx="310896" cy="310896"/>
+          </a:xfrm>
+          <a:prstGeom prst="rect">
+            <a:avLst/>
+          </a:prstGeom>
+          <a:noFill/>
+          <a:ln/>
+        </p:spPr>
+        <p:txBody>
+          <a:bodyPr wrap="square" lIns="0" tIns="0" rIns="0" bIns="0" rtlCol="0" anchor="ctr"/>
+          <a:lstStyle/>
+          <a:p>
+            <a:pPr algn="ctr" indent="0" marL="0">
+              <a:buNone/>
+            </a:pPr>
+            <a:r>
+              <a:rPr lang="zh-TW" altLang="en-US" sz="1300" b="1" dirty="0">
+                <a:solidFill>
+                  <a:schemeClr val="bg1"/>
+                </a:solidFill>
+              </a:rPr>
+              <a:t>1</a:t>
             </a:r>
             <a:endParaRPr lang="zh-TW" sz="1300" dirty="0"/>
           </a:p>
-          <a:p>
-            <a:pPr indent="0" marL="0">
-              <a:buNone/>
-            </a:pPr>
-            <a:r>
-              <a:rPr lang="zh-TW" altLang="en-US" sz="1300" dirty="0">
-                <a:solidFill>
-                  <a:schemeClr val="accent6"/>
-                </a:solidFill>
-              </a:rPr>
-              <a:t>全部是離線與故障注入，不等於真實模型準確率。</a:t>
-            </a:r>
-            <a:endParaRPr lang="zh-TW" sz="1300" dirty="0"/>
-          </a:p>
-        </p:txBody>
-      </p:sp>
-      <p:sp>
-        <p:nvSpPr>
-          <p:cNvPr id="7" name="text-418"/>
-          <p:cNvSpPr txBox="1"/>
-          <p:nvPr/>
-        </p:nvSpPr>
-        <p:spPr>
-          <a:xfrm>
-            <a:off x="6172200" y="1600200"/>
-            <a:ext cx="5486400" cy="347472"/>
-          </a:xfrm>
-          <a:prstGeom prst="rect">
-            <a:avLst/>
-          </a:prstGeom>
-          <a:noFill/>
-          <a:ln/>
-        </p:spPr>
-        <p:txBody>
-          <a:bodyPr wrap="square" lIns="0" tIns="0" rIns="0" bIns="0" rtlCol="0" anchor="t"/>
-          <a:lstStyle/>
-          <a:p>
-            <a:pPr indent="0" marL="0">
-              <a:buNone/>
-            </a:pPr>
-            <a:r>
-              <a:rPr lang="zh-TW" altLang="en-US" sz="1700" b="1" dirty="0">
-                <a:solidFill>
-                  <a:schemeClr val="tx1"/>
-                </a:solidFill>
-              </a:rPr>
-              <a:t>關鍵案例：預期與實際一致</a:t>
-            </a:r>
-            <a:endParaRPr lang="zh-TW" sz="1700" dirty="0"/>
-          </a:p>
-        </p:txBody>
-      </p:sp>
-      <p:sp>
-        <p:nvSpPr>
-          <p:cNvPr id="8" name="row-bg-419"/>
-          <p:cNvSpPr/>
-          <p:nvPr/>
-        </p:nvSpPr>
-        <p:spPr>
-          <a:xfrm>
-            <a:off x="6172200" y="2048256"/>
-            <a:ext cx="5468112" cy="548640"/>
-          </a:xfrm>
-          <a:prstGeom prst="rect">
-            <a:avLst/>
-          </a:prstGeom>
-          <a:solidFill>
-            <a:schemeClr val="bg2"/>
-          </a:solidFill>
-          <a:ln/>
-        </p:spPr>
-      </p:sp>
-      <p:pic>
-        <p:nvPicPr>
-          <p:cNvPr id="9" name="icon-420" descr="CircleCheck">    </p:cNvPr>
-          <p:cNvPicPr>
-            <a:picLocks noChangeAspect="1"/>
-          </p:cNvPicPr>
-          <p:nvPr/>
-        </p:nvPicPr>
-        <p:blipFill>
-          <a:blip r:embed="rId2"/>
-          <a:stretch>
-            <a:fillRect/>
-          </a:stretch>
-        </p:blipFill>
-        <p:spPr>
-          <a:xfrm>
-            <a:off x="6291072" y="2194560"/>
-            <a:ext cx="256032" cy="256032"/>
-          </a:xfrm>
-          <a:prstGeom prst="rect">
-            <a:avLst/>
-          </a:prstGeom>
-        </p:spPr>
-      </p:pic>
-      <p:sp>
-        <p:nvSpPr>
-          <p:cNvPr id="10" name="text-421"/>
-          <p:cNvSpPr txBox="1"/>
-          <p:nvPr/>
-        </p:nvSpPr>
-        <p:spPr>
-          <a:xfrm>
-            <a:off x="6675120" y="2103120"/>
-            <a:ext cx="2240280" cy="438912"/>
-          </a:xfrm>
-          <a:prstGeom prst="rect">
-            <a:avLst/>
-          </a:prstGeom>
-          <a:noFill/>
-          <a:ln/>
-        </p:spPr>
-        <p:txBody>
-          <a:bodyPr wrap="square" lIns="0" tIns="0" rIns="0" bIns="0" rtlCol="0" anchor="ctr"/>
-          <a:lstStyle/>
-          <a:p>
-            <a:pPr indent="0" marL="0">
-              <a:buNone/>
-            </a:pPr>
-            <a:r>
-              <a:rPr lang="zh-TW" altLang="en-US" sz="1400" b="1" dirty="0">
-                <a:solidFill>
-                  <a:schemeClr val="tx1"/>
-                </a:solidFill>
-              </a:rPr>
-              <a:t>同 Session 續問</a:t>
-            </a:r>
-            <a:endParaRPr lang="zh-TW" sz="1400" dirty="0"/>
-          </a:p>
-        </p:txBody>
-      </p:sp>
-      <p:sp>
-        <p:nvSpPr>
-          <p:cNvPr id="11" name="text-422"/>
-          <p:cNvSpPr txBox="1"/>
-          <p:nvPr/>
-        </p:nvSpPr>
-        <p:spPr>
-          <a:xfrm>
-            <a:off x="8915400" y="2103120"/>
-            <a:ext cx="1828800" cy="438912"/>
-          </a:xfrm>
-          <a:prstGeom prst="rect">
-            <a:avLst/>
-          </a:prstGeom>
-          <a:noFill/>
-          <a:ln/>
-        </p:spPr>
-        <p:txBody>
-          <a:bodyPr wrap="square" lIns="0" tIns="0" rIns="0" bIns="0" rtlCol="0" anchor="ctr"/>
-          <a:lstStyle/>
-          <a:p>
-            <a:pPr indent="0" marL="0">
-              <a:buNone/>
-            </a:pPr>
-            <a:r>
-              <a:rPr lang="zh-TW" altLang="en-US" sz="1200" dirty="0">
-                <a:solidFill>
-                  <a:schemeClr val="tx1"/>
-                </a:solidFill>
-              </a:rPr>
-              <a:t>帶入該 Session 的摘要</a:t>
-            </a:r>
-            <a:endParaRPr lang="zh-TW" sz="1200" dirty="0"/>
-          </a:p>
-        </p:txBody>
-      </p:sp>
-      <p:sp>
-        <p:nvSpPr>
-          <p:cNvPr id="12" name="tag-423"/>
-          <p:cNvSpPr/>
-          <p:nvPr/>
-        </p:nvSpPr>
-        <p:spPr>
-          <a:xfrm>
-            <a:off x="11068050" y="2194560"/>
+        </p:txBody>
+      </p:sp>
+      <p:sp>
+        <p:nvSpPr>
+          <p:cNvPr id="8" name="tag-420"/>
+          <p:cNvSpPr/>
+          <p:nvPr/>
+        </p:nvSpPr>
+        <p:spPr>
+          <a:xfrm>
+            <a:off x="1914906" y="1783080"/>
             <a:ext cx="480822" cy="249428"/>
           </a:xfrm>
           <a:prstGeom prst="roundRect">
@@ -8449,13 +8434,13 @@
       </p:sp>
       <p:sp>
         <p:nvSpPr>
-          <p:cNvPr id="13" name="tag-text-424"/>
-          <p:cNvSpPr txBox="1"/>
-          <p:nvPr/>
-        </p:nvSpPr>
-        <p:spPr>
-          <a:xfrm>
-            <a:off x="11068050" y="2194560"/>
+          <p:cNvPr id="9" name="tag-text-421"/>
+          <p:cNvSpPr txBox="1"/>
+          <p:nvPr/>
+        </p:nvSpPr>
+        <p:spPr>
+          <a:xfrm>
+            <a:off x="1914906" y="1783080"/>
             <a:ext cx="480822" cy="249428"/>
           </a:xfrm>
           <a:prstGeom prst="rect">
@@ -8483,40 +8468,166 @@
           </a:p>
         </p:txBody>
       </p:sp>
-      <p:pic>
-        <p:nvPicPr>
-          <p:cNvPr id="14" name="icon-425" descr="CircleCheck">    </p:cNvPr>
-          <p:cNvPicPr>
-            <a:picLocks noChangeAspect="1"/>
-          </p:cNvPicPr>
-          <p:nvPr/>
-        </p:nvPicPr>
-        <p:blipFill>
-          <a:blip r:embed="rId3"/>
-          <a:stretch>
-            <a:fillRect/>
-          </a:stretch>
-        </p:blipFill>
-        <p:spPr>
-          <a:xfrm>
-            <a:off x="6291072" y="2779776"/>
-            <a:ext cx="256032" cy="256032"/>
-          </a:xfrm>
-          <a:prstGeom prst="rect">
-            <a:avLst/>
-          </a:prstGeom>
-        </p:spPr>
-      </p:pic>
-      <p:sp>
-        <p:nvSpPr>
-          <p:cNvPr id="15" name="text-426"/>
-          <p:cNvSpPr txBox="1"/>
-          <p:nvPr/>
-        </p:nvSpPr>
-        <p:spPr>
-          <a:xfrm>
-            <a:off x="6675120" y="2688336"/>
-            <a:ext cx="2240280" cy="438912"/>
+      <p:sp>
+        <p:nvSpPr>
+          <p:cNvPr id="10" name="text-422"/>
+          <p:cNvSpPr txBox="1"/>
+          <p:nvPr/>
+        </p:nvSpPr>
+        <p:spPr>
+          <a:xfrm>
+            <a:off x="713232" y="2157984"/>
+            <a:ext cx="1737360" cy="310896"/>
+          </a:xfrm>
+          <a:prstGeom prst="rect">
+            <a:avLst/>
+          </a:prstGeom>
+          <a:noFill/>
+          <a:ln/>
+        </p:spPr>
+        <p:txBody>
+          <a:bodyPr wrap="square" lIns="0" tIns="0" rIns="0" bIns="0" rtlCol="0" anchor="t"/>
+          <a:lstStyle/>
+          <a:p>
+            <a:pPr indent="0" marL="0">
+              <a:buNone/>
+            </a:pPr>
+            <a:r>
+              <a:rPr lang="zh-TW" altLang="en-US" sz="1500" b="1" dirty="0">
+                <a:solidFill>
+                  <a:schemeClr val="tx1"/>
+                </a:solidFill>
+              </a:rPr>
+              <a:t>草稿 A</a:t>
+            </a:r>
+            <a:endParaRPr lang="zh-TW" sz="1500" dirty="0"/>
+          </a:p>
+        </p:txBody>
+      </p:sp>
+      <p:sp>
+        <p:nvSpPr>
+          <p:cNvPr id="11" name="text-423"/>
+          <p:cNvSpPr txBox="1"/>
+          <p:nvPr/>
+        </p:nvSpPr>
+        <p:spPr>
+          <a:xfrm>
+            <a:off x="713232" y="2468880"/>
+            <a:ext cx="1737360" cy="411480"/>
+          </a:xfrm>
+          <a:prstGeom prst="rect">
+            <a:avLst/>
+          </a:prstGeom>
+          <a:noFill/>
+          <a:ln/>
+        </p:spPr>
+        <p:txBody>
+          <a:bodyPr wrap="square" lIns="0" tIns="0" rIns="0" bIns="0" rtlCol="0" anchor="t"/>
+          <a:lstStyle/>
+          <a:p>
+            <a:pPr indent="0" marL="0">
+              <a:buNone/>
+            </a:pPr>
+            <a:r>
+              <a:rPr lang="zh-TW" altLang="en-US" sz="1100" dirty="0">
+                <a:solidFill>
+                  <a:schemeClr val="accent6"/>
+                </a:solidFill>
+              </a:rPr>
+              <a:t>讀兩份 PDF，選證據行號</a:t>
+            </a:r>
+            <a:endParaRPr lang="zh-TW" sz="1100" dirty="0"/>
+          </a:p>
+        </p:txBody>
+      </p:sp>
+      <p:sp>
+        <p:nvSpPr>
+          <p:cNvPr id="12" name="arrow-424"/>
+          <p:cNvSpPr/>
+          <p:nvPr/>
+        </p:nvSpPr>
+        <p:spPr>
+          <a:xfrm>
+            <a:off x="2587752" y="2258568"/>
+            <a:ext cx="201168" cy="0"/>
+          </a:xfrm>
+          <a:prstGeom prst="line">
+            <a:avLst/>
+          </a:prstGeom>
+          <a:noFill/>
+          <a:ln w="22225">
+            <a:solidFill>
+              <a:schemeClr val="accent6"/>
+            </a:solidFill>
+            <a:prstDash val="solid"/>
+            <a:tailEnd type="triangle"/>
+          </a:ln>
+        </p:spPr>
+      </p:sp>
+      <p:sp>
+        <p:nvSpPr>
+          <p:cNvPr id="13" name="card-425"/>
+          <p:cNvSpPr/>
+          <p:nvPr/>
+        </p:nvSpPr>
+        <p:spPr>
+          <a:xfrm>
+            <a:off x="2816352" y="1600200"/>
+            <a:ext cx="2011680" cy="1325880"/>
+          </a:xfrm>
+          <a:prstGeom prst="roundRect">
+            <a:avLst>
+              <a:gd name="adj" fmla="val 5517"/>
+            </a:avLst>
+          </a:prstGeom>
+          <a:solidFill>
+            <a:schemeClr val="bg1"/>
+          </a:solidFill>
+          <a:ln w="12700">
+            <a:solidFill>
+              <a:schemeClr val="bg2"/>
+            </a:solidFill>
+            <a:prstDash val="solid"/>
+          </a:ln>
+          <a:effectLst>
+            <a:outerShdw sx="100000" sy="100000" kx="0" ky="0" algn="bl" rotWithShape="0" blurRad="127000" dist="25400" dir="5400000">
+              <a:srgbClr val="1A2233">
+                <a:alpha val="10000"/>
+              </a:srgbClr>
+            </a:outerShdw>
+          </a:effectLst>
+        </p:spPr>
+      </p:sp>
+      <p:sp>
+        <p:nvSpPr>
+          <p:cNvPr id="14" name="loop-dot-426"/>
+          <p:cNvSpPr/>
+          <p:nvPr/>
+        </p:nvSpPr>
+        <p:spPr>
+          <a:xfrm>
+            <a:off x="2980944" y="1755648"/>
+            <a:ext cx="310896" cy="310896"/>
+          </a:xfrm>
+          <a:prstGeom prst="ellipse">
+            <a:avLst/>
+          </a:prstGeom>
+          <a:solidFill>
+            <a:schemeClr val="tx2"/>
+          </a:solidFill>
+          <a:ln/>
+        </p:spPr>
+      </p:sp>
+      <p:sp>
+        <p:nvSpPr>
+          <p:cNvPr id="15" name="text-427"/>
+          <p:cNvSpPr txBox="1"/>
+          <p:nvPr/>
+        </p:nvSpPr>
+        <p:spPr>
+          <a:xfrm>
+            <a:off x="2980944" y="1755648"/>
+            <a:ext cx="310896" cy="310896"/>
           </a:xfrm>
           <a:prstGeom prst="rect">
             <a:avLst/>
@@ -8528,31 +8639,244 @@
           <a:bodyPr wrap="square" lIns="0" tIns="0" rIns="0" bIns="0" rtlCol="0" anchor="ctr"/>
           <a:lstStyle/>
           <a:p>
-            <a:pPr indent="0" marL="0">
-              <a:buNone/>
-            </a:pPr>
-            <a:r>
-              <a:rPr lang="zh-TW" altLang="en-US" sz="1400" b="1" dirty="0">
+            <a:pPr algn="ctr" indent="0" marL="0">
+              <a:buNone/>
+            </a:pPr>
+            <a:r>
+              <a:rPr lang="zh-TW" altLang="en-US" sz="1300" b="1" dirty="0">
+                <a:solidFill>
+                  <a:schemeClr val="bg1"/>
+                </a:solidFill>
+              </a:rPr>
+              <a:t>2</a:t>
+            </a:r>
+            <a:endParaRPr lang="zh-TW" sz="1300" dirty="0"/>
+          </a:p>
+        </p:txBody>
+      </p:sp>
+      <p:sp>
+        <p:nvSpPr>
+          <p:cNvPr id="16" name="tag-428"/>
+          <p:cNvSpPr/>
+          <p:nvPr/>
+        </p:nvSpPr>
+        <p:spPr>
+          <a:xfrm>
+            <a:off x="4101592" y="1783080"/>
+            <a:ext cx="561848" cy="249428"/>
+          </a:xfrm>
+          <a:prstGeom prst="roundRect">
+            <a:avLst>
+              <a:gd name="adj" fmla="val 50000"/>
+            </a:avLst>
+          </a:prstGeom>
+          <a:solidFill>
+            <a:schemeClr val="bg1"/>
+          </a:solidFill>
+          <a:ln w="12700">
+            <a:solidFill>
+              <a:schemeClr val="tx2"/>
+            </a:solidFill>
+            <a:prstDash val="solid"/>
+          </a:ln>
+        </p:spPr>
+      </p:sp>
+      <p:sp>
+        <p:nvSpPr>
+          <p:cNvPr id="17" name="tag-text-429"/>
+          <p:cNvSpPr txBox="1"/>
+          <p:nvPr/>
+        </p:nvSpPr>
+        <p:spPr>
+          <a:xfrm>
+            <a:off x="4101592" y="1783080"/>
+            <a:ext cx="561848" cy="249428"/>
+          </a:xfrm>
+          <a:prstGeom prst="rect">
+            <a:avLst/>
+          </a:prstGeom>
+          <a:noFill/>
+          <a:ln/>
+        </p:spPr>
+        <p:txBody>
+          <a:bodyPr wrap="square" lIns="0" tIns="0" rIns="0" bIns="0" rtlCol="0" anchor="ctr"/>
+          <a:lstStyle/>
+          <a:p>
+            <a:pPr algn="ctr" indent="0" marL="0">
+              <a:buNone/>
+            </a:pPr>
+            <a:r>
+              <a:rPr lang="zh-TW" altLang="en-US" sz="1100" b="1" dirty="0">
+                <a:solidFill>
+                  <a:schemeClr val="tx2"/>
+                </a:solidFill>
+              </a:rPr>
+              <a:t>Host</a:t>
+            </a:r>
+            <a:endParaRPr lang="zh-TW" sz="1100" dirty="0"/>
+          </a:p>
+        </p:txBody>
+      </p:sp>
+      <p:sp>
+        <p:nvSpPr>
+          <p:cNvPr id="18" name="text-430"/>
+          <p:cNvSpPr txBox="1"/>
+          <p:nvPr/>
+        </p:nvSpPr>
+        <p:spPr>
+          <a:xfrm>
+            <a:off x="2980944" y="2157984"/>
+            <a:ext cx="1737360" cy="310896"/>
+          </a:xfrm>
+          <a:prstGeom prst="rect">
+            <a:avLst/>
+          </a:prstGeom>
+          <a:noFill/>
+          <a:ln/>
+        </p:spPr>
+        <p:txBody>
+          <a:bodyPr wrap="square" lIns="0" tIns="0" rIns="0" bIns="0" rtlCol="0" anchor="t"/>
+          <a:lstStyle/>
+          <a:p>
+            <a:pPr indent="0" marL="0">
+              <a:buNone/>
+            </a:pPr>
+            <a:r>
+              <a:rPr lang="zh-TW" altLang="en-US" sz="1500" b="1" dirty="0">
                 <a:solidFill>
                   <a:schemeClr val="tx1"/>
                 </a:solidFill>
               </a:rPr>
-              <a:t>清除後新查詢</a:t>
-            </a:r>
-            <a:endParaRPr lang="zh-TW" sz="1400" dirty="0"/>
-          </a:p>
-        </p:txBody>
-      </p:sp>
-      <p:sp>
-        <p:nvSpPr>
-          <p:cNvPr id="16" name="text-427"/>
-          <p:cNvSpPr txBox="1"/>
-          <p:nvPr/>
-        </p:nvSpPr>
-        <p:spPr>
-          <a:xfrm>
-            <a:off x="8915400" y="2688336"/>
-            <a:ext cx="1828800" cy="438912"/>
+              <a:t>逐項評估</a:t>
+            </a:r>
+            <a:endParaRPr lang="zh-TW" sz="1500" dirty="0"/>
+          </a:p>
+        </p:txBody>
+      </p:sp>
+      <p:sp>
+        <p:nvSpPr>
+          <p:cNvPr id="19" name="text-431"/>
+          <p:cNvSpPr txBox="1"/>
+          <p:nvPr/>
+        </p:nvSpPr>
+        <p:spPr>
+          <a:xfrm>
+            <a:off x="2980944" y="2468880"/>
+            <a:ext cx="1737360" cy="411480"/>
+          </a:xfrm>
+          <a:prstGeom prst="rect">
+            <a:avLst/>
+          </a:prstGeom>
+          <a:noFill/>
+          <a:ln/>
+        </p:spPr>
+        <p:txBody>
+          <a:bodyPr wrap="square" lIns="0" tIns="0" rIns="0" bIns="0" rtlCol="0" anchor="t"/>
+          <a:lstStyle/>
+          <a:p>
+            <a:pPr indent="0" marL="0">
+              <a:buNone/>
+            </a:pPr>
+            <a:r>
+              <a:rPr lang="zh-TW" altLang="en-US" sz="1100" dirty="0">
+                <a:solidFill>
+                  <a:schemeClr val="accent6"/>
+                </a:solidFill>
+              </a:rPr>
+              <a:t>最終關卡同一套規則，列出問題與位置</a:t>
+            </a:r>
+            <a:endParaRPr lang="zh-TW" sz="1100" dirty="0"/>
+          </a:p>
+        </p:txBody>
+      </p:sp>
+      <p:sp>
+        <p:nvSpPr>
+          <p:cNvPr id="20" name="arrow-432"/>
+          <p:cNvSpPr/>
+          <p:nvPr/>
+        </p:nvSpPr>
+        <p:spPr>
+          <a:xfrm>
+            <a:off x="4855464" y="2258568"/>
+            <a:ext cx="201168" cy="0"/>
+          </a:xfrm>
+          <a:prstGeom prst="line">
+            <a:avLst/>
+          </a:prstGeom>
+          <a:noFill/>
+          <a:ln w="22225">
+            <a:solidFill>
+              <a:schemeClr val="accent6"/>
+            </a:solidFill>
+            <a:prstDash val="solid"/>
+            <a:tailEnd type="triangle"/>
+          </a:ln>
+        </p:spPr>
+      </p:sp>
+      <p:sp>
+        <p:nvSpPr>
+          <p:cNvPr id="21" name="card-433"/>
+          <p:cNvSpPr/>
+          <p:nvPr/>
+        </p:nvSpPr>
+        <p:spPr>
+          <a:xfrm>
+            <a:off x="5084064" y="1600200"/>
+            <a:ext cx="2011680" cy="1325880"/>
+          </a:xfrm>
+          <a:prstGeom prst="roundRect">
+            <a:avLst>
+              <a:gd name="adj" fmla="val 5517"/>
+            </a:avLst>
+          </a:prstGeom>
+          <a:solidFill>
+            <a:schemeClr val="bg1"/>
+          </a:solidFill>
+          <a:ln w="12700">
+            <a:solidFill>
+              <a:schemeClr val="bg2"/>
+            </a:solidFill>
+            <a:prstDash val="solid"/>
+          </a:ln>
+          <a:effectLst>
+            <a:outerShdw sx="100000" sy="100000" kx="0" ky="0" algn="bl" rotWithShape="0" blurRad="127000" dist="25400" dir="5400000">
+              <a:srgbClr val="1A2233">
+                <a:alpha val="10000"/>
+              </a:srgbClr>
+            </a:outerShdw>
+          </a:effectLst>
+        </p:spPr>
+      </p:sp>
+      <p:sp>
+        <p:nvSpPr>
+          <p:cNvPr id="22" name="loop-dot-434"/>
+          <p:cNvSpPr/>
+          <p:nvPr/>
+        </p:nvSpPr>
+        <p:spPr>
+          <a:xfrm>
+            <a:off x="5248656" y="1755648"/>
+            <a:ext cx="310896" cy="310896"/>
+          </a:xfrm>
+          <a:prstGeom prst="ellipse">
+            <a:avLst/>
+          </a:prstGeom>
+          <a:solidFill>
+            <a:schemeClr val="accent4"/>
+          </a:solidFill>
+          <a:ln/>
+        </p:spPr>
+      </p:sp>
+      <p:sp>
+        <p:nvSpPr>
+          <p:cNvPr id="23" name="text-435"/>
+          <p:cNvSpPr txBox="1"/>
+          <p:nvPr/>
+        </p:nvSpPr>
+        <p:spPr>
+          <a:xfrm>
+            <a:off x="5248656" y="1755648"/>
+            <a:ext cx="310896" cy="310896"/>
           </a:xfrm>
           <a:prstGeom prst="rect">
             <a:avLst/>
@@ -8564,30 +8888,30 @@
           <a:bodyPr wrap="square" lIns="0" tIns="0" rIns="0" bIns="0" rtlCol="0" anchor="ctr"/>
           <a:lstStyle/>
           <a:p>
-            <a:pPr indent="0" marL="0">
-              <a:buNone/>
-            </a:pPr>
-            <a:r>
-              <a:rPr lang="zh-TW" altLang="en-US" sz="1200" dirty="0">
-                <a:solidFill>
-                  <a:schemeClr val="tx1"/>
-                </a:solidFill>
-              </a:rPr>
-              <a:t>memory:null，任務仍完成</a:t>
-            </a:r>
-            <a:endParaRPr lang="zh-TW" sz="1200" dirty="0"/>
-          </a:p>
-        </p:txBody>
-      </p:sp>
-      <p:sp>
-        <p:nvSpPr>
-          <p:cNvPr id="17" name="tag-428"/>
-          <p:cNvSpPr/>
-          <p:nvPr/>
-        </p:nvSpPr>
-        <p:spPr>
-          <a:xfrm>
-            <a:off x="11068050" y="2779776"/>
+            <a:pPr algn="ctr" indent="0" marL="0">
+              <a:buNone/>
+            </a:pPr>
+            <a:r>
+              <a:rPr lang="zh-TW" altLang="en-US" sz="1300" b="1" dirty="0">
+                <a:solidFill>
+                  <a:schemeClr val="bg1"/>
+                </a:solidFill>
+              </a:rPr>
+              <a:t>3</a:t>
+            </a:r>
+            <a:endParaRPr lang="zh-TW" sz="1300" dirty="0"/>
+          </a:p>
+        </p:txBody>
+      </p:sp>
+      <p:sp>
+        <p:nvSpPr>
+          <p:cNvPr id="24" name="tag-436"/>
+          <p:cNvSpPr/>
+          <p:nvPr/>
+        </p:nvSpPr>
+        <p:spPr>
+          <a:xfrm>
+            <a:off x="6450330" y="1783080"/>
             <a:ext cx="480822" cy="249428"/>
           </a:xfrm>
           <a:prstGeom prst="roundRect">
@@ -8608,13 +8932,13 @@
       </p:sp>
       <p:sp>
         <p:nvSpPr>
-          <p:cNvPr id="18" name="tag-text-429"/>
-          <p:cNvSpPr txBox="1"/>
-          <p:nvPr/>
-        </p:nvSpPr>
-        <p:spPr>
-          <a:xfrm>
-            <a:off x="11068050" y="2779776"/>
+          <p:cNvPr id="25" name="tag-text-437"/>
+          <p:cNvSpPr txBox="1"/>
+          <p:nvPr/>
+        </p:nvSpPr>
+        <p:spPr>
+          <a:xfrm>
+            <a:off x="6450330" y="1783080"/>
             <a:ext cx="480822" cy="249428"/>
           </a:xfrm>
           <a:prstGeom prst="rect">
@@ -8644,58 +8968,164 @@
       </p:sp>
       <p:sp>
         <p:nvSpPr>
-          <p:cNvPr id="19" name="row-bg-430"/>
-          <p:cNvSpPr/>
-          <p:nvPr/>
-        </p:nvSpPr>
-        <p:spPr>
-          <a:xfrm>
-            <a:off x="6172200" y="3218688"/>
-            <a:ext cx="5468112" cy="548640"/>
-          </a:xfrm>
-          <a:prstGeom prst="rect">
-            <a:avLst/>
+          <p:cNvPr id="26" name="text-438"/>
+          <p:cNvSpPr txBox="1"/>
+          <p:nvPr/>
+        </p:nvSpPr>
+        <p:spPr>
+          <a:xfrm>
+            <a:off x="5248656" y="2157984"/>
+            <a:ext cx="1737360" cy="310896"/>
+          </a:xfrm>
+          <a:prstGeom prst="rect">
+            <a:avLst/>
+          </a:prstGeom>
+          <a:noFill/>
+          <a:ln/>
+        </p:spPr>
+        <p:txBody>
+          <a:bodyPr wrap="square" lIns="0" tIns="0" rIns="0" bIns="0" rtlCol="0" anchor="t"/>
+          <a:lstStyle/>
+          <a:p>
+            <a:pPr indent="0" marL="0">
+              <a:buNone/>
+            </a:pPr>
+            <a:r>
+              <a:rPr lang="zh-TW" altLang="en-US" sz="1500" b="1" dirty="0">
+                <a:solidFill>
+                  <a:schemeClr val="tx1"/>
+                </a:solidFill>
+              </a:rPr>
+              <a:t>修訂得到 B</a:t>
+            </a:r>
+            <a:endParaRPr lang="zh-TW" sz="1500" dirty="0"/>
+          </a:p>
+        </p:txBody>
+      </p:sp>
+      <p:sp>
+        <p:nvSpPr>
+          <p:cNvPr id="27" name="text-439"/>
+          <p:cNvSpPr txBox="1"/>
+          <p:nvPr/>
+        </p:nvSpPr>
+        <p:spPr>
+          <a:xfrm>
+            <a:off x="5248656" y="2468880"/>
+            <a:ext cx="1737360" cy="411480"/>
+          </a:xfrm>
+          <a:prstGeom prst="rect">
+            <a:avLst/>
+          </a:prstGeom>
+          <a:noFill/>
+          <a:ln/>
+        </p:spPr>
+        <p:txBody>
+          <a:bodyPr wrap="square" lIns="0" tIns="0" rIns="0" bIns="0" rtlCol="0" anchor="t"/>
+          <a:lstStyle/>
+          <a:p>
+            <a:pPr indent="0" marL="0">
+              <a:buNone/>
+            </a:pPr>
+            <a:r>
+              <a:rPr lang="zh-TW" altLang="en-US" sz="1100" dirty="0">
+                <a:solidFill>
+                  <a:schemeClr val="accent6"/>
+                </a:solidFill>
+              </a:rPr>
+              <a:t>帶著 A 與問題清單，只改被指出處</a:t>
+            </a:r>
+            <a:endParaRPr lang="zh-TW" sz="1100" dirty="0"/>
+          </a:p>
+        </p:txBody>
+      </p:sp>
+      <p:sp>
+        <p:nvSpPr>
+          <p:cNvPr id="28" name="arrow-440"/>
+          <p:cNvSpPr/>
+          <p:nvPr/>
+        </p:nvSpPr>
+        <p:spPr>
+          <a:xfrm>
+            <a:off x="7123176" y="2258568"/>
+            <a:ext cx="201168" cy="0"/>
+          </a:xfrm>
+          <a:prstGeom prst="line">
+            <a:avLst/>
+          </a:prstGeom>
+          <a:noFill/>
+          <a:ln w="22225">
+            <a:solidFill>
+              <a:schemeClr val="accent6"/>
+            </a:solidFill>
+            <a:prstDash val="solid"/>
+            <a:tailEnd type="triangle"/>
+          </a:ln>
+        </p:spPr>
+      </p:sp>
+      <p:sp>
+        <p:nvSpPr>
+          <p:cNvPr id="29" name="card-441"/>
+          <p:cNvSpPr/>
+          <p:nvPr/>
+        </p:nvSpPr>
+        <p:spPr>
+          <a:xfrm>
+            <a:off x="7351776" y="1600200"/>
+            <a:ext cx="2011680" cy="1325880"/>
+          </a:xfrm>
+          <a:prstGeom prst="roundRect">
+            <a:avLst>
+              <a:gd name="adj" fmla="val 5517"/>
+            </a:avLst>
           </a:prstGeom>
           <a:solidFill>
-            <a:schemeClr val="bg2"/>
+            <a:schemeClr val="bg1"/>
           </a:solidFill>
-          <a:ln/>
-        </p:spPr>
-      </p:sp>
-      <p:pic>
-        <p:nvPicPr>
-          <p:cNvPr id="20" name="icon-431" descr="CircleCheck">    </p:cNvPr>
-          <p:cNvPicPr>
-            <a:picLocks noChangeAspect="1"/>
-          </p:cNvPicPr>
-          <p:nvPr/>
-        </p:nvPicPr>
-        <p:blipFill>
-          <a:blip r:embed="rId4"/>
-          <a:stretch>
-            <a:fillRect/>
-          </a:stretch>
-        </p:blipFill>
-        <p:spPr>
-          <a:xfrm>
-            <a:off x="6291072" y="3364992"/>
-            <a:ext cx="256032" cy="256032"/>
-          </a:xfrm>
-          <a:prstGeom prst="rect">
-            <a:avLst/>
-          </a:prstGeom>
-        </p:spPr>
-      </p:pic>
-      <p:sp>
-        <p:nvSpPr>
-          <p:cNvPr id="21" name="text-432"/>
-          <p:cNvSpPr txBox="1"/>
-          <p:nvPr/>
-        </p:nvSpPr>
-        <p:spPr>
-          <a:xfrm>
-            <a:off x="6675120" y="3273552"/>
-            <a:ext cx="2240280" cy="438912"/>
+          <a:ln w="12700">
+            <a:solidFill>
+              <a:schemeClr val="bg2"/>
+            </a:solidFill>
+            <a:prstDash val="solid"/>
+          </a:ln>
+          <a:effectLst>
+            <a:outerShdw sx="100000" sy="100000" kx="0" ky="0" algn="bl" rotWithShape="0" blurRad="127000" dist="25400" dir="5400000">
+              <a:srgbClr val="1A2233">
+                <a:alpha val="10000"/>
+              </a:srgbClr>
+            </a:outerShdw>
+          </a:effectLst>
+        </p:spPr>
+      </p:sp>
+      <p:sp>
+        <p:nvSpPr>
+          <p:cNvPr id="30" name="loop-dot-442"/>
+          <p:cNvSpPr/>
+          <p:nvPr/>
+        </p:nvSpPr>
+        <p:spPr>
+          <a:xfrm>
+            <a:off x="7516368" y="1755648"/>
+            <a:ext cx="310896" cy="310896"/>
+          </a:xfrm>
+          <a:prstGeom prst="ellipse">
+            <a:avLst/>
+          </a:prstGeom>
+          <a:solidFill>
+            <a:schemeClr val="tx2"/>
+          </a:solidFill>
+          <a:ln/>
+        </p:spPr>
+      </p:sp>
+      <p:sp>
+        <p:nvSpPr>
+          <p:cNvPr id="31" name="text-443"/>
+          <p:cNvSpPr txBox="1"/>
+          <p:nvPr/>
+        </p:nvSpPr>
+        <p:spPr>
+          <a:xfrm>
+            <a:off x="7516368" y="1755648"/>
+            <a:ext cx="310896" cy="310896"/>
           </a:xfrm>
           <a:prstGeom prst="rect">
             <a:avLst/>
@@ -8707,66 +9137,30 @@
           <a:bodyPr wrap="square" lIns="0" tIns="0" rIns="0" bIns="0" rtlCol="0" anchor="ctr"/>
           <a:lstStyle/>
           <a:p>
-            <a:pPr indent="0" marL="0">
-              <a:buNone/>
-            </a:pPr>
-            <a:r>
-              <a:rPr lang="zh-TW" altLang="en-US" sz="1400" b="1" dirty="0">
-                <a:solidFill>
-                  <a:schemeClr val="tx1"/>
-                </a:solidFill>
-              </a:rPr>
-              <a:t>跨使用者讀取</a:t>
-            </a:r>
-            <a:endParaRPr lang="zh-TW" sz="1400" dirty="0"/>
-          </a:p>
-        </p:txBody>
-      </p:sp>
-      <p:sp>
-        <p:nvSpPr>
-          <p:cNvPr id="22" name="text-433"/>
-          <p:cNvSpPr txBox="1"/>
-          <p:nvPr/>
-        </p:nvSpPr>
-        <p:spPr>
-          <a:xfrm>
-            <a:off x="8915400" y="3273552"/>
-            <a:ext cx="1828800" cy="438912"/>
-          </a:xfrm>
-          <a:prstGeom prst="rect">
-            <a:avLst/>
-          </a:prstGeom>
-          <a:noFill/>
-          <a:ln/>
-        </p:spPr>
-        <p:txBody>
-          <a:bodyPr wrap="square" lIns="0" tIns="0" rIns="0" bIns="0" rtlCol="0" anchor="ctr"/>
-          <a:lstStyle/>
-          <a:p>
-            <a:pPr indent="0" marL="0">
-              <a:buNone/>
-            </a:pPr>
-            <a:r>
-              <a:rPr lang="zh-TW" altLang="en-US" sz="1200" dirty="0">
-                <a:solidFill>
-                  <a:schemeClr val="tx1"/>
-                </a:solidFill>
-              </a:rPr>
-              <a:t>RUN_NOT_FOUND</a:t>
-            </a:r>
-            <a:endParaRPr lang="zh-TW" sz="1200" dirty="0"/>
-          </a:p>
-        </p:txBody>
-      </p:sp>
-      <p:sp>
-        <p:nvSpPr>
-          <p:cNvPr id="23" name="tag-434"/>
-          <p:cNvSpPr/>
-          <p:nvPr/>
-        </p:nvSpPr>
-        <p:spPr>
-          <a:xfrm>
-            <a:off x="10987024" y="3364992"/>
+            <a:pPr algn="ctr" indent="0" marL="0">
+              <a:buNone/>
+            </a:pPr>
+            <a:r>
+              <a:rPr lang="zh-TW" altLang="en-US" sz="1300" b="1" dirty="0">
+                <a:solidFill>
+                  <a:schemeClr val="bg1"/>
+                </a:solidFill>
+              </a:rPr>
+              <a:t>4</a:t>
+            </a:r>
+            <a:endParaRPr lang="zh-TW" sz="1300" dirty="0"/>
+          </a:p>
+        </p:txBody>
+      </p:sp>
+      <p:sp>
+        <p:nvSpPr>
+          <p:cNvPr id="32" name="tag-444"/>
+          <p:cNvSpPr/>
+          <p:nvPr/>
+        </p:nvSpPr>
+        <p:spPr>
+          <a:xfrm>
+            <a:off x="8637016" y="1783080"/>
             <a:ext cx="561848" cy="249428"/>
           </a:xfrm>
           <a:prstGeom prst="roundRect">
@@ -8787,13 +9181,13 @@
       </p:sp>
       <p:sp>
         <p:nvSpPr>
-          <p:cNvPr id="24" name="tag-text-435"/>
-          <p:cNvSpPr txBox="1"/>
-          <p:nvPr/>
-        </p:nvSpPr>
-        <p:spPr>
-          <a:xfrm>
-            <a:off x="10987024" y="3364992"/>
+          <p:cNvPr id="33" name="tag-text-445"/>
+          <p:cNvSpPr txBox="1"/>
+          <p:nvPr/>
+        </p:nvSpPr>
+        <p:spPr>
+          <a:xfrm>
+            <a:off x="8637016" y="1783080"/>
             <a:ext cx="561848" cy="249428"/>
           </a:xfrm>
           <a:prstGeom prst="rect">
@@ -8815,15 +9209,1040 @@
                   <a:schemeClr val="tx2"/>
                 </a:solidFill>
               </a:rPr>
-              <a:t>HTTP</a:t>
+              <a:t>Host</a:t>
             </a:r>
             <a:endParaRPr lang="zh-TW" sz="1100" dirty="0"/>
           </a:p>
         </p:txBody>
+      </p:sp>
+      <p:sp>
+        <p:nvSpPr>
+          <p:cNvPr id="34" name="text-446"/>
+          <p:cNvSpPr txBox="1"/>
+          <p:nvPr/>
+        </p:nvSpPr>
+        <p:spPr>
+          <a:xfrm>
+            <a:off x="7516368" y="2157984"/>
+            <a:ext cx="1737360" cy="310896"/>
+          </a:xfrm>
+          <a:prstGeom prst="rect">
+            <a:avLst/>
+          </a:prstGeom>
+          <a:noFill/>
+          <a:ln/>
+        </p:spPr>
+        <p:txBody>
+          <a:bodyPr wrap="square" lIns="0" tIns="0" rIns="0" bIns="0" rtlCol="0" anchor="t"/>
+          <a:lstStyle/>
+          <a:p>
+            <a:pPr indent="0" marL="0">
+              <a:buNone/>
+            </a:pPr>
+            <a:r>
+              <a:rPr lang="zh-TW" altLang="en-US" sz="1500" b="1" dirty="0">
+                <a:solidFill>
+                  <a:schemeClr val="tx1"/>
+                </a:solidFill>
+              </a:rPr>
+              <a:t>同規則重評</a:t>
+            </a:r>
+            <a:endParaRPr lang="zh-TW" sz="1500" dirty="0"/>
+          </a:p>
+        </p:txBody>
+      </p:sp>
+      <p:sp>
+        <p:nvSpPr>
+          <p:cNvPr id="35" name="text-447"/>
+          <p:cNvSpPr txBox="1"/>
+          <p:nvPr/>
+        </p:nvSpPr>
+        <p:spPr>
+          <a:xfrm>
+            <a:off x="7516368" y="2468880"/>
+            <a:ext cx="1737360" cy="411480"/>
+          </a:xfrm>
+          <a:prstGeom prst="rect">
+            <a:avLst/>
+          </a:prstGeom>
+          <a:noFill/>
+          <a:ln/>
+        </p:spPr>
+        <p:txBody>
+          <a:bodyPr wrap="square" lIns="0" tIns="0" rIns="0" bIns="0" rtlCol="0" anchor="t"/>
+          <a:lstStyle/>
+          <a:p>
+            <a:pPr indent="0" marL="0">
+              <a:buNone/>
+            </a:pPr>
+            <a:r>
+              <a:rPr lang="zh-TW" altLang="en-US" sz="1100" dirty="0">
+                <a:solidFill>
+                  <a:schemeClr val="accent6"/>
+                </a:solidFill>
+              </a:rPr>
+              <a:t>並禁止把推測改成明確要求</a:t>
+            </a:r>
+            <a:endParaRPr lang="zh-TW" sz="1100" dirty="0"/>
+          </a:p>
+        </p:txBody>
+      </p:sp>
+      <p:sp>
+        <p:nvSpPr>
+          <p:cNvPr id="36" name="arrow-448"/>
+          <p:cNvSpPr/>
+          <p:nvPr/>
+        </p:nvSpPr>
+        <p:spPr>
+          <a:xfrm>
+            <a:off x="9390888" y="2258568"/>
+            <a:ext cx="201168" cy="0"/>
+          </a:xfrm>
+          <a:prstGeom prst="line">
+            <a:avLst/>
+          </a:prstGeom>
+          <a:noFill/>
+          <a:ln w="22225">
+            <a:solidFill>
+              <a:schemeClr val="accent6"/>
+            </a:solidFill>
+            <a:prstDash val="solid"/>
+            <a:tailEnd type="triangle"/>
+          </a:ln>
+        </p:spPr>
+      </p:sp>
+      <p:sp>
+        <p:nvSpPr>
+          <p:cNvPr id="37" name="card-449"/>
+          <p:cNvSpPr/>
+          <p:nvPr/>
+        </p:nvSpPr>
+        <p:spPr>
+          <a:xfrm>
+            <a:off x="9619488" y="1600200"/>
+            <a:ext cx="2011680" cy="1325880"/>
+          </a:xfrm>
+          <a:prstGeom prst="roundRect">
+            <a:avLst>
+              <a:gd name="adj" fmla="val 5517"/>
+            </a:avLst>
+          </a:prstGeom>
+          <a:solidFill>
+            <a:schemeClr val="bg1"/>
+          </a:solidFill>
+          <a:ln w="19050">
+            <a:solidFill>
+              <a:schemeClr val="accent2"/>
+            </a:solidFill>
+            <a:prstDash val="solid"/>
+          </a:ln>
+          <a:effectLst>
+            <a:outerShdw sx="100000" sy="100000" kx="0" ky="0" algn="bl" rotWithShape="0" blurRad="127000" dist="25400" dir="5400000">
+              <a:srgbClr val="1A2233">
+                <a:alpha val="10000"/>
+              </a:srgbClr>
+            </a:outerShdw>
+          </a:effectLst>
+        </p:spPr>
+      </p:sp>
+      <p:sp>
+        <p:nvSpPr>
+          <p:cNvPr id="38" name="loop-dot-450"/>
+          <p:cNvSpPr/>
+          <p:nvPr/>
+        </p:nvSpPr>
+        <p:spPr>
+          <a:xfrm>
+            <a:off x="9784080" y="1755648"/>
+            <a:ext cx="310896" cy="310896"/>
+          </a:xfrm>
+          <a:prstGeom prst="ellipse">
+            <a:avLst/>
+          </a:prstGeom>
+          <a:solidFill>
+            <a:schemeClr val="accent2"/>
+          </a:solidFill>
+          <a:ln/>
+        </p:spPr>
+      </p:sp>
+      <p:sp>
+        <p:nvSpPr>
+          <p:cNvPr id="39" name="text-451"/>
+          <p:cNvSpPr txBox="1"/>
+          <p:nvPr/>
+        </p:nvSpPr>
+        <p:spPr>
+          <a:xfrm>
+            <a:off x="9784080" y="1755648"/>
+            <a:ext cx="310896" cy="310896"/>
+          </a:xfrm>
+          <a:prstGeom prst="rect">
+            <a:avLst/>
+          </a:prstGeom>
+          <a:noFill/>
+          <a:ln/>
+        </p:spPr>
+        <p:txBody>
+          <a:bodyPr wrap="square" lIns="0" tIns="0" rIns="0" bIns="0" rtlCol="0" anchor="ctr"/>
+          <a:lstStyle/>
+          <a:p>
+            <a:pPr algn="ctr" indent="0" marL="0">
+              <a:buNone/>
+            </a:pPr>
+            <a:r>
+              <a:rPr lang="zh-TW" altLang="en-US" sz="1300" b="1" dirty="0">
+                <a:solidFill>
+                  <a:schemeClr val="bg1"/>
+                </a:solidFill>
+              </a:rPr>
+              <a:t>5</a:t>
+            </a:r>
+            <a:endParaRPr lang="zh-TW" sz="1300" dirty="0"/>
+          </a:p>
+        </p:txBody>
+      </p:sp>
+      <p:sp>
+        <p:nvSpPr>
+          <p:cNvPr id="40" name="tag-452"/>
+          <p:cNvSpPr/>
+          <p:nvPr/>
+        </p:nvSpPr>
+        <p:spPr>
+          <a:xfrm>
+            <a:off x="10949432" y="1783080"/>
+            <a:ext cx="517144" cy="249428"/>
+          </a:xfrm>
+          <a:prstGeom prst="roundRect">
+            <a:avLst>
+              <a:gd name="adj" fmla="val 50000"/>
+            </a:avLst>
+          </a:prstGeom>
+          <a:solidFill>
+            <a:schemeClr val="bg1"/>
+          </a:solidFill>
+          <a:ln w="12700">
+            <a:solidFill>
+              <a:schemeClr val="accent2"/>
+            </a:solidFill>
+            <a:prstDash val="solid"/>
+          </a:ln>
+        </p:spPr>
+      </p:sp>
+      <p:sp>
+        <p:nvSpPr>
+          <p:cNvPr id="41" name="tag-text-453"/>
+          <p:cNvSpPr txBox="1"/>
+          <p:nvPr/>
+        </p:nvSpPr>
+        <p:spPr>
+          <a:xfrm>
+            <a:off x="10949432" y="1783080"/>
+            <a:ext cx="517144" cy="249428"/>
+          </a:xfrm>
+          <a:prstGeom prst="rect">
+            <a:avLst/>
+          </a:prstGeom>
+          <a:noFill/>
+          <a:ln/>
+        </p:spPr>
+        <p:txBody>
+          <a:bodyPr wrap="square" lIns="0" tIns="0" rIns="0" bIns="0" rtlCol="0" anchor="ctr"/>
+          <a:lstStyle/>
+          <a:p>
+            <a:pPr algn="ctr" indent="0" marL="0">
+              <a:buNone/>
+            </a:pPr>
+            <a:r>
+              <a:rPr lang="zh-TW" altLang="en-US" sz="1100" b="1" dirty="0">
+                <a:solidFill>
+                  <a:schemeClr val="accent2"/>
+                </a:solidFill>
+              </a:rPr>
+              <a:t>結果</a:t>
+            </a:r>
+            <a:endParaRPr lang="zh-TW" sz="1100" dirty="0"/>
+          </a:p>
+        </p:txBody>
+      </p:sp>
+      <p:sp>
+        <p:nvSpPr>
+          <p:cNvPr id="42" name="text-454"/>
+          <p:cNvSpPr txBox="1"/>
+          <p:nvPr/>
+        </p:nvSpPr>
+        <p:spPr>
+          <a:xfrm>
+            <a:off x="9784080" y="2157984"/>
+            <a:ext cx="1737360" cy="310896"/>
+          </a:xfrm>
+          <a:prstGeom prst="rect">
+            <a:avLst/>
+          </a:prstGeom>
+          <a:noFill/>
+          <a:ln/>
+        </p:spPr>
+        <p:txBody>
+          <a:bodyPr wrap="square" lIns="0" tIns="0" rIns="0" bIns="0" rtlCol="0" anchor="t"/>
+          <a:lstStyle/>
+          <a:p>
+            <a:pPr indent="0" marL="0">
+              <a:buNone/>
+            </a:pPr>
+            <a:r>
+              <a:rPr lang="zh-TW" altLang="en-US" sz="1500" b="1" dirty="0">
+                <a:solidFill>
+                  <a:schemeClr val="tx1"/>
+                </a:solidFill>
+              </a:rPr>
+              <a:t>通過才採用</a:t>
+            </a:r>
+            <a:endParaRPr lang="zh-TW" sz="1500" dirty="0"/>
+          </a:p>
+        </p:txBody>
+      </p:sp>
+      <p:sp>
+        <p:nvSpPr>
+          <p:cNvPr id="43" name="text-455"/>
+          <p:cNvSpPr txBox="1"/>
+          <p:nvPr/>
+        </p:nvSpPr>
+        <p:spPr>
+          <a:xfrm>
+            <a:off x="9784080" y="2468880"/>
+            <a:ext cx="1737360" cy="411480"/>
+          </a:xfrm>
+          <a:prstGeom prst="rect">
+            <a:avLst/>
+          </a:prstGeom>
+          <a:noFill/>
+          <a:ln/>
+        </p:spPr>
+        <p:txBody>
+          <a:bodyPr wrap="square" lIns="0" tIns="0" rIns="0" bIns="0" rtlCol="0" anchor="t"/>
+          <a:lstStyle/>
+          <a:p>
+            <a:pPr indent="0" marL="0">
+              <a:buNone/>
+            </a:pPr>
+            <a:r>
+              <a:rPr lang="zh-TW" altLang="en-US" sz="1100" dirty="0">
+                <a:solidFill>
+                  <a:schemeClr val="accent6"/>
+                </a:solidFill>
+              </a:rPr>
+              <a:t>仍未通過：第 2 份即停，不給分</a:t>
+            </a:r>
+            <a:endParaRPr lang="zh-TW" sz="1100" dirty="0"/>
+          </a:p>
+        </p:txBody>
+      </p:sp>
+      <p:sp>
+        <p:nvSpPr>
+          <p:cNvPr id="44" name="text-456"/>
+          <p:cNvSpPr txBox="1"/>
+          <p:nvPr/>
+        </p:nvSpPr>
+        <p:spPr>
+          <a:xfrm>
+            <a:off x="548640" y="3072384"/>
+            <a:ext cx="11064240" cy="292608"/>
+          </a:xfrm>
+          <a:prstGeom prst="rect">
+            <a:avLst/>
+          </a:prstGeom>
+          <a:noFill/>
+          <a:ln/>
+        </p:spPr>
+        <p:txBody>
+          <a:bodyPr wrap="square" lIns="0" tIns="0" rIns="0" bIns="0" rtlCol="0" anchor="t"/>
+          <a:lstStyle/>
+          <a:p>
+            <a:pPr indent="0" marL="0">
+              <a:buNone/>
+            </a:pPr>
+            <a:r>
+              <a:rPr lang="zh-TW" altLang="en-US" sz="1300" dirty="0">
+                <a:solidFill>
+                  <a:schemeClr val="accent6"/>
+                </a:solidFill>
+              </a:rPr>
+              <a:t>草稿 A 通過就直接採用，呼叫次數與原版相同；判斷檔案放反不修訂；模型服務錯誤不重試。</a:t>
+            </a:r>
+            <a:endParaRPr lang="zh-TW" sz="1300" dirty="0"/>
+          </a:p>
+        </p:txBody>
+      </p:sp>
+      <p:sp>
+        <p:nvSpPr>
+          <p:cNvPr id="45" name="text-457"/>
+          <p:cNvSpPr txBox="1"/>
+          <p:nvPr/>
+        </p:nvSpPr>
+        <p:spPr>
+          <a:xfrm>
+            <a:off x="548640" y="3493008"/>
+            <a:ext cx="7315200" cy="329184"/>
+          </a:xfrm>
+          <a:prstGeom prst="rect">
+            <a:avLst/>
+          </a:prstGeom>
+          <a:noFill/>
+          <a:ln/>
+        </p:spPr>
+        <p:txBody>
+          <a:bodyPr wrap="square" lIns="0" tIns="0" rIns="0" bIns="0" rtlCol="0" anchor="t"/>
+          <a:lstStyle/>
+          <a:p>
+            <a:pPr indent="0" marL="0">
+              <a:buNone/>
+            </a:pPr>
+            <a:r>
+              <a:rPr lang="zh-TW" altLang="en-US" sz="1500" b="1" dirty="0">
+                <a:solidFill>
+                  <a:schemeClr val="tx1"/>
+                </a:solidFill>
+              </a:rPr>
+              <a:t>真實比較：同一組合成 PDF，每版每輪各跑一次</a:t>
+            </a:r>
+            <a:endParaRPr lang="zh-TW" sz="1500" dirty="0"/>
+          </a:p>
+        </p:txBody>
+      </p:sp>
+      <p:sp>
+        <p:nvSpPr>
+          <p:cNvPr id="46" name="card-458"/>
+          <p:cNvSpPr/>
+          <p:nvPr/>
+        </p:nvSpPr>
+        <p:spPr>
+          <a:xfrm>
+            <a:off x="548640" y="3913632"/>
+            <a:ext cx="3520440" cy="1645920"/>
+          </a:xfrm>
+          <a:prstGeom prst="roundRect">
+            <a:avLst>
+              <a:gd name="adj" fmla="val 4444"/>
+            </a:avLst>
+          </a:prstGeom>
+          <a:solidFill>
+            <a:schemeClr val="bg1"/>
+          </a:solidFill>
+          <a:ln w="12700">
+            <a:solidFill>
+              <a:schemeClr val="bg2"/>
+            </a:solidFill>
+            <a:prstDash val="solid"/>
+          </a:ln>
+          <a:effectLst>
+            <a:outerShdw sx="100000" sy="100000" kx="0" ky="0" algn="bl" rotWithShape="0" blurRad="127000" dist="25400" dir="5400000">
+              <a:srgbClr val="1A2233">
+                <a:alpha val="10000"/>
+              </a:srgbClr>
+            </a:outerShdw>
+          </a:effectLst>
+        </p:spPr>
+      </p:sp>
+      <p:sp>
+        <p:nvSpPr>
+          <p:cNvPr id="47" name="text-459"/>
+          <p:cNvSpPr txBox="1"/>
+          <p:nvPr/>
+        </p:nvSpPr>
+        <p:spPr>
+          <a:xfrm>
+            <a:off x="804672" y="4050792"/>
+            <a:ext cx="3017520" cy="329184"/>
+          </a:xfrm>
+          <a:prstGeom prst="rect">
+            <a:avLst/>
+          </a:prstGeom>
+          <a:noFill/>
+          <a:ln/>
+        </p:spPr>
+        <p:txBody>
+          <a:bodyPr wrap="square" lIns="0" tIns="0" rIns="0" bIns="0" rtlCol="0" anchor="ctr"/>
+          <a:lstStyle/>
+          <a:p>
+            <a:pPr indent="0" marL="0">
+              <a:buNone/>
+            </a:pPr>
+            <a:r>
+              <a:rPr lang="zh-TW" altLang="en-US" sz="1600" b="1" dirty="0">
+                <a:solidFill>
+                  <a:schemeClr val="tx1"/>
+                </a:solidFill>
+              </a:rPr>
+              <a:t>gpt-5.4 · 兩輪</a:t>
+            </a:r>
+            <a:endParaRPr lang="zh-TW" sz="1600" dirty="0"/>
+          </a:p>
+        </p:txBody>
+      </p:sp>
+      <p:sp>
+        <p:nvSpPr>
+          <p:cNvPr id="48" name="chip-pass-460"/>
+          <p:cNvSpPr/>
+          <p:nvPr/>
+        </p:nvSpPr>
+        <p:spPr>
+          <a:xfrm>
+            <a:off x="804672" y="4480560"/>
+            <a:ext cx="1474622" cy="273304"/>
+          </a:xfrm>
+          <a:prstGeom prst="roundRect">
+            <a:avLst>
+              <a:gd name="adj" fmla="val 50000"/>
+            </a:avLst>
+          </a:prstGeom>
+          <a:solidFill>
+            <a:schemeClr val="accent2"/>
+          </a:solidFill>
+          <a:ln/>
+        </p:spPr>
       </p:sp>
       <p:pic>
         <p:nvPicPr>
-          <p:cNvPr id="25" name="icon-436" descr="CircleCheck">    </p:cNvPr>
+          <p:cNvPr id="49" name="chip-icon-461" descr="原版 LIVE_PASS">    </p:cNvPr>
+          <p:cNvPicPr>
+            <a:picLocks noChangeAspect="1"/>
+          </p:cNvPicPr>
+          <p:nvPr/>
+        </p:nvPicPr>
+        <p:blipFill>
+          <a:blip r:embed="rId1"/>
+          <a:stretch>
+            <a:fillRect/>
+          </a:stretch>
+        </p:blipFill>
+        <p:spPr>
+          <a:xfrm>
+            <a:off x="914400" y="4535221"/>
+            <a:ext cx="163982" cy="163982"/>
+          </a:xfrm>
+          <a:prstGeom prst="rect">
+            <a:avLst/>
+          </a:prstGeom>
+        </p:spPr>
+      </p:pic>
+      <p:sp>
+        <p:nvSpPr>
+          <p:cNvPr id="50" name="chip-text-462"/>
+          <p:cNvSpPr txBox="1"/>
+          <p:nvPr/>
+        </p:nvSpPr>
+        <p:spPr>
+          <a:xfrm>
+            <a:off x="1142390" y="4480560"/>
+            <a:ext cx="1127760" cy="273304"/>
+          </a:xfrm>
+          <a:prstGeom prst="rect">
+            <a:avLst/>
+          </a:prstGeom>
+          <a:noFill/>
+          <a:ln/>
+        </p:spPr>
+        <p:txBody>
+          <a:bodyPr wrap="square" lIns="0" tIns="0" rIns="0" bIns="0" rtlCol="0" anchor="ctr"/>
+          <a:lstStyle/>
+          <a:p>
+            <a:pPr indent="0" marL="0">
+              <a:buNone/>
+            </a:pPr>
+            <a:r>
+              <a:rPr lang="zh-TW" altLang="en-US" sz="1000" b="1" dirty="0">
+                <a:solidFill>
+                  <a:schemeClr val="bg1"/>
+                </a:solidFill>
+              </a:rPr>
+              <a:t>原版 LIVE_PASS</a:t>
+            </a:r>
+            <a:endParaRPr lang="zh-TW" sz="1000" dirty="0"/>
+          </a:p>
+        </p:txBody>
+      </p:sp>
+      <p:sp>
+        <p:nvSpPr>
+          <p:cNvPr id="51" name="chip-pass-463"/>
+          <p:cNvSpPr/>
+          <p:nvPr/>
+        </p:nvSpPr>
+        <p:spPr>
+          <a:xfrm>
+            <a:off x="2389022" y="4480560"/>
+            <a:ext cx="1474622" cy="273304"/>
+          </a:xfrm>
+          <a:prstGeom prst="roundRect">
+            <a:avLst>
+              <a:gd name="adj" fmla="val 50000"/>
+            </a:avLst>
+          </a:prstGeom>
+          <a:solidFill>
+            <a:schemeClr val="accent2"/>
+          </a:solidFill>
+          <a:ln/>
+        </p:spPr>
+      </p:sp>
+      <p:pic>
+        <p:nvPicPr>
+          <p:cNvPr id="52" name="chip-icon-464" descr="候選 LIVE_PASS">    </p:cNvPr>
+          <p:cNvPicPr>
+            <a:picLocks noChangeAspect="1"/>
+          </p:cNvPicPr>
+          <p:nvPr/>
+        </p:nvPicPr>
+        <p:blipFill>
+          <a:blip r:embed="rId2"/>
+          <a:stretch>
+            <a:fillRect/>
+          </a:stretch>
+        </p:blipFill>
+        <p:spPr>
+          <a:xfrm>
+            <a:off x="2498750" y="4535221"/>
+            <a:ext cx="163982" cy="163982"/>
+          </a:xfrm>
+          <a:prstGeom prst="rect">
+            <a:avLst/>
+          </a:prstGeom>
+        </p:spPr>
+      </p:pic>
+      <p:sp>
+        <p:nvSpPr>
+          <p:cNvPr id="53" name="chip-text-465"/>
+          <p:cNvSpPr txBox="1"/>
+          <p:nvPr/>
+        </p:nvSpPr>
+        <p:spPr>
+          <a:xfrm>
+            <a:off x="2726741" y="4480560"/>
+            <a:ext cx="1127760" cy="273304"/>
+          </a:xfrm>
+          <a:prstGeom prst="rect">
+            <a:avLst/>
+          </a:prstGeom>
+          <a:noFill/>
+          <a:ln/>
+        </p:spPr>
+        <p:txBody>
+          <a:bodyPr wrap="square" lIns="0" tIns="0" rIns="0" bIns="0" rtlCol="0" anchor="ctr"/>
+          <a:lstStyle/>
+          <a:p>
+            <a:pPr indent="0" marL="0">
+              <a:buNone/>
+            </a:pPr>
+            <a:r>
+              <a:rPr lang="zh-TW" altLang="en-US" sz="1000" b="1" dirty="0">
+                <a:solidFill>
+                  <a:schemeClr val="bg1"/>
+                </a:solidFill>
+              </a:rPr>
+              <a:t>候選 LIVE_PASS</a:t>
+            </a:r>
+            <a:endParaRPr lang="zh-TW" sz="1000" dirty="0"/>
+          </a:p>
+        </p:txBody>
+      </p:sp>
+      <p:sp>
+        <p:nvSpPr>
+          <p:cNvPr id="54" name="text-466"/>
+          <p:cNvSpPr txBox="1"/>
+          <p:nvPr/>
+        </p:nvSpPr>
+        <p:spPr>
+          <a:xfrm>
+            <a:off x="804672" y="4873752"/>
+            <a:ext cx="3063240" cy="594360"/>
+          </a:xfrm>
+          <a:prstGeom prst="rect">
+            <a:avLst/>
+          </a:prstGeom>
+          <a:noFill/>
+          <a:ln/>
+        </p:spPr>
+        <p:txBody>
+          <a:bodyPr wrap="square" lIns="0" tIns="0" rIns="0" bIns="0" rtlCol="0" anchor="t"/>
+          <a:lstStyle/>
+          <a:p>
+            <a:pPr indent="0" marL="0">
+              <a:buNone/>
+            </a:pPr>
+            <a:r>
+              <a:rPr lang="zh-TW" altLang="en-US" sz="1300" dirty="0">
+                <a:solidFill>
+                  <a:schemeClr val="tx1"/>
+                </a:solidFill>
+              </a:rPr>
+              <a:t>草稿 A 都直接通過，候選沒有多呼叫；但 7 項預期都只中 6 項。</a:t>
+            </a:r>
+            <a:endParaRPr lang="zh-TW" sz="1300" dirty="0"/>
+          </a:p>
+        </p:txBody>
+      </p:sp>
+      <p:sp>
+        <p:nvSpPr>
+          <p:cNvPr id="55" name="card-467"/>
+          <p:cNvSpPr/>
+          <p:nvPr/>
+        </p:nvSpPr>
+        <p:spPr>
+          <a:xfrm>
+            <a:off x="4334256" y="3913632"/>
+            <a:ext cx="3520440" cy="1645920"/>
+          </a:xfrm>
+          <a:prstGeom prst="roundRect">
+            <a:avLst>
+              <a:gd name="adj" fmla="val 4444"/>
+            </a:avLst>
+          </a:prstGeom>
+          <a:solidFill>
+            <a:schemeClr val="bg1"/>
+          </a:solidFill>
+          <a:ln w="12700">
+            <a:solidFill>
+              <a:schemeClr val="bg2"/>
+            </a:solidFill>
+            <a:prstDash val="solid"/>
+          </a:ln>
+          <a:effectLst>
+            <a:outerShdw sx="100000" sy="100000" kx="0" ky="0" algn="bl" rotWithShape="0" blurRad="127000" dist="25400" dir="5400000">
+              <a:srgbClr val="1A2233">
+                <a:alpha val="10000"/>
+              </a:srgbClr>
+            </a:outerShdw>
+          </a:effectLst>
+        </p:spPr>
+      </p:sp>
+      <p:sp>
+        <p:nvSpPr>
+          <p:cNvPr id="56" name="text-468"/>
+          <p:cNvSpPr txBox="1"/>
+          <p:nvPr/>
+        </p:nvSpPr>
+        <p:spPr>
+          <a:xfrm>
+            <a:off x="4590288" y="4050792"/>
+            <a:ext cx="3017520" cy="329184"/>
+          </a:xfrm>
+          <a:prstGeom prst="rect">
+            <a:avLst/>
+          </a:prstGeom>
+          <a:noFill/>
+          <a:ln/>
+        </p:spPr>
+        <p:txBody>
+          <a:bodyPr wrap="square" lIns="0" tIns="0" rIns="0" bIns="0" rtlCol="0" anchor="ctr"/>
+          <a:lstStyle/>
+          <a:p>
+            <a:pPr indent="0" marL="0">
+              <a:buNone/>
+            </a:pPr>
+            <a:r>
+              <a:rPr lang="zh-TW" altLang="en-US" sz="1600" b="1" dirty="0">
+                <a:solidFill>
+                  <a:schemeClr val="tx1"/>
+                </a:solidFill>
+              </a:rPr>
+              <a:t>gpt-4.1-mini · 兩輪</a:t>
+            </a:r>
+            <a:endParaRPr lang="zh-TW" sz="1600" dirty="0"/>
+          </a:p>
+        </p:txBody>
+      </p:sp>
+      <p:sp>
+        <p:nvSpPr>
+          <p:cNvPr id="57" name="chip-fail-469"/>
+          <p:cNvSpPr/>
+          <p:nvPr/>
+        </p:nvSpPr>
+        <p:spPr>
+          <a:xfrm>
+            <a:off x="4590288" y="4480560"/>
+            <a:ext cx="1474622" cy="273304"/>
+          </a:xfrm>
+          <a:prstGeom prst="roundRect">
+            <a:avLst>
+              <a:gd name="adj" fmla="val 50000"/>
+            </a:avLst>
+          </a:prstGeom>
+          <a:solidFill>
+            <a:schemeClr val="accent5"/>
+          </a:solidFill>
+          <a:ln/>
+        </p:spPr>
+      </p:sp>
+      <p:pic>
+        <p:nvPicPr>
+          <p:cNvPr id="58" name="chip-icon-470" descr="原版 LIVE_FAIL">    </p:cNvPr>
+          <p:cNvPicPr>
+            <a:picLocks noChangeAspect="1"/>
+          </p:cNvPicPr>
+          <p:nvPr/>
+        </p:nvPicPr>
+        <p:blipFill>
+          <a:blip r:embed="rId3"/>
+          <a:stretch>
+            <a:fillRect/>
+          </a:stretch>
+        </p:blipFill>
+        <p:spPr>
+          <a:xfrm>
+            <a:off x="4700016" y="4535221"/>
+            <a:ext cx="163982" cy="163982"/>
+          </a:xfrm>
+          <a:prstGeom prst="rect">
+            <a:avLst/>
+          </a:prstGeom>
+        </p:spPr>
+      </p:pic>
+      <p:sp>
+        <p:nvSpPr>
+          <p:cNvPr id="59" name="chip-text-471"/>
+          <p:cNvSpPr txBox="1"/>
+          <p:nvPr/>
+        </p:nvSpPr>
+        <p:spPr>
+          <a:xfrm>
+            <a:off x="4928006" y="4480560"/>
+            <a:ext cx="1127760" cy="273304"/>
+          </a:xfrm>
+          <a:prstGeom prst="rect">
+            <a:avLst/>
+          </a:prstGeom>
+          <a:noFill/>
+          <a:ln/>
+        </p:spPr>
+        <p:txBody>
+          <a:bodyPr wrap="square" lIns="0" tIns="0" rIns="0" bIns="0" rtlCol="0" anchor="ctr"/>
+          <a:lstStyle/>
+          <a:p>
+            <a:pPr indent="0" marL="0">
+              <a:buNone/>
+            </a:pPr>
+            <a:r>
+              <a:rPr lang="zh-TW" altLang="en-US" sz="1000" b="1" dirty="0">
+                <a:solidFill>
+                  <a:schemeClr val="bg1"/>
+                </a:solidFill>
+              </a:rPr>
+              <a:t>原版 LIVE_FAIL</a:t>
+            </a:r>
+            <a:endParaRPr lang="zh-TW" sz="1000" dirty="0"/>
+          </a:p>
+        </p:txBody>
+      </p:sp>
+      <p:sp>
+        <p:nvSpPr>
+          <p:cNvPr id="60" name="chip-fail-472"/>
+          <p:cNvSpPr/>
+          <p:nvPr/>
+        </p:nvSpPr>
+        <p:spPr>
+          <a:xfrm>
+            <a:off x="6174638" y="4480560"/>
+            <a:ext cx="1474622" cy="273304"/>
+          </a:xfrm>
+          <a:prstGeom prst="roundRect">
+            <a:avLst>
+              <a:gd name="adj" fmla="val 50000"/>
+            </a:avLst>
+          </a:prstGeom>
+          <a:solidFill>
+            <a:schemeClr val="accent5"/>
+          </a:solidFill>
+          <a:ln/>
+        </p:spPr>
+      </p:sp>
+      <p:pic>
+        <p:nvPicPr>
+          <p:cNvPr id="61" name="chip-icon-473" descr="候選 LIVE_FAIL">    </p:cNvPr>
+          <p:cNvPicPr>
+            <a:picLocks noChangeAspect="1"/>
+          </p:cNvPicPr>
+          <p:nvPr/>
+        </p:nvPicPr>
+        <p:blipFill>
+          <a:blip r:embed="rId4"/>
+          <a:stretch>
+            <a:fillRect/>
+          </a:stretch>
+        </p:blipFill>
+        <p:spPr>
+          <a:xfrm>
+            <a:off x="6284366" y="4535221"/>
+            <a:ext cx="163982" cy="163982"/>
+          </a:xfrm>
+          <a:prstGeom prst="rect">
+            <a:avLst/>
+          </a:prstGeom>
+        </p:spPr>
+      </p:pic>
+      <p:sp>
+        <p:nvSpPr>
+          <p:cNvPr id="62" name="chip-text-474"/>
+          <p:cNvSpPr txBox="1"/>
+          <p:nvPr/>
+        </p:nvSpPr>
+        <p:spPr>
+          <a:xfrm>
+            <a:off x="6512357" y="4480560"/>
+            <a:ext cx="1127760" cy="273304"/>
+          </a:xfrm>
+          <a:prstGeom prst="rect">
+            <a:avLst/>
+          </a:prstGeom>
+          <a:noFill/>
+          <a:ln/>
+        </p:spPr>
+        <p:txBody>
+          <a:bodyPr wrap="square" lIns="0" tIns="0" rIns="0" bIns="0" rtlCol="0" anchor="ctr"/>
+          <a:lstStyle/>
+          <a:p>
+            <a:pPr indent="0" marL="0">
+              <a:buNone/>
+            </a:pPr>
+            <a:r>
+              <a:rPr lang="zh-TW" altLang="en-US" sz="1000" b="1" dirty="0">
+                <a:solidFill>
+                  <a:schemeClr val="bg1"/>
+                </a:solidFill>
+              </a:rPr>
+              <a:t>候選 LIVE_FAIL</a:t>
+            </a:r>
+            <a:endParaRPr lang="zh-TW" sz="1000" dirty="0"/>
+          </a:p>
+        </p:txBody>
+      </p:sp>
+      <p:sp>
+        <p:nvSpPr>
+          <p:cNvPr id="63" name="text-475"/>
+          <p:cNvSpPr txBox="1"/>
+          <p:nvPr/>
+        </p:nvSpPr>
+        <p:spPr>
+          <a:xfrm>
+            <a:off x="4590288" y="4873752"/>
+            <a:ext cx="3063240" cy="594360"/>
+          </a:xfrm>
+          <a:prstGeom prst="rect">
+            <a:avLst/>
+          </a:prstGeom>
+          <a:noFill/>
+          <a:ln/>
+        </p:spPr>
+        <p:txBody>
+          <a:bodyPr wrap="square" lIns="0" tIns="0" rIns="0" bIns="0" rtlCol="0" anchor="t"/>
+          <a:lstStyle/>
+          <a:p>
+            <a:pPr indent="0" marL="0">
+              <a:buNone/>
+            </a:pPr>
+            <a:r>
+              <a:rPr lang="zh-TW" altLang="en-US" sz="1300" dirty="0">
+                <a:solidFill>
+                  <a:schemeClr val="tx1"/>
+                </a:solidFill>
+              </a:rPr>
+              <a:t>候選的修訂稿兩次都與 A 逐字相同，到上限停止；tokens 約 2.3 倍。</a:t>
+            </a:r>
+            <a:endParaRPr lang="zh-TW" sz="1300" dirty="0"/>
+          </a:p>
+        </p:txBody>
+      </p:sp>
+      <p:sp>
+        <p:nvSpPr>
+          <p:cNvPr id="64" name="card-476"/>
+          <p:cNvSpPr/>
+          <p:nvPr/>
+        </p:nvSpPr>
+        <p:spPr>
+          <a:xfrm>
+            <a:off x="8119872" y="3913632"/>
+            <a:ext cx="3520440" cy="1645920"/>
+          </a:xfrm>
+          <a:prstGeom prst="roundRect">
+            <a:avLst>
+              <a:gd name="adj" fmla="val 4444"/>
+            </a:avLst>
+          </a:prstGeom>
+          <a:solidFill>
+            <a:schemeClr val="bg1"/>
+          </a:solidFill>
+          <a:ln w="12700">
+            <a:solidFill>
+              <a:schemeClr val="bg2"/>
+            </a:solidFill>
+            <a:prstDash val="solid"/>
+          </a:ln>
+          <a:effectLst>
+            <a:outerShdw sx="100000" sy="100000" kx="0" ky="0" algn="bl" rotWithShape="0" blurRad="127000" dist="25400" dir="5400000">
+              <a:srgbClr val="1A2233">
+                <a:alpha val="10000"/>
+              </a:srgbClr>
+            </a:outerShdw>
+          </a:effectLst>
+        </p:spPr>
+      </p:sp>
+      <p:sp>
+        <p:nvSpPr>
+          <p:cNvPr id="65" name="text-477"/>
+          <p:cNvSpPr txBox="1"/>
+          <p:nvPr/>
+        </p:nvSpPr>
+        <p:spPr>
+          <a:xfrm>
+            <a:off x="8375904" y="4050792"/>
+            <a:ext cx="3017520" cy="329184"/>
+          </a:xfrm>
+          <a:prstGeom prst="rect">
+            <a:avLst/>
+          </a:prstGeom>
+          <a:noFill/>
+          <a:ln/>
+        </p:spPr>
+        <p:txBody>
+          <a:bodyPr wrap="square" lIns="0" tIns="0" rIns="0" bIns="0" rtlCol="0" anchor="ctr"/>
+          <a:lstStyle/>
+          <a:p>
+            <a:pPr indent="0" marL="0">
+              <a:buNone/>
+            </a:pPr>
+            <a:r>
+              <a:rPr lang="zh-TW" altLang="en-US" sz="1600" b="1" dirty="0">
+                <a:solidFill>
+                  <a:schemeClr val="tx1"/>
+                </a:solidFill>
+              </a:rPr>
+              <a:t>離線 15 個案例</a:t>
+            </a:r>
+            <a:endParaRPr lang="zh-TW" sz="1600" dirty="0"/>
+          </a:p>
+        </p:txBody>
+      </p:sp>
+      <p:sp>
+        <p:nvSpPr>
+          <p:cNvPr id="66" name="chip-met-478"/>
+          <p:cNvSpPr/>
+          <p:nvPr/>
+        </p:nvSpPr>
+        <p:spPr>
+          <a:xfrm>
+            <a:off x="8375904" y="4480560"/>
+            <a:ext cx="1487322" cy="273304"/>
+          </a:xfrm>
+          <a:prstGeom prst="roundRect">
+            <a:avLst>
+              <a:gd name="adj" fmla="val 50000"/>
+            </a:avLst>
+          </a:prstGeom>
+          <a:solidFill>
+            <a:schemeClr val="accent2"/>
+          </a:solidFill>
+          <a:ln/>
+        </p:spPr>
+      </p:sp>
+      <p:pic>
+        <p:nvPicPr>
+          <p:cNvPr id="67" name="chip-icon-479" descr="15／15 符合預期">    </p:cNvPr>
           <p:cNvPicPr>
             <a:picLocks noChangeAspect="1"/>
           </p:cNvPicPr>
@@ -8837,8 +10256,8 @@
         </p:blipFill>
         <p:spPr>
           <a:xfrm>
-            <a:off x="6291072" y="3950208"/>
-            <a:ext cx="256032" cy="256032"/>
+            <a:off x="8485632" y="4535221"/>
+            <a:ext cx="163982" cy="163982"/>
           </a:xfrm>
           <a:prstGeom prst="rect">
             <a:avLst/>
@@ -8847,14 +10266,14 @@
       </p:pic>
       <p:sp>
         <p:nvSpPr>
-          <p:cNvPr id="26" name="text-437"/>
-          <p:cNvSpPr txBox="1"/>
-          <p:nvPr/>
-        </p:nvSpPr>
-        <p:spPr>
-          <a:xfrm>
-            <a:off x="6675120" y="3858768"/>
-            <a:ext cx="2240280" cy="438912"/>
+          <p:cNvPr id="68" name="chip-text-480"/>
+          <p:cNvSpPr txBox="1"/>
+          <p:nvPr/>
+        </p:nvSpPr>
+        <p:spPr>
+          <a:xfrm>
+            <a:off x="8713622" y="4480560"/>
+            <a:ext cx="1140460" cy="273304"/>
           </a:xfrm>
           <a:prstGeom prst="rect">
             <a:avLst/>
@@ -8870,63 +10289,63 @@
               <a:buNone/>
             </a:pPr>
             <a:r>
-              <a:rPr lang="zh-TW" altLang="en-US" sz="1400" b="1" dirty="0">
+              <a:rPr lang="zh-TW" altLang="en-US" sz="1000" b="1" dirty="0">
+                <a:solidFill>
+                  <a:schemeClr val="bg1"/>
+                </a:solidFill>
+              </a:rPr>
+              <a:t>15／15 符合預期</a:t>
+            </a:r>
+            <a:endParaRPr lang="zh-TW" sz="1000" dirty="0"/>
+          </a:p>
+        </p:txBody>
+      </p:sp>
+      <p:sp>
+        <p:nvSpPr>
+          <p:cNvPr id="69" name="text-481"/>
+          <p:cNvSpPr txBox="1"/>
+          <p:nvPr/>
+        </p:nvSpPr>
+        <p:spPr>
+          <a:xfrm>
+            <a:off x="8375904" y="4873752"/>
+            <a:ext cx="3063240" cy="594360"/>
+          </a:xfrm>
+          <a:prstGeom prst="rect">
+            <a:avLst/>
+          </a:prstGeom>
+          <a:noFill/>
+          <a:ln/>
+        </p:spPr>
+        <p:txBody>
+          <a:bodyPr wrap="square" lIns="0" tIns="0" rIns="0" bIns="0" rtlCol="0" anchor="t"/>
+          <a:lstStyle/>
+          <a:p>
+            <a:pPr indent="0" marL="0">
+              <a:buNone/>
+            </a:pPr>
+            <a:r>
+              <a:rPr lang="zh-TW" altLang="en-US" sz="1300" dirty="0">
                 <a:solidFill>
                   <a:schemeClr val="tx1"/>
                 </a:solidFill>
               </a:rPr>
-              <a:t>同 ID 重送</a:t>
-            </a:r>
-            <a:endParaRPr lang="zh-TW" sz="1400" dirty="0"/>
-          </a:p>
-        </p:txBody>
-      </p:sp>
-      <p:sp>
-        <p:nvSpPr>
-          <p:cNvPr id="27" name="text-438"/>
-          <p:cNvSpPr txBox="1"/>
-          <p:nvPr/>
-        </p:nvSpPr>
-        <p:spPr>
-          <a:xfrm>
-            <a:off x="8915400" y="3858768"/>
-            <a:ext cx="1828800" cy="438912"/>
-          </a:xfrm>
-          <a:prstGeom prst="rect">
-            <a:avLst/>
-          </a:prstGeom>
-          <a:noFill/>
-          <a:ln/>
-        </p:spPr>
-        <p:txBody>
-          <a:bodyPr wrap="square" lIns="0" tIns="0" rIns="0" bIns="0" rtlCol="0" anchor="ctr"/>
-          <a:lstStyle/>
-          <a:p>
-            <a:pPr indent="0" marL="0">
-              <a:buNone/>
-            </a:pPr>
-            <a:r>
-              <a:rPr lang="zh-TW" altLang="en-US" sz="1200" dirty="0">
-                <a:solidFill>
-                  <a:schemeClr val="tx1"/>
-                </a:solidFill>
-              </a:rPr>
-              <a:t>確認後與重送都是 1 份</a:t>
-            </a:r>
-            <a:endParaRPr lang="zh-TW" sz="1200" dirty="0"/>
-          </a:p>
-        </p:txBody>
-      </p:sp>
-      <p:sp>
-        <p:nvSpPr>
-          <p:cNvPr id="28" name="tag-439"/>
-          <p:cNvSpPr/>
-          <p:nvPr/>
-        </p:nvSpPr>
-        <p:spPr>
-          <a:xfrm>
-            <a:off x="11068050" y="3950208"/>
-            <a:ext cx="480822" cy="249428"/>
+              <a:t>修訂後通過、到上限停止、檔案放反不修訂、改標推測被拒。</a:t>
+            </a:r>
+            <a:endParaRPr lang="zh-TW" sz="1300" dirty="0"/>
+          </a:p>
+        </p:txBody>
+      </p:sp>
+      <p:sp>
+        <p:nvSpPr>
+          <p:cNvPr id="70" name="chip-pending-482"/>
+          <p:cNvSpPr/>
+          <p:nvPr/>
+        </p:nvSpPr>
+        <p:spPr>
+          <a:xfrm>
+            <a:off x="548640" y="5760720"/>
+            <a:ext cx="1497482" cy="311404"/>
           </a:xfrm>
           <a:prstGeom prst="roundRect">
             <a:avLst>
@@ -8934,75 +10353,14 @@
             </a:avLst>
           </a:prstGeom>
           <a:solidFill>
-            <a:schemeClr val="bg1"/>
-          </a:solidFill>
-          <a:ln w="12700">
-            <a:solidFill>
-              <a:schemeClr val="accent4"/>
-            </a:solidFill>
-            <a:prstDash val="solid"/>
-          </a:ln>
-        </p:spPr>
-      </p:sp>
-      <p:sp>
-        <p:nvSpPr>
-          <p:cNvPr id="29" name="tag-text-440"/>
-          <p:cNvSpPr txBox="1"/>
-          <p:nvPr/>
-        </p:nvSpPr>
-        <p:spPr>
-          <a:xfrm>
-            <a:off x="11068050" y="3950208"/>
-            <a:ext cx="480822" cy="249428"/>
-          </a:xfrm>
-          <a:prstGeom prst="rect">
-            <a:avLst/>
-          </a:prstGeom>
-          <a:noFill/>
-          <a:ln/>
-        </p:spPr>
-        <p:txBody>
-          <a:bodyPr wrap="square" lIns="0" tIns="0" rIns="0" bIns="0" rtlCol="0" anchor="ctr"/>
-          <a:lstStyle/>
-          <a:p>
-            <a:pPr algn="ctr" indent="0" marL="0">
-              <a:buNone/>
-            </a:pPr>
-            <a:r>
-              <a:rPr lang="zh-TW" altLang="en-US" sz="1100" b="1" dirty="0">
-                <a:solidFill>
-                  <a:schemeClr val="accent4"/>
-                </a:solidFill>
-              </a:rPr>
-              <a:t>GPT</a:t>
-            </a:r>
-            <a:endParaRPr lang="zh-TW" sz="1100" dirty="0"/>
-          </a:p>
-        </p:txBody>
-      </p:sp>
-      <p:sp>
-        <p:nvSpPr>
-          <p:cNvPr id="30" name="row-bg-441"/>
-          <p:cNvSpPr/>
-          <p:nvPr/>
-        </p:nvSpPr>
-        <p:spPr>
-          <a:xfrm>
-            <a:off x="6172200" y="4389120"/>
-            <a:ext cx="5468112" cy="548640"/>
-          </a:xfrm>
-          <a:prstGeom prst="rect">
-            <a:avLst/>
-          </a:prstGeom>
-          <a:solidFill>
-            <a:schemeClr val="bg2"/>
+            <a:schemeClr val="accent3"/>
           </a:solidFill>
           <a:ln/>
         </p:spPr>
       </p:sp>
       <p:pic>
         <p:nvPicPr>
-          <p:cNvPr id="31" name="icon-442" descr="CircleCheck">    </p:cNvPr>
+          <p:cNvPr id="71" name="chip-icon-483" descr="尚未證明改善">    </p:cNvPr>
           <p:cNvPicPr>
             <a:picLocks noChangeAspect="1"/>
           </p:cNvPicPr>
@@ -9016,8 +10374,8 @@
         </p:blipFill>
         <p:spPr>
           <a:xfrm>
-            <a:off x="6291072" y="4535424"/>
-            <a:ext cx="256032" cy="256032"/>
+            <a:off x="658368" y="5823001"/>
+            <a:ext cx="186842" cy="186842"/>
           </a:xfrm>
           <a:prstGeom prst="rect">
             <a:avLst/>
@@ -9026,14 +10384,14 @@
       </p:pic>
       <p:sp>
         <p:nvSpPr>
-          <p:cNvPr id="32" name="text-443"/>
-          <p:cNvSpPr txBox="1"/>
-          <p:nvPr/>
-        </p:nvSpPr>
-        <p:spPr>
-          <a:xfrm>
-            <a:off x="6675120" y="4443984"/>
-            <a:ext cx="2240280" cy="438912"/>
+          <p:cNvPr id="72" name="chip-text-484"/>
+          <p:cNvSpPr txBox="1"/>
+          <p:nvPr/>
+        </p:nvSpPr>
+        <p:spPr>
+          <a:xfrm>
+            <a:off x="909218" y="5760720"/>
+            <a:ext cx="1127760" cy="311404"/>
           </a:xfrm>
           <a:prstGeom prst="rect">
             <a:avLst/>
@@ -9049,308 +10407,50 @@
               <a:buNone/>
             </a:pPr>
             <a:r>
+              <a:rPr lang="zh-TW" altLang="en-US" sz="1300" b="1" dirty="0">
+                <a:solidFill>
+                  <a:schemeClr val="bg1"/>
+                </a:solidFill>
+              </a:rPr>
+              <a:t>尚未證明改善</a:t>
+            </a:r>
+            <a:endParaRPr lang="zh-TW" sz="1300" dirty="0"/>
+          </a:p>
+        </p:txBody>
+      </p:sp>
+      <p:sp>
+        <p:nvSpPr>
+          <p:cNvPr id="73" name="text-485"/>
+          <p:cNvSpPr txBox="1"/>
+          <p:nvPr/>
+        </p:nvSpPr>
+        <p:spPr>
+          <a:xfrm>
+            <a:off x="2229002" y="5733288"/>
+            <a:ext cx="9411310" cy="365760"/>
+          </a:xfrm>
+          <a:prstGeom prst="rect">
+            <a:avLst/>
+          </a:prstGeom>
+          <a:noFill/>
+          <a:ln/>
+        </p:spPr>
+        <p:txBody>
+          <a:bodyPr wrap="square" lIns="0" tIns="0" rIns="0" bIns="0" rtlCol="0" anchor="ctr"/>
+          <a:lstStyle/>
+          <a:p>
+            <a:pPr indent="0" marL="0">
+              <a:buNone/>
+            </a:pPr>
+            <a:r>
               <a:rPr lang="zh-TW" altLang="en-US" sz="1400" b="1" dirty="0">
                 <a:solidFill>
                   <a:schemeClr val="tx1"/>
                 </a:solidFill>
               </a:rPr>
-              <a:t>非法參數、429</a:t>
+              <a:t>預設維持原版，候選可在工作台切換。下一步：把草稿 A 改放在 user 訊息再重測。</a:t>
             </a:r>
             <a:endParaRPr lang="zh-TW" sz="1400" dirty="0"/>
-          </a:p>
-        </p:txBody>
-      </p:sp>
-      <p:sp>
-        <p:nvSpPr>
-          <p:cNvPr id="33" name="text-444"/>
-          <p:cNvSpPr txBox="1"/>
-          <p:nvPr/>
-        </p:nvSpPr>
-        <p:spPr>
-          <a:xfrm>
-            <a:off x="8915400" y="4443984"/>
-            <a:ext cx="1828800" cy="438912"/>
-          </a:xfrm>
-          <a:prstGeom prst="rect">
-            <a:avLst/>
-          </a:prstGeom>
-          <a:noFill/>
-          <a:ln/>
-        </p:spPr>
-        <p:txBody>
-          <a:bodyPr wrap="square" lIns="0" tIns="0" rIns="0" bIns="0" rtlCol="0" anchor="ctr"/>
-          <a:lstStyle/>
-          <a:p>
-            <a:pPr indent="0" marL="0">
-              <a:buNone/>
-            </a:pPr>
-            <a:r>
-              <a:rPr lang="zh-TW" altLang="en-US" sz="1200" dirty="0">
-                <a:solidFill>
-                  <a:schemeClr val="tx1"/>
-                </a:solidFill>
-              </a:rPr>
-              <a:t>有限停止，不新增草稿</a:t>
-            </a:r>
-            <a:endParaRPr lang="zh-TW" sz="1200" dirty="0"/>
-          </a:p>
-        </p:txBody>
-      </p:sp>
-      <p:sp>
-        <p:nvSpPr>
-          <p:cNvPr id="34" name="tag-445"/>
-          <p:cNvSpPr/>
-          <p:nvPr/>
-        </p:nvSpPr>
-        <p:spPr>
-          <a:xfrm>
-            <a:off x="10752328" y="4535424"/>
-            <a:ext cx="796544" cy="249428"/>
-          </a:xfrm>
-          <a:prstGeom prst="roundRect">
-            <a:avLst>
-              <a:gd name="adj" fmla="val 50000"/>
-            </a:avLst>
-          </a:prstGeom>
-          <a:solidFill>
-            <a:schemeClr val="bg1"/>
-          </a:solidFill>
-          <a:ln w="12700">
-            <a:solidFill>
-              <a:schemeClr val="accent3"/>
-            </a:solidFill>
-            <a:prstDash val="solid"/>
-          </a:ln>
-        </p:spPr>
-      </p:sp>
-      <p:sp>
-        <p:nvSpPr>
-          <p:cNvPr id="35" name="tag-text-446"/>
-          <p:cNvSpPr txBox="1"/>
-          <p:nvPr/>
-        </p:nvSpPr>
-        <p:spPr>
-          <a:xfrm>
-            <a:off x="10752328" y="4535424"/>
-            <a:ext cx="796544" cy="249428"/>
-          </a:xfrm>
-          <a:prstGeom prst="rect">
-            <a:avLst/>
-          </a:prstGeom>
-          <a:noFill/>
-          <a:ln/>
-        </p:spPr>
-        <p:txBody>
-          <a:bodyPr wrap="square" lIns="0" tIns="0" rIns="0" bIns="0" rtlCol="0" anchor="ctr"/>
-          <a:lstStyle/>
-          <a:p>
-            <a:pPr algn="ctr" indent="0" marL="0">
-              <a:buNone/>
-            </a:pPr>
-            <a:r>
-              <a:rPr lang="zh-TW" altLang="en-US" sz="1100" b="1" dirty="0">
-                <a:solidFill>
-                  <a:schemeClr val="accent3"/>
-                </a:solidFill>
-              </a:rPr>
-              <a:t>故障注入</a:t>
-            </a:r>
-            <a:endParaRPr lang="zh-TW" sz="1100" dirty="0"/>
-          </a:p>
-        </p:txBody>
-      </p:sp>
-      <p:pic>
-        <p:nvPicPr>
-          <p:cNvPr id="36" name="icon-447" descr="CircleCheck">    </p:cNvPr>
-          <p:cNvPicPr>
-            <a:picLocks noChangeAspect="1"/>
-          </p:cNvPicPr>
-          <p:nvPr/>
-        </p:nvPicPr>
-        <p:blipFill>
-          <a:blip r:embed="rId7"/>
-          <a:stretch>
-            <a:fillRect/>
-          </a:stretch>
-        </p:blipFill>
-        <p:spPr>
-          <a:xfrm>
-            <a:off x="6291072" y="5120640"/>
-            <a:ext cx="256032" cy="256032"/>
-          </a:xfrm>
-          <a:prstGeom prst="rect">
-            <a:avLst/>
-          </a:prstGeom>
-        </p:spPr>
-      </p:pic>
-      <p:sp>
-        <p:nvSpPr>
-          <p:cNvPr id="37" name="text-448"/>
-          <p:cNvSpPr txBox="1"/>
-          <p:nvPr/>
-        </p:nvSpPr>
-        <p:spPr>
-          <a:xfrm>
-            <a:off x="6675120" y="5029200"/>
-            <a:ext cx="2240280" cy="438912"/>
-          </a:xfrm>
-          <a:prstGeom prst="rect">
-            <a:avLst/>
-          </a:prstGeom>
-          <a:noFill/>
-          <a:ln/>
-        </p:spPr>
-        <p:txBody>
-          <a:bodyPr wrap="square" lIns="0" tIns="0" rIns="0" bIns="0" rtlCol="0" anchor="ctr"/>
-          <a:lstStyle/>
-          <a:p>
-            <a:pPr indent="0" marL="0">
-              <a:buNone/>
-            </a:pPr>
-            <a:r>
-              <a:rPr lang="zh-TW" altLang="en-US" sz="1400" b="1" dirty="0">
-                <a:solidFill>
-                  <a:schemeClr val="tx1"/>
-                </a:solidFill>
-              </a:rPr>
-              <a:t>PDF 錯誤引用、無配分</a:t>
-            </a:r>
-            <a:endParaRPr lang="zh-TW" sz="1400" dirty="0"/>
-          </a:p>
-        </p:txBody>
-      </p:sp>
-      <p:sp>
-        <p:nvSpPr>
-          <p:cNvPr id="38" name="text-449"/>
-          <p:cNvSpPr txBox="1"/>
-          <p:nvPr/>
-        </p:nvSpPr>
-        <p:spPr>
-          <a:xfrm>
-            <a:off x="8915400" y="5029200"/>
-            <a:ext cx="1828800" cy="438912"/>
-          </a:xfrm>
-          <a:prstGeom prst="rect">
-            <a:avLst/>
-          </a:prstGeom>
-          <a:noFill/>
-          <a:ln/>
-        </p:spPr>
-        <p:txBody>
-          <a:bodyPr wrap="square" lIns="0" tIns="0" rIns="0" bIns="0" rtlCol="0" anchor="ctr"/>
-          <a:lstStyle/>
-          <a:p>
-            <a:pPr indent="0" marL="0">
-              <a:buNone/>
-            </a:pPr>
-            <a:r>
-              <a:rPr lang="zh-TW" altLang="en-US" sz="1200" dirty="0">
-                <a:solidFill>
-                  <a:schemeClr val="tx1"/>
-                </a:solidFill>
-              </a:rPr>
-              <a:t>拒絕輸出、不估分</a:t>
-            </a:r>
-            <a:endParaRPr lang="zh-TW" sz="1200" dirty="0"/>
-          </a:p>
-        </p:txBody>
-      </p:sp>
-      <p:sp>
-        <p:nvSpPr>
-          <p:cNvPr id="39" name="tag-450"/>
-          <p:cNvSpPr/>
-          <p:nvPr/>
-        </p:nvSpPr>
-        <p:spPr>
-          <a:xfrm>
-            <a:off x="11031728" y="5120640"/>
-            <a:ext cx="517144" cy="249428"/>
-          </a:xfrm>
-          <a:prstGeom prst="roundRect">
-            <a:avLst>
-              <a:gd name="adj" fmla="val 50000"/>
-            </a:avLst>
-          </a:prstGeom>
-          <a:solidFill>
-            <a:schemeClr val="bg1"/>
-          </a:solidFill>
-          <a:ln w="12700">
-            <a:solidFill>
-              <a:schemeClr val="accent6"/>
-            </a:solidFill>
-            <a:prstDash val="solid"/>
-          </a:ln>
-        </p:spPr>
-      </p:sp>
-      <p:sp>
-        <p:nvSpPr>
-          <p:cNvPr id="40" name="tag-text-451"/>
-          <p:cNvSpPr txBox="1"/>
-          <p:nvPr/>
-        </p:nvSpPr>
-        <p:spPr>
-          <a:xfrm>
-            <a:off x="11031728" y="5120640"/>
-            <a:ext cx="517144" cy="249428"/>
-          </a:xfrm>
-          <a:prstGeom prst="rect">
-            <a:avLst/>
-          </a:prstGeom>
-          <a:noFill/>
-          <a:ln/>
-        </p:spPr>
-        <p:txBody>
-          <a:bodyPr wrap="square" lIns="0" tIns="0" rIns="0" bIns="0" rtlCol="0" anchor="ctr"/>
-          <a:lstStyle/>
-          <a:p>
-            <a:pPr algn="ctr" indent="0" marL="0">
-              <a:buNone/>
-            </a:pPr>
-            <a:r>
-              <a:rPr lang="zh-TW" altLang="en-US" sz="1100" b="1" dirty="0">
-                <a:solidFill>
-                  <a:schemeClr val="accent6"/>
-                </a:solidFill>
-              </a:rPr>
-              <a:t>離線</a:t>
-            </a:r>
-            <a:endParaRPr lang="zh-TW" sz="1100" dirty="0"/>
-          </a:p>
-        </p:txBody>
-      </p:sp>
-      <p:sp>
-        <p:nvSpPr>
-          <p:cNvPr id="41" name="text-452"/>
-          <p:cNvSpPr txBox="1"/>
-          <p:nvPr/>
-        </p:nvSpPr>
-        <p:spPr>
-          <a:xfrm>
-            <a:off x="6172200" y="5715000"/>
-            <a:ext cx="5468112" cy="365760"/>
-          </a:xfrm>
-          <a:prstGeom prst="rect">
-            <a:avLst/>
-          </a:prstGeom>
-          <a:noFill/>
-          <a:ln/>
-        </p:spPr>
-        <p:txBody>
-          <a:bodyPr wrap="square" lIns="0" tIns="0" rIns="0" bIns="0" rtlCol="0" anchor="ctr"/>
-          <a:lstStyle/>
-          <a:p>
-            <a:pPr indent="0" marL="0">
-              <a:buNone/>
-            </a:pPr>
-            <a:r>
-              <a:rPr lang="zh-TW" altLang="en-US" sz="1300" dirty="0">
-                <a:solidFill>
-                  <a:schemeClr val="accent6"/>
-                </a:solidFill>
-              </a:rPr>
-              <a:t>Week 7 真實呼叫：14 次模型回覆、18,296 tokens（用量，不是帳單）</a:t>
-            </a:r>
-            <a:endParaRPr lang="zh-TW" sz="1300" dirty="0"/>
           </a:p>
         </p:txBody>
       </p:sp>
@@ -9456,7 +10556,7 @@
                   <a:schemeClr val="accent6"/>
                 </a:solidFill>
               </a:rPr>
-              <a:t>原版 vs Session 候選 · 同輸入、同模型、同來源</a:t>
+              <a:t>驗證</a:t>
             </a:r>
             <a:endParaRPr lang="zh-TW" sz="1300" dirty="0"/>
           </a:p>
@@ -9494,22 +10594,38 @@
                   <a:schemeClr val="tx1"/>
                 </a:solidFill>
               </a:rPr>
-              <a:t>保留一個真實失敗：模型略過了草稿提案</a:t>
+              <a:t>回歸測試從 107 項成長到 213 項</a:t>
             </a:r>
             <a:endParaRPr lang="zh-TW" sz="3000" dirty="0"/>
           </a:p>
         </p:txBody>
       </p:sp>
-      <p:sp>
-        <p:nvSpPr>
-          <p:cNvPr id="5" name="text-453"/>
-          <p:cNvSpPr txBox="1"/>
-          <p:nvPr/>
-        </p:nvSpPr>
-        <p:spPr>
-          <a:xfrm>
-            <a:off x="548640" y="1554480"/>
-            <a:ext cx="10972800" cy="310896"/>
+      <p:graphicFrame>
+        <p:nvGraphicFramePr>
+          <p:cNvPr id="5" name="tests-chart" descr=""/>
+          <p:cNvGraphicFramePr/>
+          <p:nvPr/>
+        </p:nvGraphicFramePr>
+        <p:xfrm>
+          <a:off x="548640" y="1554480"/>
+          <a:ext cx="5120640" cy="3977640"/>
+        </p:xfrm>
+        <a:graphic xmlns:a="http://schemas.openxmlformats.org/drawingml/2006/main">
+          <a:graphicData uri="http://schemas.openxmlformats.org/drawingml/2006/chart">
+            <c:chart xmlns:c="http://schemas.openxmlformats.org/drawingml/2006/chart" r:id="rId1"/>
+          </a:graphicData>
+        </a:graphic>
+      </p:graphicFrame>
+      <p:sp>
+        <p:nvSpPr>
+          <p:cNvPr id="6" name="text-486"/>
+          <p:cNvSpPr txBox="1"/>
+          <p:nvPr/>
+        </p:nvSpPr>
+        <p:spPr>
+          <a:xfrm>
+            <a:off x="548640" y="5577840"/>
+            <a:ext cx="5120640" cy="548640"/>
           </a:xfrm>
           <a:prstGeom prst="rect">
             <a:avLst/>
@@ -9525,516 +10641,90 @@
               <a:buNone/>
             </a:pPr>
             <a:r>
-              <a:rPr lang="zh-TW" altLang="en-US" sz="1400" dirty="0">
+              <a:rPr lang="zh-TW" altLang="en-US" sz="1300" dirty="0">
                 <a:solidFill>
                   <a:schemeClr val="accent6"/>
                 </a:solidFill>
               </a:rPr>
-              <a:t>兩者的檢索與引用 gate 都是 ready，且使用同一個 evidence hash。</a:t>
-            </a:r>
-            <a:endParaRPr lang="zh-TW" sz="1400" dirty="0"/>
-          </a:p>
-        </p:txBody>
-      </p:sp>
-      <p:sp>
-        <p:nvSpPr>
-          <p:cNvPr id="6" name="card-454"/>
-          <p:cNvSpPr/>
-          <p:nvPr/>
-        </p:nvSpPr>
-        <p:spPr>
-          <a:xfrm>
-            <a:off x="548640" y="2011680"/>
-            <a:ext cx="5394960" cy="2880360"/>
-          </a:xfrm>
-          <a:prstGeom prst="roundRect">
-            <a:avLst>
-              <a:gd name="adj" fmla="val 2540"/>
-            </a:avLst>
+              <a:t>v0.8 新增 30 項 PDF 測試，W6（10/30 補交）再加 35 項。</a:t>
+            </a:r>
+            <a:endParaRPr lang="zh-TW" sz="1300" dirty="0"/>
+          </a:p>
+          <a:p>
+            <a:pPr indent="0" marL="0">
+              <a:buNone/>
+            </a:pPr>
+            <a:r>
+              <a:rPr lang="zh-TW" altLang="en-US" sz="1300" dirty="0">
+                <a:solidFill>
+                  <a:schemeClr val="accent6"/>
+                </a:solidFill>
+              </a:rPr>
+              <a:t>全部是離線與故障注入，不等於真實模型準確率。</a:t>
+            </a:r>
+            <a:endParaRPr lang="zh-TW" sz="1300" dirty="0"/>
+          </a:p>
+        </p:txBody>
+      </p:sp>
+      <p:sp>
+        <p:nvSpPr>
+          <p:cNvPr id="7" name="text-487"/>
+          <p:cNvSpPr txBox="1"/>
+          <p:nvPr/>
+        </p:nvSpPr>
+        <p:spPr>
+          <a:xfrm>
+            <a:off x="6172200" y="1600200"/>
+            <a:ext cx="5486400" cy="347472"/>
+          </a:xfrm>
+          <a:prstGeom prst="rect">
+            <a:avLst/>
+          </a:prstGeom>
+          <a:noFill/>
+          <a:ln/>
+        </p:spPr>
+        <p:txBody>
+          <a:bodyPr wrap="square" lIns="0" tIns="0" rIns="0" bIns="0" rtlCol="0" anchor="t"/>
+          <a:lstStyle/>
+          <a:p>
+            <a:pPr indent="0" marL="0">
+              <a:buNone/>
+            </a:pPr>
+            <a:r>
+              <a:rPr lang="zh-TW" altLang="en-US" sz="1700" b="1" dirty="0">
+                <a:solidFill>
+                  <a:schemeClr val="tx1"/>
+                </a:solidFill>
+              </a:rPr>
+              <a:t>關鍵案例：預期與實際一致</a:t>
+            </a:r>
+            <a:endParaRPr lang="zh-TW" sz="1700" dirty="0"/>
+          </a:p>
+        </p:txBody>
+      </p:sp>
+      <p:sp>
+        <p:nvSpPr>
+          <p:cNvPr id="8" name="row-bg-488"/>
+          <p:cNvSpPr/>
+          <p:nvPr/>
+        </p:nvSpPr>
+        <p:spPr>
+          <a:xfrm>
+            <a:off x="6172200" y="2048256"/>
+            <a:ext cx="5468112" cy="548640"/>
+          </a:xfrm>
+          <a:prstGeom prst="rect">
+            <a:avLst/>
           </a:prstGeom>
           <a:solidFill>
-            <a:schemeClr val="bg1"/>
-          </a:solidFill>
-          <a:ln w="12700">
-            <a:solidFill>
-              <a:schemeClr val="bg2"/>
-            </a:solidFill>
-            <a:prstDash val="solid"/>
-          </a:ln>
-          <a:effectLst>
-            <a:outerShdw sx="100000" sy="100000" kx="0" ky="0" algn="bl" rotWithShape="0" blurRad="127000" dist="25400" dir="5400000">
-              <a:srgbClr val="1A2233">
-                <a:alpha val="10000"/>
-              </a:srgbClr>
-            </a:outerShdw>
-          </a:effectLst>
-        </p:spPr>
-      </p:sp>
-      <p:sp>
-        <p:nvSpPr>
-          <p:cNvPr id="7" name="text-455"/>
-          <p:cNvSpPr txBox="1"/>
-          <p:nvPr/>
-        </p:nvSpPr>
-        <p:spPr>
-          <a:xfrm>
-            <a:off x="868680" y="2212848"/>
-            <a:ext cx="2743200" cy="402336"/>
-          </a:xfrm>
-          <a:prstGeom prst="rect">
-            <a:avLst/>
-          </a:prstGeom>
-          <a:noFill/>
-          <a:ln/>
-        </p:spPr>
-        <p:txBody>
-          <a:bodyPr wrap="square" lIns="0" tIns="0" rIns="0" bIns="0" rtlCol="0" anchor="ctr"/>
-          <a:lstStyle/>
-          <a:p>
-            <a:pPr indent="0" marL="0">
-              <a:buNone/>
-            </a:pPr>
-            <a:r>
-              <a:rPr lang="zh-TW" altLang="en-US" sz="2100" b="1" dirty="0">
-                <a:solidFill>
-                  <a:schemeClr val="tx1"/>
-                </a:solidFill>
-              </a:rPr>
-              <a:t>原版</a:t>
-            </a:r>
-            <a:endParaRPr lang="zh-TW" sz="2100" dirty="0"/>
-          </a:p>
-        </p:txBody>
-      </p:sp>
-      <p:sp>
-        <p:nvSpPr>
-          <p:cNvPr id="8" name="chip-fail-456"/>
-          <p:cNvSpPr/>
-          <p:nvPr/>
-        </p:nvSpPr>
-        <p:spPr>
-          <a:xfrm>
-            <a:off x="4258818" y="2258568"/>
-            <a:ext cx="1368704" cy="311404"/>
-          </a:xfrm>
-          <a:prstGeom prst="roundRect">
-            <a:avLst>
-              <a:gd name="adj" fmla="val 50000"/>
-            </a:avLst>
-          </a:prstGeom>
-          <a:solidFill>
-            <a:schemeClr val="accent5"/>
+            <a:schemeClr val="bg2"/>
           </a:solidFill>
           <a:ln/>
         </p:spPr>
       </p:sp>
       <p:pic>
         <p:nvPicPr>
-          <p:cNvPr id="9" name="chip-icon-457" descr="LIVE_FAIL">    </p:cNvPr>
-          <p:cNvPicPr>
-            <a:picLocks noChangeAspect="1"/>
-          </p:cNvPicPr>
-          <p:nvPr/>
-        </p:nvPicPr>
-        <p:blipFill>
-          <a:blip r:embed="rId1"/>
-          <a:stretch>
-            <a:fillRect/>
-          </a:stretch>
-        </p:blipFill>
-        <p:spPr>
-          <a:xfrm>
-            <a:off x="4368546" y="2320849"/>
-            <a:ext cx="186842" cy="186842"/>
-          </a:xfrm>
-          <a:prstGeom prst="rect">
-            <a:avLst/>
-          </a:prstGeom>
-        </p:spPr>
-      </p:pic>
-      <p:sp>
-        <p:nvSpPr>
-          <p:cNvPr id="10" name="chip-text-458"/>
-          <p:cNvSpPr txBox="1"/>
-          <p:nvPr/>
-        </p:nvSpPr>
-        <p:spPr>
-          <a:xfrm>
-            <a:off x="4619396" y="2258568"/>
-            <a:ext cx="998982" cy="311404"/>
-          </a:xfrm>
-          <a:prstGeom prst="rect">
-            <a:avLst/>
-          </a:prstGeom>
-          <a:noFill/>
-          <a:ln/>
-        </p:spPr>
-        <p:txBody>
-          <a:bodyPr wrap="square" lIns="0" tIns="0" rIns="0" bIns="0" rtlCol="0" anchor="ctr"/>
-          <a:lstStyle/>
-          <a:p>
-            <a:pPr indent="0" marL="0">
-              <a:buNone/>
-            </a:pPr>
-            <a:r>
-              <a:rPr lang="zh-TW" altLang="en-US" sz="1300" b="1" dirty="0">
-                <a:solidFill>
-                  <a:schemeClr val="bg1"/>
-                </a:solidFill>
-              </a:rPr>
-              <a:t>LIVE_FAIL</a:t>
-            </a:r>
-            <a:endParaRPr lang="zh-TW" sz="1300" dirty="0"/>
-          </a:p>
-        </p:txBody>
-      </p:sp>
-      <p:sp>
-        <p:nvSpPr>
-          <p:cNvPr id="11" name="text-459"/>
-          <p:cNvSpPr txBox="1"/>
-          <p:nvPr/>
-        </p:nvSpPr>
-        <p:spPr>
-          <a:xfrm>
-            <a:off x="868680" y="2743200"/>
-            <a:ext cx="4754880" cy="822960"/>
-          </a:xfrm>
-          <a:prstGeom prst="rect">
-            <a:avLst/>
-          </a:prstGeom>
-          <a:noFill/>
-          <a:ln/>
-        </p:spPr>
-        <p:txBody>
-          <a:bodyPr wrap="square" lIns="0" tIns="0" rIns="0" bIns="0" rtlCol="0" anchor="t"/>
-          <a:lstStyle/>
-          <a:p>
-            <a:pPr indent="0" marL="0">
-              <a:buNone/>
-            </a:pPr>
-            <a:r>
-              <a:rPr lang="zh-TW" altLang="en-US" sz="1500" dirty="0">
-                <a:solidFill>
-                  <a:schemeClr val="tx1"/>
-                </a:solidFill>
-              </a:rPr>
-              <a:t>讀取後直接回答，跳過提案工具；Host 以 UNEXPECTED_TOOL_SEQUENCE 擋下，未寫入。</a:t>
-            </a:r>
-            <a:endParaRPr lang="zh-TW" sz="1500" dirty="0"/>
-          </a:p>
-        </p:txBody>
-      </p:sp>
-      <p:sp>
-        <p:nvSpPr>
-          <p:cNvPr id="12" name="text-460"/>
-          <p:cNvSpPr txBox="1"/>
-          <p:nvPr/>
-        </p:nvSpPr>
-        <p:spPr>
-          <a:xfrm>
-            <a:off x="868680" y="3611880"/>
-            <a:ext cx="1554480" cy="548640"/>
-          </a:xfrm>
-          <a:prstGeom prst="rect">
-            <a:avLst/>
-          </a:prstGeom>
-          <a:noFill/>
-          <a:ln/>
-        </p:spPr>
-        <p:txBody>
-          <a:bodyPr wrap="square" lIns="0" tIns="0" rIns="0" bIns="0" rtlCol="0" anchor="b"/>
-          <a:lstStyle/>
-          <a:p>
-            <a:pPr indent="0" marL="0">
-              <a:buNone/>
-            </a:pPr>
-            <a:r>
-              <a:rPr lang="zh-TW" altLang="en-US" sz="2800" b="1" dirty="0">
-                <a:solidFill>
-                  <a:schemeClr val="accent5"/>
-                </a:solidFill>
-              </a:rPr>
-              <a:t>2</a:t>
-            </a:r>
-            <a:endParaRPr lang="zh-TW" sz="2800" dirty="0"/>
-          </a:p>
-        </p:txBody>
-      </p:sp>
-      <p:sp>
-        <p:nvSpPr>
-          <p:cNvPr id="13" name="text-461"/>
-          <p:cNvSpPr txBox="1"/>
-          <p:nvPr/>
-        </p:nvSpPr>
-        <p:spPr>
-          <a:xfrm>
-            <a:off x="868680" y="4206240"/>
-            <a:ext cx="1554480" cy="274320"/>
-          </a:xfrm>
-          <a:prstGeom prst="rect">
-            <a:avLst/>
-          </a:prstGeom>
-          <a:noFill/>
-          <a:ln/>
-        </p:spPr>
-        <p:txBody>
-          <a:bodyPr wrap="square" lIns="0" tIns="0" rIns="0" bIns="0" rtlCol="0" anchor="t"/>
-          <a:lstStyle/>
-          <a:p>
-            <a:pPr indent="0" marL="0">
-              <a:buNone/>
-            </a:pPr>
-            <a:r>
-              <a:rPr lang="zh-TW" altLang="en-US" sz="1200" dirty="0">
-                <a:solidFill>
-                  <a:schemeClr val="accent6"/>
-                </a:solidFill>
-              </a:rPr>
-              <a:t>次模型回覆</a:t>
-            </a:r>
-            <a:endParaRPr lang="zh-TW" sz="1200" dirty="0"/>
-          </a:p>
-        </p:txBody>
-      </p:sp>
-      <p:sp>
-        <p:nvSpPr>
-          <p:cNvPr id="14" name="text-462"/>
-          <p:cNvSpPr txBox="1"/>
-          <p:nvPr/>
-        </p:nvSpPr>
-        <p:spPr>
-          <a:xfrm>
-            <a:off x="2468880" y="3611880"/>
-            <a:ext cx="1554480" cy="548640"/>
-          </a:xfrm>
-          <a:prstGeom prst="rect">
-            <a:avLst/>
-          </a:prstGeom>
-          <a:noFill/>
-          <a:ln/>
-        </p:spPr>
-        <p:txBody>
-          <a:bodyPr wrap="square" lIns="0" tIns="0" rIns="0" bIns="0" rtlCol="0" anchor="b"/>
-          <a:lstStyle/>
-          <a:p>
-            <a:pPr indent="0" marL="0">
-              <a:buNone/>
-            </a:pPr>
-            <a:r>
-              <a:rPr lang="zh-TW" altLang="en-US" sz="2800" b="1" dirty="0">
-                <a:solidFill>
-                  <a:schemeClr val="accent5"/>
-                </a:solidFill>
-              </a:rPr>
-              <a:t>2,133</a:t>
-            </a:r>
-            <a:endParaRPr lang="zh-TW" sz="2800" dirty="0"/>
-          </a:p>
-        </p:txBody>
-      </p:sp>
-      <p:sp>
-        <p:nvSpPr>
-          <p:cNvPr id="15" name="text-463"/>
-          <p:cNvSpPr txBox="1"/>
-          <p:nvPr/>
-        </p:nvSpPr>
-        <p:spPr>
-          <a:xfrm>
-            <a:off x="2468880" y="4206240"/>
-            <a:ext cx="1554480" cy="274320"/>
-          </a:xfrm>
-          <a:prstGeom prst="rect">
-            <a:avLst/>
-          </a:prstGeom>
-          <a:noFill/>
-          <a:ln/>
-        </p:spPr>
-        <p:txBody>
-          <a:bodyPr wrap="square" lIns="0" tIns="0" rIns="0" bIns="0" rtlCol="0" anchor="t"/>
-          <a:lstStyle/>
-          <a:p>
-            <a:pPr indent="0" marL="0">
-              <a:buNone/>
-            </a:pPr>
-            <a:r>
-              <a:rPr lang="zh-TW" altLang="en-US" sz="1200" dirty="0">
-                <a:solidFill>
-                  <a:schemeClr val="accent6"/>
-                </a:solidFill>
-              </a:rPr>
-              <a:t>tokens</a:t>
-            </a:r>
-            <a:endParaRPr lang="zh-TW" sz="1200" dirty="0"/>
-          </a:p>
-        </p:txBody>
-      </p:sp>
-      <p:sp>
-        <p:nvSpPr>
-          <p:cNvPr id="16" name="text-464"/>
-          <p:cNvSpPr txBox="1"/>
-          <p:nvPr/>
-        </p:nvSpPr>
-        <p:spPr>
-          <a:xfrm>
-            <a:off x="4069080" y="3611880"/>
-            <a:ext cx="1554480" cy="548640"/>
-          </a:xfrm>
-          <a:prstGeom prst="rect">
-            <a:avLst/>
-          </a:prstGeom>
-          <a:noFill/>
-          <a:ln/>
-        </p:spPr>
-        <p:txBody>
-          <a:bodyPr wrap="square" lIns="0" tIns="0" rIns="0" bIns="0" rtlCol="0" anchor="b"/>
-          <a:lstStyle/>
-          <a:p>
-            <a:pPr indent="0" marL="0">
-              <a:buNone/>
-            </a:pPr>
-            <a:r>
-              <a:rPr lang="zh-TW" altLang="en-US" sz="2800" b="1" dirty="0">
-                <a:solidFill>
-                  <a:schemeClr val="accent5"/>
-                </a:solidFill>
-              </a:rPr>
-              <a:t>6.518 s</a:t>
-            </a:r>
-            <a:endParaRPr lang="zh-TW" sz="2800" dirty="0"/>
-          </a:p>
-        </p:txBody>
-      </p:sp>
-      <p:sp>
-        <p:nvSpPr>
-          <p:cNvPr id="17" name="text-465"/>
-          <p:cNvSpPr txBox="1"/>
-          <p:nvPr/>
-        </p:nvSpPr>
-        <p:spPr>
-          <a:xfrm>
-            <a:off x="4069080" y="4206240"/>
-            <a:ext cx="1554480" cy="274320"/>
-          </a:xfrm>
-          <a:prstGeom prst="rect">
-            <a:avLst/>
-          </a:prstGeom>
-          <a:noFill/>
-          <a:ln/>
-        </p:spPr>
-        <p:txBody>
-          <a:bodyPr wrap="square" lIns="0" tIns="0" rIns="0" bIns="0" rtlCol="0" anchor="t"/>
-          <a:lstStyle/>
-          <a:p>
-            <a:pPr indent="0" marL="0">
-              <a:buNone/>
-            </a:pPr>
-            <a:r>
-              <a:rPr lang="zh-TW" altLang="en-US" sz="1200" dirty="0">
-                <a:solidFill>
-                  <a:schemeClr val="accent6"/>
-                </a:solidFill>
-              </a:rPr>
-              <a:t>觀測時間</a:t>
-            </a:r>
-            <a:endParaRPr lang="zh-TW" sz="1200" dirty="0"/>
-          </a:p>
-        </p:txBody>
-      </p:sp>
-      <p:sp>
-        <p:nvSpPr>
-          <p:cNvPr id="18" name="card-466"/>
-          <p:cNvSpPr/>
-          <p:nvPr/>
-        </p:nvSpPr>
-        <p:spPr>
-          <a:xfrm>
-            <a:off x="6245352" y="2011680"/>
-            <a:ext cx="5394960" cy="2880360"/>
-          </a:xfrm>
-          <a:prstGeom prst="roundRect">
-            <a:avLst>
-              <a:gd name="adj" fmla="val 2540"/>
-            </a:avLst>
-          </a:prstGeom>
-          <a:solidFill>
-            <a:schemeClr val="bg1"/>
-          </a:solidFill>
-          <a:ln w="12700">
-            <a:solidFill>
-              <a:schemeClr val="bg2"/>
-            </a:solidFill>
-            <a:prstDash val="solid"/>
-          </a:ln>
-          <a:effectLst>
-            <a:outerShdw sx="100000" sy="100000" kx="0" ky="0" algn="bl" rotWithShape="0" blurRad="127000" dist="25400" dir="5400000">
-              <a:srgbClr val="1A2233">
-                <a:alpha val="10000"/>
-              </a:srgbClr>
-            </a:outerShdw>
-          </a:effectLst>
-        </p:spPr>
-      </p:sp>
-      <p:sp>
-        <p:nvSpPr>
-          <p:cNvPr id="19" name="text-467"/>
-          <p:cNvSpPr txBox="1"/>
-          <p:nvPr/>
-        </p:nvSpPr>
-        <p:spPr>
-          <a:xfrm>
-            <a:off x="6565392" y="2212848"/>
-            <a:ext cx="2743200" cy="402336"/>
-          </a:xfrm>
-          <a:prstGeom prst="rect">
-            <a:avLst/>
-          </a:prstGeom>
-          <a:noFill/>
-          <a:ln/>
-        </p:spPr>
-        <p:txBody>
-          <a:bodyPr wrap="square" lIns="0" tIns="0" rIns="0" bIns="0" rtlCol="0" anchor="ctr"/>
-          <a:lstStyle/>
-          <a:p>
-            <a:pPr indent="0" marL="0">
-              <a:buNone/>
-            </a:pPr>
-            <a:r>
-              <a:rPr lang="zh-TW" altLang="en-US" sz="2100" b="1" dirty="0">
-                <a:solidFill>
-                  <a:schemeClr val="tx1"/>
-                </a:solidFill>
-              </a:rPr>
-              <a:t>Session 候選</a:t>
-            </a:r>
-            <a:endParaRPr lang="zh-TW" sz="2100" dirty="0"/>
-          </a:p>
-        </p:txBody>
-      </p:sp>
-      <p:sp>
-        <p:nvSpPr>
-          <p:cNvPr id="20" name="chip-pass-468"/>
-          <p:cNvSpPr/>
-          <p:nvPr/>
-        </p:nvSpPr>
-        <p:spPr>
-          <a:xfrm>
-            <a:off x="9955530" y="2258568"/>
-            <a:ext cx="1368704" cy="311404"/>
-          </a:xfrm>
-          <a:prstGeom prst="roundRect">
-            <a:avLst>
-              <a:gd name="adj" fmla="val 50000"/>
-            </a:avLst>
-          </a:prstGeom>
-          <a:solidFill>
-            <a:schemeClr val="accent2"/>
-          </a:solidFill>
-          <a:ln/>
-        </p:spPr>
-      </p:sp>
-      <p:pic>
-        <p:nvPicPr>
-          <p:cNvPr id="21" name="chip-icon-469" descr="LIVE_PASS">    </p:cNvPr>
+          <p:cNvPr id="9" name="icon-489" descr="CircleCheck">    </p:cNvPr>
           <p:cNvPicPr>
             <a:picLocks noChangeAspect="1"/>
           </p:cNvPicPr>
@@ -10048,8 +10738,8 @@
         </p:blipFill>
         <p:spPr>
           <a:xfrm>
-            <a:off x="10065258" y="2320849"/>
-            <a:ext cx="186842" cy="186842"/>
+            <a:off x="6291072" y="2194560"/>
+            <a:ext cx="256032" cy="256032"/>
           </a:xfrm>
           <a:prstGeom prst="rect">
             <a:avLst/>
@@ -10058,14 +10748,14 @@
       </p:pic>
       <p:sp>
         <p:nvSpPr>
-          <p:cNvPr id="22" name="chip-text-470"/>
-          <p:cNvSpPr txBox="1"/>
-          <p:nvPr/>
-        </p:nvSpPr>
-        <p:spPr>
-          <a:xfrm>
-            <a:off x="10316108" y="2258568"/>
-            <a:ext cx="998982" cy="311404"/>
+          <p:cNvPr id="10" name="text-490"/>
+          <p:cNvSpPr txBox="1"/>
+          <p:nvPr/>
+        </p:nvSpPr>
+        <p:spPr>
+          <a:xfrm>
+            <a:off x="6675120" y="2103120"/>
+            <a:ext cx="2240280" cy="438912"/>
           </a:xfrm>
           <a:prstGeom prst="rect">
             <a:avLst/>
@@ -10081,108 +10771,36 @@
               <a:buNone/>
             </a:pPr>
             <a:r>
-              <a:rPr lang="zh-TW" altLang="en-US" sz="1300" b="1" dirty="0">
-                <a:solidFill>
-                  <a:schemeClr val="bg1"/>
-                </a:solidFill>
-              </a:rPr>
-              <a:t>LIVE_PASS</a:t>
-            </a:r>
-            <a:endParaRPr lang="zh-TW" sz="1300" dirty="0"/>
-          </a:p>
-        </p:txBody>
-      </p:sp>
-      <p:sp>
-        <p:nvSpPr>
-          <p:cNvPr id="23" name="text-471"/>
-          <p:cNvSpPr txBox="1"/>
-          <p:nvPr/>
-        </p:nvSpPr>
-        <p:spPr>
-          <a:xfrm>
-            <a:off x="6565392" y="2743200"/>
-            <a:ext cx="4754880" cy="822960"/>
-          </a:xfrm>
-          <a:prstGeom prst="rect">
-            <a:avLst/>
-          </a:prstGeom>
-          <a:noFill/>
-          <a:ln/>
-        </p:spPr>
-        <p:txBody>
-          <a:bodyPr wrap="square" lIns="0" tIns="0" rIns="0" bIns="0" rtlCol="0" anchor="t"/>
-          <a:lstStyle/>
-          <a:p>
-            <a:pPr indent="0" marL="0">
-              <a:buNone/>
-            </a:pPr>
-            <a:r>
-              <a:rPr lang="zh-TW" altLang="en-US" sz="1500" dirty="0">
+              <a:rPr lang="zh-TW" altLang="en-US" sz="1400" b="1" dirty="0">
                 <a:solidFill>
                   <a:schemeClr val="tx1"/>
                 </a:solidFill>
               </a:rPr>
-              <a:t>依序提案、等待確認，使用者確認後完成草稿。</a:t>
-            </a:r>
-            <a:endParaRPr lang="zh-TW" sz="1500" dirty="0"/>
-          </a:p>
-        </p:txBody>
-      </p:sp>
-      <p:sp>
-        <p:nvSpPr>
-          <p:cNvPr id="24" name="text-472"/>
-          <p:cNvSpPr txBox="1"/>
-          <p:nvPr/>
-        </p:nvSpPr>
-        <p:spPr>
-          <a:xfrm>
-            <a:off x="6565392" y="3611880"/>
-            <a:ext cx="1554480" cy="548640"/>
-          </a:xfrm>
-          <a:prstGeom prst="rect">
-            <a:avLst/>
-          </a:prstGeom>
-          <a:noFill/>
-          <a:ln/>
-        </p:spPr>
-        <p:txBody>
-          <a:bodyPr wrap="square" lIns="0" tIns="0" rIns="0" bIns="0" rtlCol="0" anchor="b"/>
-          <a:lstStyle/>
-          <a:p>
-            <a:pPr indent="0" marL="0">
-              <a:buNone/>
-            </a:pPr>
-            <a:r>
-              <a:rPr lang="zh-TW" altLang="en-US" sz="2800" b="1" dirty="0">
-                <a:solidFill>
-                  <a:schemeClr val="accent2"/>
-                </a:solidFill>
-              </a:rPr>
-              <a:t>3</a:t>
-            </a:r>
-            <a:endParaRPr lang="zh-TW" sz="2800" dirty="0"/>
-          </a:p>
-        </p:txBody>
-      </p:sp>
-      <p:sp>
-        <p:nvSpPr>
-          <p:cNvPr id="25" name="text-473"/>
-          <p:cNvSpPr txBox="1"/>
-          <p:nvPr/>
-        </p:nvSpPr>
-        <p:spPr>
-          <a:xfrm>
-            <a:off x="6565392" y="4206240"/>
-            <a:ext cx="1554480" cy="274320"/>
-          </a:xfrm>
-          <a:prstGeom prst="rect">
-            <a:avLst/>
-          </a:prstGeom>
-          <a:noFill/>
-          <a:ln/>
-        </p:spPr>
-        <p:txBody>
-          <a:bodyPr wrap="square" lIns="0" tIns="0" rIns="0" bIns="0" rtlCol="0" anchor="t"/>
+              <a:t>同 Session 續問</a:t>
+            </a:r>
+            <a:endParaRPr lang="zh-TW" sz="1400" dirty="0"/>
+          </a:p>
+        </p:txBody>
+      </p:sp>
+      <p:sp>
+        <p:nvSpPr>
+          <p:cNvPr id="11" name="text-491"/>
+          <p:cNvSpPr txBox="1"/>
+          <p:nvPr/>
+        </p:nvSpPr>
+        <p:spPr>
+          <a:xfrm>
+            <a:off x="8915400" y="2103120"/>
+            <a:ext cx="1828800" cy="438912"/>
+          </a:xfrm>
+          <a:prstGeom prst="rect">
+            <a:avLst/>
+          </a:prstGeom>
+          <a:noFill/>
+          <a:ln/>
+        </p:spPr>
+        <p:txBody>
+          <a:bodyPr wrap="square" lIns="0" tIns="0" rIns="0" bIns="0" rtlCol="0" anchor="ctr"/>
           <a:lstStyle/>
           <a:p>
             <a:pPr indent="0" marL="0">
@@ -10191,10 +10809,10 @@
             <a:r>
               <a:rPr lang="zh-TW" altLang="en-US" sz="1200" dirty="0">
                 <a:solidFill>
-                  <a:schemeClr val="accent6"/>
-                </a:solidFill>
-              </a:rPr>
-              <a:t>次模型回覆</a:t>
+                  <a:schemeClr val="tx1"/>
+                </a:solidFill>
+              </a:rPr>
+              <a:t>帶入該 Session 的摘要</a:t>
             </a:r>
             <a:endParaRPr lang="zh-TW" sz="1200" dirty="0"/>
           </a:p>
@@ -10202,151 +10820,70 @@
       </p:sp>
       <p:sp>
         <p:nvSpPr>
-          <p:cNvPr id="26" name="text-474"/>
-          <p:cNvSpPr txBox="1"/>
-          <p:nvPr/>
-        </p:nvSpPr>
-        <p:spPr>
-          <a:xfrm>
-            <a:off x="8165592" y="3611880"/>
-            <a:ext cx="1554480" cy="548640"/>
-          </a:xfrm>
-          <a:prstGeom prst="rect">
-            <a:avLst/>
-          </a:prstGeom>
-          <a:noFill/>
-          <a:ln/>
-        </p:spPr>
-        <p:txBody>
-          <a:bodyPr wrap="square" lIns="0" tIns="0" rIns="0" bIns="0" rtlCol="0" anchor="b"/>
-          <a:lstStyle/>
-          <a:p>
-            <a:pPr indent="0" marL="0">
-              <a:buNone/>
-            </a:pPr>
-            <a:r>
-              <a:rPr lang="zh-TW" altLang="en-US" sz="2800" b="1" dirty="0">
-                <a:solidFill>
-                  <a:schemeClr val="accent2"/>
-                </a:solidFill>
-              </a:rPr>
-              <a:t>4,352</a:t>
-            </a:r>
-            <a:endParaRPr lang="zh-TW" sz="2800" dirty="0"/>
-          </a:p>
-        </p:txBody>
-      </p:sp>
-      <p:sp>
-        <p:nvSpPr>
-          <p:cNvPr id="27" name="text-475"/>
-          <p:cNvSpPr txBox="1"/>
-          <p:nvPr/>
-        </p:nvSpPr>
-        <p:spPr>
-          <a:xfrm>
-            <a:off x="8165592" y="4206240"/>
-            <a:ext cx="1554480" cy="274320"/>
-          </a:xfrm>
-          <a:prstGeom prst="rect">
-            <a:avLst/>
-          </a:prstGeom>
-          <a:noFill/>
-          <a:ln/>
-        </p:spPr>
-        <p:txBody>
-          <a:bodyPr wrap="square" lIns="0" tIns="0" rIns="0" bIns="0" rtlCol="0" anchor="t"/>
-          <a:lstStyle/>
-          <a:p>
-            <a:pPr indent="0" marL="0">
-              <a:buNone/>
-            </a:pPr>
-            <a:r>
-              <a:rPr lang="zh-TW" altLang="en-US" sz="1200" dirty="0">
-                <a:solidFill>
-                  <a:schemeClr val="accent6"/>
-                </a:solidFill>
-              </a:rPr>
-              <a:t>tokens</a:t>
-            </a:r>
-            <a:endParaRPr lang="zh-TW" sz="1200" dirty="0"/>
-          </a:p>
-        </p:txBody>
-      </p:sp>
-      <p:sp>
-        <p:nvSpPr>
-          <p:cNvPr id="28" name="text-476"/>
-          <p:cNvSpPr txBox="1"/>
-          <p:nvPr/>
-        </p:nvSpPr>
-        <p:spPr>
-          <a:xfrm>
-            <a:off x="9765792" y="3611880"/>
-            <a:ext cx="1554480" cy="548640"/>
-          </a:xfrm>
-          <a:prstGeom prst="rect">
-            <a:avLst/>
-          </a:prstGeom>
-          <a:noFill/>
-          <a:ln/>
-        </p:spPr>
-        <p:txBody>
-          <a:bodyPr wrap="square" lIns="0" tIns="0" rIns="0" bIns="0" rtlCol="0" anchor="b"/>
-          <a:lstStyle/>
-          <a:p>
-            <a:pPr indent="0" marL="0">
-              <a:buNone/>
-            </a:pPr>
-            <a:r>
-              <a:rPr lang="zh-TW" altLang="en-US" sz="2800" b="1" dirty="0">
-                <a:solidFill>
-                  <a:schemeClr val="accent2"/>
-                </a:solidFill>
-              </a:rPr>
-              <a:t>5.183 s</a:t>
-            </a:r>
-            <a:endParaRPr lang="zh-TW" sz="2800" dirty="0"/>
-          </a:p>
-        </p:txBody>
-      </p:sp>
-      <p:sp>
-        <p:nvSpPr>
-          <p:cNvPr id="29" name="text-477"/>
-          <p:cNvSpPr txBox="1"/>
-          <p:nvPr/>
-        </p:nvSpPr>
-        <p:spPr>
-          <a:xfrm>
-            <a:off x="9765792" y="4206240"/>
-            <a:ext cx="1554480" cy="274320"/>
-          </a:xfrm>
-          <a:prstGeom prst="rect">
-            <a:avLst/>
-          </a:prstGeom>
-          <a:noFill/>
-          <a:ln/>
-        </p:spPr>
-        <p:txBody>
-          <a:bodyPr wrap="square" lIns="0" tIns="0" rIns="0" bIns="0" rtlCol="0" anchor="t"/>
-          <a:lstStyle/>
-          <a:p>
-            <a:pPr indent="0" marL="0">
-              <a:buNone/>
-            </a:pPr>
-            <a:r>
-              <a:rPr lang="zh-TW" altLang="en-US" sz="1200" dirty="0">
-                <a:solidFill>
-                  <a:schemeClr val="accent6"/>
-                </a:solidFill>
-              </a:rPr>
-              <a:t>觀測時間</a:t>
-            </a:r>
-            <a:endParaRPr lang="zh-TW" sz="1200" dirty="0"/>
+          <p:cNvPr id="12" name="tag-492"/>
+          <p:cNvSpPr/>
+          <p:nvPr/>
+        </p:nvSpPr>
+        <p:spPr>
+          <a:xfrm>
+            <a:off x="11068050" y="2194560"/>
+            <a:ext cx="480822" cy="249428"/>
+          </a:xfrm>
+          <a:prstGeom prst="roundRect">
+            <a:avLst>
+              <a:gd name="adj" fmla="val 50000"/>
+            </a:avLst>
+          </a:prstGeom>
+          <a:solidFill>
+            <a:schemeClr val="bg1"/>
+          </a:solidFill>
+          <a:ln w="12700">
+            <a:solidFill>
+              <a:schemeClr val="accent4"/>
+            </a:solidFill>
+            <a:prstDash val="solid"/>
+          </a:ln>
+        </p:spPr>
+      </p:sp>
+      <p:sp>
+        <p:nvSpPr>
+          <p:cNvPr id="13" name="tag-text-493"/>
+          <p:cNvSpPr txBox="1"/>
+          <p:nvPr/>
+        </p:nvSpPr>
+        <p:spPr>
+          <a:xfrm>
+            <a:off x="11068050" y="2194560"/>
+            <a:ext cx="480822" cy="249428"/>
+          </a:xfrm>
+          <a:prstGeom prst="rect">
+            <a:avLst/>
+          </a:prstGeom>
+          <a:noFill/>
+          <a:ln/>
+        </p:spPr>
+        <p:txBody>
+          <a:bodyPr wrap="square" lIns="0" tIns="0" rIns="0" bIns="0" rtlCol="0" anchor="ctr"/>
+          <a:lstStyle/>
+          <a:p>
+            <a:pPr algn="ctr" indent="0" marL="0">
+              <a:buNone/>
+            </a:pPr>
+            <a:r>
+              <a:rPr lang="zh-TW" altLang="en-US" sz="1100" b="1" dirty="0">
+                <a:solidFill>
+                  <a:schemeClr val="accent4"/>
+                </a:solidFill>
+              </a:rPr>
+              <a:t>GPT</a:t>
+            </a:r>
+            <a:endParaRPr lang="zh-TW" sz="1100" dirty="0"/>
           </a:p>
         </p:txBody>
       </p:sp>
       <p:pic>
         <p:nvPicPr>
-          <p:cNvPr id="30" name="icon-478" descr="TriangleAlert">    </p:cNvPr>
+          <p:cNvPr id="14" name="icon-494" descr="CircleCheck">    </p:cNvPr>
           <p:cNvPicPr>
             <a:picLocks noChangeAspect="1"/>
           </p:cNvPicPr>
@@ -10360,8 +10897,8 @@
         </p:blipFill>
         <p:spPr>
           <a:xfrm>
-            <a:off x="548640" y="5230368"/>
-            <a:ext cx="329184" cy="329184"/>
+            <a:off x="6291072" y="2779776"/>
+            <a:ext cx="256032" cy="256032"/>
           </a:xfrm>
           <a:prstGeom prst="rect">
             <a:avLst/>
@@ -10370,14 +10907,14 @@
       </p:pic>
       <p:sp>
         <p:nvSpPr>
-          <p:cNvPr id="31" name="text-479"/>
-          <p:cNvSpPr txBox="1"/>
-          <p:nvPr/>
-        </p:nvSpPr>
-        <p:spPr>
-          <a:xfrm>
-            <a:off x="1005840" y="5212080"/>
-            <a:ext cx="10607040" cy="365760"/>
+          <p:cNvPr id="15" name="text-495"/>
+          <p:cNvSpPr txBox="1"/>
+          <p:nvPr/>
+        </p:nvSpPr>
+        <p:spPr>
+          <a:xfrm>
+            <a:off x="6675120" y="2688336"/>
+            <a:ext cx="2240280" cy="438912"/>
           </a:xfrm>
           <a:prstGeom prst="rect">
             <a:avLst/>
@@ -10393,27 +10930,667 @@
               <a:buNone/>
             </a:pPr>
             <a:r>
-              <a:rPr lang="zh-TW" altLang="en-US" sz="1600" b="1" dirty="0">
+              <a:rPr lang="zh-TW" altLang="en-US" sz="1400" b="1" dirty="0">
+                <a:solidFill>
+                  <a:schemeClr val="tx1"/>
+                </a:solidFill>
+              </a:rPr>
+              <a:t>清除後新查詢</a:t>
+            </a:r>
+            <a:endParaRPr lang="zh-TW" sz="1400" dirty="0"/>
+          </a:p>
+        </p:txBody>
+      </p:sp>
+      <p:sp>
+        <p:nvSpPr>
+          <p:cNvPr id="16" name="text-496"/>
+          <p:cNvSpPr txBox="1"/>
+          <p:nvPr/>
+        </p:nvSpPr>
+        <p:spPr>
+          <a:xfrm>
+            <a:off x="8915400" y="2688336"/>
+            <a:ext cx="1828800" cy="438912"/>
+          </a:xfrm>
+          <a:prstGeom prst="rect">
+            <a:avLst/>
+          </a:prstGeom>
+          <a:noFill/>
+          <a:ln/>
+        </p:spPr>
+        <p:txBody>
+          <a:bodyPr wrap="square" lIns="0" tIns="0" rIns="0" bIns="0" rtlCol="0" anchor="ctr"/>
+          <a:lstStyle/>
+          <a:p>
+            <a:pPr indent="0" marL="0">
+              <a:buNone/>
+            </a:pPr>
+            <a:r>
+              <a:rPr lang="zh-TW" altLang="en-US" sz="1200" dirty="0">
+                <a:solidFill>
+                  <a:schemeClr val="tx1"/>
+                </a:solidFill>
+              </a:rPr>
+              <a:t>memory:null，任務仍完成</a:t>
+            </a:r>
+            <a:endParaRPr lang="zh-TW" sz="1200" dirty="0"/>
+          </a:p>
+        </p:txBody>
+      </p:sp>
+      <p:sp>
+        <p:nvSpPr>
+          <p:cNvPr id="17" name="tag-497"/>
+          <p:cNvSpPr/>
+          <p:nvPr/>
+        </p:nvSpPr>
+        <p:spPr>
+          <a:xfrm>
+            <a:off x="11068050" y="2779776"/>
+            <a:ext cx="480822" cy="249428"/>
+          </a:xfrm>
+          <a:prstGeom prst="roundRect">
+            <a:avLst>
+              <a:gd name="adj" fmla="val 50000"/>
+            </a:avLst>
+          </a:prstGeom>
+          <a:solidFill>
+            <a:schemeClr val="bg1"/>
+          </a:solidFill>
+          <a:ln w="12700">
+            <a:solidFill>
+              <a:schemeClr val="accent4"/>
+            </a:solidFill>
+            <a:prstDash val="solid"/>
+          </a:ln>
+        </p:spPr>
+      </p:sp>
+      <p:sp>
+        <p:nvSpPr>
+          <p:cNvPr id="18" name="tag-text-498"/>
+          <p:cNvSpPr txBox="1"/>
+          <p:nvPr/>
+        </p:nvSpPr>
+        <p:spPr>
+          <a:xfrm>
+            <a:off x="11068050" y="2779776"/>
+            <a:ext cx="480822" cy="249428"/>
+          </a:xfrm>
+          <a:prstGeom prst="rect">
+            <a:avLst/>
+          </a:prstGeom>
+          <a:noFill/>
+          <a:ln/>
+        </p:spPr>
+        <p:txBody>
+          <a:bodyPr wrap="square" lIns="0" tIns="0" rIns="0" bIns="0" rtlCol="0" anchor="ctr"/>
+          <a:lstStyle/>
+          <a:p>
+            <a:pPr algn="ctr" indent="0" marL="0">
+              <a:buNone/>
+            </a:pPr>
+            <a:r>
+              <a:rPr lang="zh-TW" altLang="en-US" sz="1100" b="1" dirty="0">
+                <a:solidFill>
+                  <a:schemeClr val="accent4"/>
+                </a:solidFill>
+              </a:rPr>
+              <a:t>GPT</a:t>
+            </a:r>
+            <a:endParaRPr lang="zh-TW" sz="1100" dirty="0"/>
+          </a:p>
+        </p:txBody>
+      </p:sp>
+      <p:sp>
+        <p:nvSpPr>
+          <p:cNvPr id="19" name="row-bg-499"/>
+          <p:cNvSpPr/>
+          <p:nvPr/>
+        </p:nvSpPr>
+        <p:spPr>
+          <a:xfrm>
+            <a:off x="6172200" y="3218688"/>
+            <a:ext cx="5468112" cy="548640"/>
+          </a:xfrm>
+          <a:prstGeom prst="rect">
+            <a:avLst/>
+          </a:prstGeom>
+          <a:solidFill>
+            <a:schemeClr val="bg2"/>
+          </a:solidFill>
+          <a:ln/>
+        </p:spPr>
+      </p:sp>
+      <p:pic>
+        <p:nvPicPr>
+          <p:cNvPr id="20" name="icon-500" descr="CircleCheck">    </p:cNvPr>
+          <p:cNvPicPr>
+            <a:picLocks noChangeAspect="1"/>
+          </p:cNvPicPr>
+          <p:nvPr/>
+        </p:nvPicPr>
+        <p:blipFill>
+          <a:blip r:embed="rId4"/>
+          <a:stretch>
+            <a:fillRect/>
+          </a:stretch>
+        </p:blipFill>
+        <p:spPr>
+          <a:xfrm>
+            <a:off x="6291072" y="3364992"/>
+            <a:ext cx="256032" cy="256032"/>
+          </a:xfrm>
+          <a:prstGeom prst="rect">
+            <a:avLst/>
+          </a:prstGeom>
+        </p:spPr>
+      </p:pic>
+      <p:sp>
+        <p:nvSpPr>
+          <p:cNvPr id="21" name="text-501"/>
+          <p:cNvSpPr txBox="1"/>
+          <p:nvPr/>
+        </p:nvSpPr>
+        <p:spPr>
+          <a:xfrm>
+            <a:off x="6675120" y="3273552"/>
+            <a:ext cx="2240280" cy="438912"/>
+          </a:xfrm>
+          <a:prstGeom prst="rect">
+            <a:avLst/>
+          </a:prstGeom>
+          <a:noFill/>
+          <a:ln/>
+        </p:spPr>
+        <p:txBody>
+          <a:bodyPr wrap="square" lIns="0" tIns="0" rIns="0" bIns="0" rtlCol="0" anchor="ctr"/>
+          <a:lstStyle/>
+          <a:p>
+            <a:pPr indent="0" marL="0">
+              <a:buNone/>
+            </a:pPr>
+            <a:r>
+              <a:rPr lang="zh-TW" altLang="en-US" sz="1400" b="1" dirty="0">
+                <a:solidFill>
+                  <a:schemeClr val="tx1"/>
+                </a:solidFill>
+              </a:rPr>
+              <a:t>跨使用者讀取</a:t>
+            </a:r>
+            <a:endParaRPr lang="zh-TW" sz="1400" dirty="0"/>
+          </a:p>
+        </p:txBody>
+      </p:sp>
+      <p:sp>
+        <p:nvSpPr>
+          <p:cNvPr id="22" name="text-502"/>
+          <p:cNvSpPr txBox="1"/>
+          <p:nvPr/>
+        </p:nvSpPr>
+        <p:spPr>
+          <a:xfrm>
+            <a:off x="8915400" y="3273552"/>
+            <a:ext cx="1828800" cy="438912"/>
+          </a:xfrm>
+          <a:prstGeom prst="rect">
+            <a:avLst/>
+          </a:prstGeom>
+          <a:noFill/>
+          <a:ln/>
+        </p:spPr>
+        <p:txBody>
+          <a:bodyPr wrap="square" lIns="0" tIns="0" rIns="0" bIns="0" rtlCol="0" anchor="ctr"/>
+          <a:lstStyle/>
+          <a:p>
+            <a:pPr indent="0" marL="0">
+              <a:buNone/>
+            </a:pPr>
+            <a:r>
+              <a:rPr lang="zh-TW" altLang="en-US" sz="1200" dirty="0">
+                <a:solidFill>
+                  <a:schemeClr val="tx1"/>
+                </a:solidFill>
+              </a:rPr>
+              <a:t>RUN_NOT_FOUND</a:t>
+            </a:r>
+            <a:endParaRPr lang="zh-TW" sz="1200" dirty="0"/>
+          </a:p>
+        </p:txBody>
+      </p:sp>
+      <p:sp>
+        <p:nvSpPr>
+          <p:cNvPr id="23" name="tag-503"/>
+          <p:cNvSpPr/>
+          <p:nvPr/>
+        </p:nvSpPr>
+        <p:spPr>
+          <a:xfrm>
+            <a:off x="10987024" y="3364992"/>
+            <a:ext cx="561848" cy="249428"/>
+          </a:xfrm>
+          <a:prstGeom prst="roundRect">
+            <a:avLst>
+              <a:gd name="adj" fmla="val 50000"/>
+            </a:avLst>
+          </a:prstGeom>
+          <a:solidFill>
+            <a:schemeClr val="bg1"/>
+          </a:solidFill>
+          <a:ln w="12700">
+            <a:solidFill>
+              <a:schemeClr val="tx2"/>
+            </a:solidFill>
+            <a:prstDash val="solid"/>
+          </a:ln>
+        </p:spPr>
+      </p:sp>
+      <p:sp>
+        <p:nvSpPr>
+          <p:cNvPr id="24" name="tag-text-504"/>
+          <p:cNvSpPr txBox="1"/>
+          <p:nvPr/>
+        </p:nvSpPr>
+        <p:spPr>
+          <a:xfrm>
+            <a:off x="10987024" y="3364992"/>
+            <a:ext cx="561848" cy="249428"/>
+          </a:xfrm>
+          <a:prstGeom prst="rect">
+            <a:avLst/>
+          </a:prstGeom>
+          <a:noFill/>
+          <a:ln/>
+        </p:spPr>
+        <p:txBody>
+          <a:bodyPr wrap="square" lIns="0" tIns="0" rIns="0" bIns="0" rtlCol="0" anchor="ctr"/>
+          <a:lstStyle/>
+          <a:p>
+            <a:pPr algn="ctr" indent="0" marL="0">
+              <a:buNone/>
+            </a:pPr>
+            <a:r>
+              <a:rPr lang="zh-TW" altLang="en-US" sz="1100" b="1" dirty="0">
+                <a:solidFill>
+                  <a:schemeClr val="tx2"/>
+                </a:solidFill>
+              </a:rPr>
+              <a:t>HTTP</a:t>
+            </a:r>
+            <a:endParaRPr lang="zh-TW" sz="1100" dirty="0"/>
+          </a:p>
+        </p:txBody>
+      </p:sp>
+      <p:pic>
+        <p:nvPicPr>
+          <p:cNvPr id="25" name="icon-505" descr="CircleCheck">    </p:cNvPr>
+          <p:cNvPicPr>
+            <a:picLocks noChangeAspect="1"/>
+          </p:cNvPicPr>
+          <p:nvPr/>
+        </p:nvPicPr>
+        <p:blipFill>
+          <a:blip r:embed="rId5"/>
+          <a:stretch>
+            <a:fillRect/>
+          </a:stretch>
+        </p:blipFill>
+        <p:spPr>
+          <a:xfrm>
+            <a:off x="6291072" y="3950208"/>
+            <a:ext cx="256032" cy="256032"/>
+          </a:xfrm>
+          <a:prstGeom prst="rect">
+            <a:avLst/>
+          </a:prstGeom>
+        </p:spPr>
+      </p:pic>
+      <p:sp>
+        <p:nvSpPr>
+          <p:cNvPr id="26" name="text-506"/>
+          <p:cNvSpPr txBox="1"/>
+          <p:nvPr/>
+        </p:nvSpPr>
+        <p:spPr>
+          <a:xfrm>
+            <a:off x="6675120" y="3858768"/>
+            <a:ext cx="2240280" cy="438912"/>
+          </a:xfrm>
+          <a:prstGeom prst="rect">
+            <a:avLst/>
+          </a:prstGeom>
+          <a:noFill/>
+          <a:ln/>
+        </p:spPr>
+        <p:txBody>
+          <a:bodyPr wrap="square" lIns="0" tIns="0" rIns="0" bIns="0" rtlCol="0" anchor="ctr"/>
+          <a:lstStyle/>
+          <a:p>
+            <a:pPr indent="0" marL="0">
+              <a:buNone/>
+            </a:pPr>
+            <a:r>
+              <a:rPr lang="zh-TW" altLang="en-US" sz="1400" b="1" dirty="0">
+                <a:solidFill>
+                  <a:schemeClr val="tx1"/>
+                </a:solidFill>
+              </a:rPr>
+              <a:t>同 ID 重送</a:t>
+            </a:r>
+            <a:endParaRPr lang="zh-TW" sz="1400" dirty="0"/>
+          </a:p>
+        </p:txBody>
+      </p:sp>
+      <p:sp>
+        <p:nvSpPr>
+          <p:cNvPr id="27" name="text-507"/>
+          <p:cNvSpPr txBox="1"/>
+          <p:nvPr/>
+        </p:nvSpPr>
+        <p:spPr>
+          <a:xfrm>
+            <a:off x="8915400" y="3858768"/>
+            <a:ext cx="1828800" cy="438912"/>
+          </a:xfrm>
+          <a:prstGeom prst="rect">
+            <a:avLst/>
+          </a:prstGeom>
+          <a:noFill/>
+          <a:ln/>
+        </p:spPr>
+        <p:txBody>
+          <a:bodyPr wrap="square" lIns="0" tIns="0" rIns="0" bIns="0" rtlCol="0" anchor="ctr"/>
+          <a:lstStyle/>
+          <a:p>
+            <a:pPr indent="0" marL="0">
+              <a:buNone/>
+            </a:pPr>
+            <a:r>
+              <a:rPr lang="zh-TW" altLang="en-US" sz="1200" dirty="0">
+                <a:solidFill>
+                  <a:schemeClr val="tx1"/>
+                </a:solidFill>
+              </a:rPr>
+              <a:t>確認後與重送都是 1 份</a:t>
+            </a:r>
+            <a:endParaRPr lang="zh-TW" sz="1200" dirty="0"/>
+          </a:p>
+        </p:txBody>
+      </p:sp>
+      <p:sp>
+        <p:nvSpPr>
+          <p:cNvPr id="28" name="tag-508"/>
+          <p:cNvSpPr/>
+          <p:nvPr/>
+        </p:nvSpPr>
+        <p:spPr>
+          <a:xfrm>
+            <a:off x="11068050" y="3950208"/>
+            <a:ext cx="480822" cy="249428"/>
+          </a:xfrm>
+          <a:prstGeom prst="roundRect">
+            <a:avLst>
+              <a:gd name="adj" fmla="val 50000"/>
+            </a:avLst>
+          </a:prstGeom>
+          <a:solidFill>
+            <a:schemeClr val="bg1"/>
+          </a:solidFill>
+          <a:ln w="12700">
+            <a:solidFill>
+              <a:schemeClr val="accent4"/>
+            </a:solidFill>
+            <a:prstDash val="solid"/>
+          </a:ln>
+        </p:spPr>
+      </p:sp>
+      <p:sp>
+        <p:nvSpPr>
+          <p:cNvPr id="29" name="tag-text-509"/>
+          <p:cNvSpPr txBox="1"/>
+          <p:nvPr/>
+        </p:nvSpPr>
+        <p:spPr>
+          <a:xfrm>
+            <a:off x="11068050" y="3950208"/>
+            <a:ext cx="480822" cy="249428"/>
+          </a:xfrm>
+          <a:prstGeom prst="rect">
+            <a:avLst/>
+          </a:prstGeom>
+          <a:noFill/>
+          <a:ln/>
+        </p:spPr>
+        <p:txBody>
+          <a:bodyPr wrap="square" lIns="0" tIns="0" rIns="0" bIns="0" rtlCol="0" anchor="ctr"/>
+          <a:lstStyle/>
+          <a:p>
+            <a:pPr algn="ctr" indent="0" marL="0">
+              <a:buNone/>
+            </a:pPr>
+            <a:r>
+              <a:rPr lang="zh-TW" altLang="en-US" sz="1100" b="1" dirty="0">
+                <a:solidFill>
+                  <a:schemeClr val="accent4"/>
+                </a:solidFill>
+              </a:rPr>
+              <a:t>GPT</a:t>
+            </a:r>
+            <a:endParaRPr lang="zh-TW" sz="1100" dirty="0"/>
+          </a:p>
+        </p:txBody>
+      </p:sp>
+      <p:sp>
+        <p:nvSpPr>
+          <p:cNvPr id="30" name="row-bg-510"/>
+          <p:cNvSpPr/>
+          <p:nvPr/>
+        </p:nvSpPr>
+        <p:spPr>
+          <a:xfrm>
+            <a:off x="6172200" y="4389120"/>
+            <a:ext cx="5468112" cy="548640"/>
+          </a:xfrm>
+          <a:prstGeom prst="rect">
+            <a:avLst/>
+          </a:prstGeom>
+          <a:solidFill>
+            <a:schemeClr val="bg2"/>
+          </a:solidFill>
+          <a:ln/>
+        </p:spPr>
+      </p:sp>
+      <p:pic>
+        <p:nvPicPr>
+          <p:cNvPr id="31" name="icon-511" descr="CircleCheck">    </p:cNvPr>
+          <p:cNvPicPr>
+            <a:picLocks noChangeAspect="1"/>
+          </p:cNvPicPr>
+          <p:nvPr/>
+        </p:nvPicPr>
+        <p:blipFill>
+          <a:blip r:embed="rId6"/>
+          <a:stretch>
+            <a:fillRect/>
+          </a:stretch>
+        </p:blipFill>
+        <p:spPr>
+          <a:xfrm>
+            <a:off x="6291072" y="4535424"/>
+            <a:ext cx="256032" cy="256032"/>
+          </a:xfrm>
+          <a:prstGeom prst="rect">
+            <a:avLst/>
+          </a:prstGeom>
+        </p:spPr>
+      </p:pic>
+      <p:sp>
+        <p:nvSpPr>
+          <p:cNvPr id="32" name="text-512"/>
+          <p:cNvSpPr txBox="1"/>
+          <p:nvPr/>
+        </p:nvSpPr>
+        <p:spPr>
+          <a:xfrm>
+            <a:off x="6675120" y="4443984"/>
+            <a:ext cx="2240280" cy="438912"/>
+          </a:xfrm>
+          <a:prstGeom prst="rect">
+            <a:avLst/>
+          </a:prstGeom>
+          <a:noFill/>
+          <a:ln/>
+        </p:spPr>
+        <p:txBody>
+          <a:bodyPr wrap="square" lIns="0" tIns="0" rIns="0" bIns="0" rtlCol="0" anchor="ctr"/>
+          <a:lstStyle/>
+          <a:p>
+            <a:pPr indent="0" marL="0">
+              <a:buNone/>
+            </a:pPr>
+            <a:r>
+              <a:rPr lang="zh-TW" altLang="en-US" sz="1400" b="1" dirty="0">
+                <a:solidFill>
+                  <a:schemeClr val="tx1"/>
+                </a:solidFill>
+              </a:rPr>
+              <a:t>非法參數、429</a:t>
+            </a:r>
+            <a:endParaRPr lang="zh-TW" sz="1400" dirty="0"/>
+          </a:p>
+        </p:txBody>
+      </p:sp>
+      <p:sp>
+        <p:nvSpPr>
+          <p:cNvPr id="33" name="text-513"/>
+          <p:cNvSpPr txBox="1"/>
+          <p:nvPr/>
+        </p:nvSpPr>
+        <p:spPr>
+          <a:xfrm>
+            <a:off x="8915400" y="4443984"/>
+            <a:ext cx="1828800" cy="438912"/>
+          </a:xfrm>
+          <a:prstGeom prst="rect">
+            <a:avLst/>
+          </a:prstGeom>
+          <a:noFill/>
+          <a:ln/>
+        </p:spPr>
+        <p:txBody>
+          <a:bodyPr wrap="square" lIns="0" tIns="0" rIns="0" bIns="0" rtlCol="0" anchor="ctr"/>
+          <a:lstStyle/>
+          <a:p>
+            <a:pPr indent="0" marL="0">
+              <a:buNone/>
+            </a:pPr>
+            <a:r>
+              <a:rPr lang="zh-TW" altLang="en-US" sz="1200" dirty="0">
+                <a:solidFill>
+                  <a:schemeClr val="tx1"/>
+                </a:solidFill>
+              </a:rPr>
+              <a:t>有限停止，不新增草稿</a:t>
+            </a:r>
+            <a:endParaRPr lang="zh-TW" sz="1200" dirty="0"/>
+          </a:p>
+        </p:txBody>
+      </p:sp>
+      <p:sp>
+        <p:nvSpPr>
+          <p:cNvPr id="34" name="tag-514"/>
+          <p:cNvSpPr/>
+          <p:nvPr/>
+        </p:nvSpPr>
+        <p:spPr>
+          <a:xfrm>
+            <a:off x="10752328" y="4535424"/>
+            <a:ext cx="796544" cy="249428"/>
+          </a:xfrm>
+          <a:prstGeom prst="roundRect">
+            <a:avLst>
+              <a:gd name="adj" fmla="val 50000"/>
+            </a:avLst>
+          </a:prstGeom>
+          <a:solidFill>
+            <a:schemeClr val="bg1"/>
+          </a:solidFill>
+          <a:ln w="12700">
+            <a:solidFill>
+              <a:schemeClr val="accent3"/>
+            </a:solidFill>
+            <a:prstDash val="solid"/>
+          </a:ln>
+        </p:spPr>
+      </p:sp>
+      <p:sp>
+        <p:nvSpPr>
+          <p:cNvPr id="35" name="tag-text-515"/>
+          <p:cNvSpPr txBox="1"/>
+          <p:nvPr/>
+        </p:nvSpPr>
+        <p:spPr>
+          <a:xfrm>
+            <a:off x="10752328" y="4535424"/>
+            <a:ext cx="796544" cy="249428"/>
+          </a:xfrm>
+          <a:prstGeom prst="rect">
+            <a:avLst/>
+          </a:prstGeom>
+          <a:noFill/>
+          <a:ln/>
+        </p:spPr>
+        <p:txBody>
+          <a:bodyPr wrap="square" lIns="0" tIns="0" rIns="0" bIns="0" rtlCol="0" anchor="ctr"/>
+          <a:lstStyle/>
+          <a:p>
+            <a:pPr algn="ctr" indent="0" marL="0">
+              <a:buNone/>
+            </a:pPr>
+            <a:r>
+              <a:rPr lang="zh-TW" altLang="en-US" sz="1100" b="1" dirty="0">
                 <a:solidFill>
                   <a:schemeClr val="accent3"/>
                 </a:solidFill>
               </a:rPr>
-              <a:t>只有一組樣本，而且兩者完成的終點不同：不能宣稱記憶提升了品質或降低成本。</a:t>
-            </a:r>
-            <a:endParaRPr lang="zh-TW" sz="1600" dirty="0"/>
-          </a:p>
-        </p:txBody>
-      </p:sp>
-      <p:sp>
-        <p:nvSpPr>
-          <p:cNvPr id="32" name="text-480"/>
-          <p:cNvSpPr txBox="1"/>
-          <p:nvPr/>
-        </p:nvSpPr>
-        <p:spPr>
-          <a:xfrm>
-            <a:off x="1005840" y="5650992"/>
-            <a:ext cx="10607040" cy="329184"/>
+              <a:t>故障注入</a:t>
+            </a:r>
+            <a:endParaRPr lang="zh-TW" sz="1100" dirty="0"/>
+          </a:p>
+        </p:txBody>
+      </p:sp>
+      <p:pic>
+        <p:nvPicPr>
+          <p:cNvPr id="36" name="icon-516" descr="CircleCheck">    </p:cNvPr>
+          <p:cNvPicPr>
+            <a:picLocks noChangeAspect="1"/>
+          </p:cNvPicPr>
+          <p:nvPr/>
+        </p:nvPicPr>
+        <p:blipFill>
+          <a:blip r:embed="rId7"/>
+          <a:stretch>
+            <a:fillRect/>
+          </a:stretch>
+        </p:blipFill>
+        <p:spPr>
+          <a:xfrm>
+            <a:off x="6291072" y="5120640"/>
+            <a:ext cx="256032" cy="256032"/>
+          </a:xfrm>
+          <a:prstGeom prst="rect">
+            <a:avLst/>
+          </a:prstGeom>
+        </p:spPr>
+      </p:pic>
+      <p:sp>
+        <p:nvSpPr>
+          <p:cNvPr id="37" name="text-517"/>
+          <p:cNvSpPr txBox="1"/>
+          <p:nvPr/>
+        </p:nvSpPr>
+        <p:spPr>
+          <a:xfrm>
+            <a:off x="6675120" y="5029200"/>
+            <a:ext cx="2240280" cy="438912"/>
           </a:xfrm>
           <a:prstGeom prst="rect">
             <a:avLst/>
@@ -10429,14 +11606,149 @@
               <a:buNone/>
             </a:pPr>
             <a:r>
-              <a:rPr lang="zh-TW" altLang="en-US" sz="1400" dirty="0">
+              <a:rPr lang="zh-TW" altLang="en-US" sz="1400" b="1" dirty="0">
+                <a:solidFill>
+                  <a:schemeClr val="tx1"/>
+                </a:solidFill>
+              </a:rPr>
+              <a:t>PDF 錯誤引用、到上限</a:t>
+            </a:r>
+            <a:endParaRPr lang="zh-TW" sz="1400" dirty="0"/>
+          </a:p>
+        </p:txBody>
+      </p:sp>
+      <p:sp>
+        <p:nvSpPr>
+          <p:cNvPr id="38" name="text-518"/>
+          <p:cNvSpPr txBox="1"/>
+          <p:nvPr/>
+        </p:nvSpPr>
+        <p:spPr>
+          <a:xfrm>
+            <a:off x="8915400" y="5029200"/>
+            <a:ext cx="1828800" cy="438912"/>
+          </a:xfrm>
+          <a:prstGeom prst="rect">
+            <a:avLst/>
+          </a:prstGeom>
+          <a:noFill/>
+          <a:ln/>
+        </p:spPr>
+        <p:txBody>
+          <a:bodyPr wrap="square" lIns="0" tIns="0" rIns="0" bIns="0" rtlCol="0" anchor="ctr"/>
+          <a:lstStyle/>
+          <a:p>
+            <a:pPr indent="0" marL="0">
+              <a:buNone/>
+            </a:pPr>
+            <a:r>
+              <a:rPr lang="zh-TW" altLang="en-US" sz="1200" dirty="0">
+                <a:solidFill>
+                  <a:schemeClr val="tx1"/>
+                </a:solidFill>
+              </a:rPr>
+              <a:t>不估分，第 2 份即停</a:t>
+            </a:r>
+            <a:endParaRPr lang="zh-TW" sz="1200" dirty="0"/>
+          </a:p>
+        </p:txBody>
+      </p:sp>
+      <p:sp>
+        <p:nvSpPr>
+          <p:cNvPr id="39" name="tag-519"/>
+          <p:cNvSpPr/>
+          <p:nvPr/>
+        </p:nvSpPr>
+        <p:spPr>
+          <a:xfrm>
+            <a:off x="11031728" y="5120640"/>
+            <a:ext cx="517144" cy="249428"/>
+          </a:xfrm>
+          <a:prstGeom prst="roundRect">
+            <a:avLst>
+              <a:gd name="adj" fmla="val 50000"/>
+            </a:avLst>
+          </a:prstGeom>
+          <a:solidFill>
+            <a:schemeClr val="bg1"/>
+          </a:solidFill>
+          <a:ln w="12700">
+            <a:solidFill>
+              <a:schemeClr val="accent6"/>
+            </a:solidFill>
+            <a:prstDash val="solid"/>
+          </a:ln>
+        </p:spPr>
+      </p:sp>
+      <p:sp>
+        <p:nvSpPr>
+          <p:cNvPr id="40" name="tag-text-520"/>
+          <p:cNvSpPr txBox="1"/>
+          <p:nvPr/>
+        </p:nvSpPr>
+        <p:spPr>
+          <a:xfrm>
+            <a:off x="11031728" y="5120640"/>
+            <a:ext cx="517144" cy="249428"/>
+          </a:xfrm>
+          <a:prstGeom prst="rect">
+            <a:avLst/>
+          </a:prstGeom>
+          <a:noFill/>
+          <a:ln/>
+        </p:spPr>
+        <p:txBody>
+          <a:bodyPr wrap="square" lIns="0" tIns="0" rIns="0" bIns="0" rtlCol="0" anchor="ctr"/>
+          <a:lstStyle/>
+          <a:p>
+            <a:pPr algn="ctr" indent="0" marL="0">
+              <a:buNone/>
+            </a:pPr>
+            <a:r>
+              <a:rPr lang="zh-TW" altLang="en-US" sz="1100" b="1" dirty="0">
                 <a:solidFill>
                   <a:schemeClr val="accent6"/>
                 </a:solidFill>
               </a:rPr>
-              <a:t>課程指定的 Google Cloud／ADC Gemini：LIVE_NOT_RUN（依組員選擇使用 OpenAI，不能拿來替代）。</a:t>
-            </a:r>
-            <a:endParaRPr lang="zh-TW" sz="1400" dirty="0"/>
+              <a:t>離線</a:t>
+            </a:r>
+            <a:endParaRPr lang="zh-TW" sz="1100" dirty="0"/>
+          </a:p>
+        </p:txBody>
+      </p:sp>
+      <p:sp>
+        <p:nvSpPr>
+          <p:cNvPr id="41" name="text-521"/>
+          <p:cNvSpPr txBox="1"/>
+          <p:nvPr/>
+        </p:nvSpPr>
+        <p:spPr>
+          <a:xfrm>
+            <a:off x="6172200" y="5650992"/>
+            <a:ext cx="5468112" cy="502920"/>
+          </a:xfrm>
+          <a:prstGeom prst="rect">
+            <a:avLst/>
+          </a:prstGeom>
+          <a:noFill/>
+          <a:ln/>
+        </p:spPr>
+        <p:txBody>
+          <a:bodyPr wrap="square" lIns="0" tIns="0" rIns="0" bIns="0" rtlCol="0" anchor="ctr"/>
+          <a:lstStyle/>
+          <a:p>
+            <a:pPr indent="0" marL="0">
+              <a:buNone/>
+            </a:pPr>
+            <a:r>
+              <a:rPr lang="zh-TW" altLang="en-US" sz="1200" dirty="0">
+                <a:solidFill>
+                  <a:schemeClr val="accent6"/>
+                </a:solidFill>
+              </a:rPr>
+              <a:t>真實呼叫用量（不是帳單）：Week 7 共 14 次模型回覆、18,296 tokens；Week 6 共 10 次回覆、86,451 tokens。</a:t>
+            </a:r>
+            <a:endParaRPr lang="zh-TW" sz="1200" dirty="0"/>
           </a:p>
         </p:txBody>
       </p:sp>
@@ -10542,7 +11854,7 @@
                   <a:schemeClr val="accent6"/>
                 </a:solidFill>
               </a:rPr>
-              <a:t>已完成、待驗證與規劃</a:t>
+              <a:t>原版 vs Session 候選 · 同輸入、同模型、同來源</a:t>
             </a:r>
             <a:endParaRPr lang="zh-TW" sz="1300" dirty="0"/>
           </a:p>
@@ -10580,7 +11892,7 @@
                   <a:schemeClr val="tx1"/>
                 </a:solidFill>
               </a:rPr>
-              <a:t>下一步：把判讀結果接進草稿工具</a:t>
+              <a:t>保留一個真實失敗：模型略過了草稿提案</a:t>
             </a:r>
             <a:endParaRPr lang="zh-TW" sz="3000" dirty="0"/>
           </a:p>
@@ -10588,49 +11900,135 @@
       </p:sp>
       <p:sp>
         <p:nvSpPr>
-          <p:cNvPr id="5" name="card-481"/>
-          <p:cNvSpPr/>
-          <p:nvPr/>
-        </p:nvSpPr>
-        <p:spPr>
-          <a:xfrm>
-            <a:off x="548640" y="1600200"/>
-            <a:ext cx="3520440" cy="3931920"/>
+          <p:cNvPr id="5" name="text-522"/>
+          <p:cNvSpPr txBox="1"/>
+          <p:nvPr/>
+        </p:nvSpPr>
+        <p:spPr>
+          <a:xfrm>
+            <a:off x="548640" y="1554480"/>
+            <a:ext cx="10972800" cy="310896"/>
+          </a:xfrm>
+          <a:prstGeom prst="rect">
+            <a:avLst/>
+          </a:prstGeom>
+          <a:noFill/>
+          <a:ln/>
+        </p:spPr>
+        <p:txBody>
+          <a:bodyPr wrap="square" lIns="0" tIns="0" rIns="0" bIns="0" rtlCol="0" anchor="t"/>
+          <a:lstStyle/>
+          <a:p>
+            <a:pPr indent="0" marL="0">
+              <a:buNone/>
+            </a:pPr>
+            <a:r>
+              <a:rPr lang="zh-TW" altLang="en-US" sz="1400" dirty="0">
+                <a:solidFill>
+                  <a:schemeClr val="accent6"/>
+                </a:solidFill>
+              </a:rPr>
+              <a:t>兩者的檢索與引用 gate 都是 ready，且使用同一個 evidence hash。</a:t>
+            </a:r>
+            <a:endParaRPr lang="zh-TW" sz="1400" dirty="0"/>
+          </a:p>
+        </p:txBody>
+      </p:sp>
+      <p:sp>
+        <p:nvSpPr>
+          <p:cNvPr id="6" name="card-523"/>
+          <p:cNvSpPr/>
+          <p:nvPr/>
+        </p:nvSpPr>
+        <p:spPr>
+          <a:xfrm>
+            <a:off x="548640" y="2011680"/>
+            <a:ext cx="5394960" cy="2880360"/>
           </a:xfrm>
           <a:prstGeom prst="roundRect">
             <a:avLst>
-              <a:gd name="adj" fmla="val 2078"/>
+              <a:gd name="adj" fmla="val 2540"/>
             </a:avLst>
           </a:prstGeom>
           <a:solidFill>
-            <a:schemeClr val="bg2"/>
+            <a:schemeClr val="bg1"/>
           </a:solidFill>
-          <a:ln/>
-        </p:spPr>
-      </p:sp>
-      <p:sp>
-        <p:nvSpPr>
-          <p:cNvPr id="6" name="icon-bg-482"/>
-          <p:cNvSpPr/>
-          <p:nvPr/>
-        </p:nvSpPr>
-        <p:spPr>
-          <a:xfrm>
-            <a:off x="777240" y="1801368"/>
-            <a:ext cx="457200" cy="457200"/>
-          </a:xfrm>
-          <a:prstGeom prst="ellipse">
-            <a:avLst/>
+          <a:ln w="12700">
+            <a:solidFill>
+              <a:schemeClr val="bg2"/>
+            </a:solidFill>
+            <a:prstDash val="solid"/>
+          </a:ln>
+          <a:effectLst>
+            <a:outerShdw sx="100000" sy="100000" kx="0" ky="0" algn="bl" rotWithShape="0" blurRad="127000" dist="25400" dir="5400000">
+              <a:srgbClr val="1A2233">
+                <a:alpha val="10000"/>
+              </a:srgbClr>
+            </a:outerShdw>
+          </a:effectLst>
+        </p:spPr>
+      </p:sp>
+      <p:sp>
+        <p:nvSpPr>
+          <p:cNvPr id="7" name="text-524"/>
+          <p:cNvSpPr txBox="1"/>
+          <p:nvPr/>
+        </p:nvSpPr>
+        <p:spPr>
+          <a:xfrm>
+            <a:off x="868680" y="2212848"/>
+            <a:ext cx="2743200" cy="402336"/>
+          </a:xfrm>
+          <a:prstGeom prst="rect">
+            <a:avLst/>
+          </a:prstGeom>
+          <a:noFill/>
+          <a:ln/>
+        </p:spPr>
+        <p:txBody>
+          <a:bodyPr wrap="square" lIns="0" tIns="0" rIns="0" bIns="0" rtlCol="0" anchor="ctr"/>
+          <a:lstStyle/>
+          <a:p>
+            <a:pPr indent="0" marL="0">
+              <a:buNone/>
+            </a:pPr>
+            <a:r>
+              <a:rPr lang="zh-TW" altLang="en-US" sz="2100" b="1" dirty="0">
+                <a:solidFill>
+                  <a:schemeClr val="tx1"/>
+                </a:solidFill>
+              </a:rPr>
+              <a:t>原版</a:t>
+            </a:r>
+            <a:endParaRPr lang="zh-TW" sz="2100" dirty="0"/>
+          </a:p>
+        </p:txBody>
+      </p:sp>
+      <p:sp>
+        <p:nvSpPr>
+          <p:cNvPr id="8" name="chip-fail-525"/>
+          <p:cNvSpPr/>
+          <p:nvPr/>
+        </p:nvSpPr>
+        <p:spPr>
+          <a:xfrm>
+            <a:off x="4258818" y="2258568"/>
+            <a:ext cx="1368704" cy="311404"/>
+          </a:xfrm>
+          <a:prstGeom prst="roundRect">
+            <a:avLst>
+              <a:gd name="adj" fmla="val 50000"/>
+            </a:avLst>
           </a:prstGeom>
           <a:solidFill>
-            <a:schemeClr val="accent2"/>
+            <a:schemeClr val="accent5"/>
           </a:solidFill>
           <a:ln/>
         </p:spPr>
       </p:sp>
       <p:pic>
         <p:nvPicPr>
-          <p:cNvPr id="7" name="icon-483" descr="CircleCheck">    </p:cNvPr>
+          <p:cNvPr id="9" name="chip-icon-526" descr="LIVE_FAIL">    </p:cNvPr>
           <p:cNvPicPr>
             <a:picLocks noChangeAspect="1"/>
           </p:cNvPicPr>
@@ -10644,8 +12042,8 @@
         </p:blipFill>
         <p:spPr>
           <a:xfrm>
-            <a:off x="886968" y="1911096"/>
-            <a:ext cx="237744" cy="237744"/>
+            <a:off x="4368546" y="2320849"/>
+            <a:ext cx="186842" cy="186842"/>
           </a:xfrm>
           <a:prstGeom prst="rect">
             <a:avLst/>
@@ -10654,14 +12052,14 @@
       </p:pic>
       <p:sp>
         <p:nvSpPr>
-          <p:cNvPr id="8" name="text-484"/>
-          <p:cNvSpPr txBox="1"/>
-          <p:nvPr/>
-        </p:nvSpPr>
-        <p:spPr>
-          <a:xfrm>
-            <a:off x="1353312" y="1801368"/>
-            <a:ext cx="2651760" cy="457200"/>
+          <p:cNvPr id="10" name="chip-text-527"/>
+          <p:cNvSpPr txBox="1"/>
+          <p:nvPr/>
+        </p:nvSpPr>
+        <p:spPr>
+          <a:xfrm>
+            <a:off x="4619396" y="2258568"/>
+            <a:ext cx="998982" cy="311404"/>
           </a:xfrm>
           <a:prstGeom prst="rect">
             <a:avLst/>
@@ -10677,49 +12075,313 @@
               <a:buNone/>
             </a:pPr>
             <a:r>
-              <a:rPr lang="zh-TW" altLang="en-US" sz="1700" b="1" dirty="0">
-                <a:solidFill>
-                  <a:schemeClr val="accent2"/>
-                </a:solidFill>
-              </a:rPr>
-              <a:t>已完成且已驗證</a:t>
-            </a:r>
-            <a:endParaRPr lang="zh-TW" sz="1700" dirty="0"/>
-          </a:p>
-        </p:txBody>
-      </p:sp>
-      <p:sp>
-        <p:nvSpPr>
-          <p:cNvPr id="9" name="card-485"/>
-          <p:cNvSpPr/>
-          <p:nvPr/>
-        </p:nvSpPr>
-        <p:spPr>
-          <a:xfrm>
-            <a:off x="749808" y="2487168"/>
-            <a:ext cx="3118104" cy="822960"/>
+              <a:rPr lang="zh-TW" altLang="en-US" sz="1300" b="1" dirty="0">
+                <a:solidFill>
+                  <a:schemeClr val="bg1"/>
+                </a:solidFill>
+              </a:rPr>
+              <a:t>LIVE_FAIL</a:t>
+            </a:r>
+            <a:endParaRPr lang="zh-TW" sz="1300" dirty="0"/>
+          </a:p>
+        </p:txBody>
+      </p:sp>
+      <p:sp>
+        <p:nvSpPr>
+          <p:cNvPr id="11" name="text-528"/>
+          <p:cNvSpPr txBox="1"/>
+          <p:nvPr/>
+        </p:nvSpPr>
+        <p:spPr>
+          <a:xfrm>
+            <a:off x="868680" y="2743200"/>
+            <a:ext cx="4754880" cy="822960"/>
+          </a:xfrm>
+          <a:prstGeom prst="rect">
+            <a:avLst/>
+          </a:prstGeom>
+          <a:noFill/>
+          <a:ln/>
+        </p:spPr>
+        <p:txBody>
+          <a:bodyPr wrap="square" lIns="0" tIns="0" rIns="0" bIns="0" rtlCol="0" anchor="t"/>
+          <a:lstStyle/>
+          <a:p>
+            <a:pPr indent="0" marL="0">
+              <a:buNone/>
+            </a:pPr>
+            <a:r>
+              <a:rPr lang="zh-TW" altLang="en-US" sz="1500" dirty="0">
+                <a:solidFill>
+                  <a:schemeClr val="tx1"/>
+                </a:solidFill>
+              </a:rPr>
+              <a:t>讀取後直接回答，跳過提案工具；Host 以 UNEXPECTED_TOOL_SEQUENCE 擋下，未寫入。</a:t>
+            </a:r>
+            <a:endParaRPr lang="zh-TW" sz="1500" dirty="0"/>
+          </a:p>
+        </p:txBody>
+      </p:sp>
+      <p:sp>
+        <p:nvSpPr>
+          <p:cNvPr id="12" name="text-529"/>
+          <p:cNvSpPr txBox="1"/>
+          <p:nvPr/>
+        </p:nvSpPr>
+        <p:spPr>
+          <a:xfrm>
+            <a:off x="868680" y="3611880"/>
+            <a:ext cx="1554480" cy="548640"/>
+          </a:xfrm>
+          <a:prstGeom prst="rect">
+            <a:avLst/>
+          </a:prstGeom>
+          <a:noFill/>
+          <a:ln/>
+        </p:spPr>
+        <p:txBody>
+          <a:bodyPr wrap="square" lIns="0" tIns="0" rIns="0" bIns="0" rtlCol="0" anchor="b"/>
+          <a:lstStyle/>
+          <a:p>
+            <a:pPr indent="0" marL="0">
+              <a:buNone/>
+            </a:pPr>
+            <a:r>
+              <a:rPr lang="zh-TW" altLang="en-US" sz="2800" b="1" dirty="0">
+                <a:solidFill>
+                  <a:schemeClr val="accent5"/>
+                </a:solidFill>
+              </a:rPr>
+              <a:t>2</a:t>
+            </a:r>
+            <a:endParaRPr lang="zh-TW" sz="2800" dirty="0"/>
+          </a:p>
+        </p:txBody>
+      </p:sp>
+      <p:sp>
+        <p:nvSpPr>
+          <p:cNvPr id="13" name="text-530"/>
+          <p:cNvSpPr txBox="1"/>
+          <p:nvPr/>
+        </p:nvSpPr>
+        <p:spPr>
+          <a:xfrm>
+            <a:off x="868680" y="4206240"/>
+            <a:ext cx="1554480" cy="274320"/>
+          </a:xfrm>
+          <a:prstGeom prst="rect">
+            <a:avLst/>
+          </a:prstGeom>
+          <a:noFill/>
+          <a:ln/>
+        </p:spPr>
+        <p:txBody>
+          <a:bodyPr wrap="square" lIns="0" tIns="0" rIns="0" bIns="0" rtlCol="0" anchor="t"/>
+          <a:lstStyle/>
+          <a:p>
+            <a:pPr indent="0" marL="0">
+              <a:buNone/>
+            </a:pPr>
+            <a:r>
+              <a:rPr lang="zh-TW" altLang="en-US" sz="1200" dirty="0">
+                <a:solidFill>
+                  <a:schemeClr val="accent6"/>
+                </a:solidFill>
+              </a:rPr>
+              <a:t>次模型回覆</a:t>
+            </a:r>
+            <a:endParaRPr lang="zh-TW" sz="1200" dirty="0"/>
+          </a:p>
+        </p:txBody>
+      </p:sp>
+      <p:sp>
+        <p:nvSpPr>
+          <p:cNvPr id="14" name="text-531"/>
+          <p:cNvSpPr txBox="1"/>
+          <p:nvPr/>
+        </p:nvSpPr>
+        <p:spPr>
+          <a:xfrm>
+            <a:off x="2468880" y="3611880"/>
+            <a:ext cx="1554480" cy="548640"/>
+          </a:xfrm>
+          <a:prstGeom prst="rect">
+            <a:avLst/>
+          </a:prstGeom>
+          <a:noFill/>
+          <a:ln/>
+        </p:spPr>
+        <p:txBody>
+          <a:bodyPr wrap="square" lIns="0" tIns="0" rIns="0" bIns="0" rtlCol="0" anchor="b"/>
+          <a:lstStyle/>
+          <a:p>
+            <a:pPr indent="0" marL="0">
+              <a:buNone/>
+            </a:pPr>
+            <a:r>
+              <a:rPr lang="zh-TW" altLang="en-US" sz="2800" b="1" dirty="0">
+                <a:solidFill>
+                  <a:schemeClr val="accent5"/>
+                </a:solidFill>
+              </a:rPr>
+              <a:t>2,133</a:t>
+            </a:r>
+            <a:endParaRPr lang="zh-TW" sz="2800" dirty="0"/>
+          </a:p>
+        </p:txBody>
+      </p:sp>
+      <p:sp>
+        <p:nvSpPr>
+          <p:cNvPr id="15" name="text-532"/>
+          <p:cNvSpPr txBox="1"/>
+          <p:nvPr/>
+        </p:nvSpPr>
+        <p:spPr>
+          <a:xfrm>
+            <a:off x="2468880" y="4206240"/>
+            <a:ext cx="1554480" cy="274320"/>
+          </a:xfrm>
+          <a:prstGeom prst="rect">
+            <a:avLst/>
+          </a:prstGeom>
+          <a:noFill/>
+          <a:ln/>
+        </p:spPr>
+        <p:txBody>
+          <a:bodyPr wrap="square" lIns="0" tIns="0" rIns="0" bIns="0" rtlCol="0" anchor="t"/>
+          <a:lstStyle/>
+          <a:p>
+            <a:pPr indent="0" marL="0">
+              <a:buNone/>
+            </a:pPr>
+            <a:r>
+              <a:rPr lang="zh-TW" altLang="en-US" sz="1200" dirty="0">
+                <a:solidFill>
+                  <a:schemeClr val="accent6"/>
+                </a:solidFill>
+              </a:rPr>
+              <a:t>tokens</a:t>
+            </a:r>
+            <a:endParaRPr lang="zh-TW" sz="1200" dirty="0"/>
+          </a:p>
+        </p:txBody>
+      </p:sp>
+      <p:sp>
+        <p:nvSpPr>
+          <p:cNvPr id="16" name="text-533"/>
+          <p:cNvSpPr txBox="1"/>
+          <p:nvPr/>
+        </p:nvSpPr>
+        <p:spPr>
+          <a:xfrm>
+            <a:off x="4069080" y="3611880"/>
+            <a:ext cx="1554480" cy="548640"/>
+          </a:xfrm>
+          <a:prstGeom prst="rect">
+            <a:avLst/>
+          </a:prstGeom>
+          <a:noFill/>
+          <a:ln/>
+        </p:spPr>
+        <p:txBody>
+          <a:bodyPr wrap="square" lIns="0" tIns="0" rIns="0" bIns="0" rtlCol="0" anchor="b"/>
+          <a:lstStyle/>
+          <a:p>
+            <a:pPr indent="0" marL="0">
+              <a:buNone/>
+            </a:pPr>
+            <a:r>
+              <a:rPr lang="zh-TW" altLang="en-US" sz="2800" b="1" dirty="0">
+                <a:solidFill>
+                  <a:schemeClr val="accent5"/>
+                </a:solidFill>
+              </a:rPr>
+              <a:t>6.518 s</a:t>
+            </a:r>
+            <a:endParaRPr lang="zh-TW" sz="2800" dirty="0"/>
+          </a:p>
+        </p:txBody>
+      </p:sp>
+      <p:sp>
+        <p:nvSpPr>
+          <p:cNvPr id="17" name="text-534"/>
+          <p:cNvSpPr txBox="1"/>
+          <p:nvPr/>
+        </p:nvSpPr>
+        <p:spPr>
+          <a:xfrm>
+            <a:off x="4069080" y="4206240"/>
+            <a:ext cx="1554480" cy="274320"/>
+          </a:xfrm>
+          <a:prstGeom prst="rect">
+            <a:avLst/>
+          </a:prstGeom>
+          <a:noFill/>
+          <a:ln/>
+        </p:spPr>
+        <p:txBody>
+          <a:bodyPr wrap="square" lIns="0" tIns="0" rIns="0" bIns="0" rtlCol="0" anchor="t"/>
+          <a:lstStyle/>
+          <a:p>
+            <a:pPr indent="0" marL="0">
+              <a:buNone/>
+            </a:pPr>
+            <a:r>
+              <a:rPr lang="zh-TW" altLang="en-US" sz="1200" dirty="0">
+                <a:solidFill>
+                  <a:schemeClr val="accent6"/>
+                </a:solidFill>
+              </a:rPr>
+              <a:t>觀測時間</a:t>
+            </a:r>
+            <a:endParaRPr lang="zh-TW" sz="1200" dirty="0"/>
+          </a:p>
+        </p:txBody>
+      </p:sp>
+      <p:sp>
+        <p:nvSpPr>
+          <p:cNvPr id="18" name="card-535"/>
+          <p:cNvSpPr/>
+          <p:nvPr/>
+        </p:nvSpPr>
+        <p:spPr>
+          <a:xfrm>
+            <a:off x="6245352" y="2011680"/>
+            <a:ext cx="5394960" cy="2880360"/>
           </a:xfrm>
           <a:prstGeom prst="roundRect">
             <a:avLst>
-              <a:gd name="adj" fmla="val 8889"/>
+              <a:gd name="adj" fmla="val 2540"/>
             </a:avLst>
           </a:prstGeom>
           <a:solidFill>
             <a:schemeClr val="bg1"/>
           </a:solidFill>
-          <a:ln/>
-        </p:spPr>
-      </p:sp>
-      <p:sp>
-        <p:nvSpPr>
-          <p:cNvPr id="10" name="text-486"/>
-          <p:cNvSpPr txBox="1"/>
-          <p:nvPr/>
-        </p:nvSpPr>
-        <p:spPr>
-          <a:xfrm>
-            <a:off x="914400" y="2487168"/>
-            <a:ext cx="2834640" cy="822960"/>
+          <a:ln w="12700">
+            <a:solidFill>
+              <a:schemeClr val="bg2"/>
+            </a:solidFill>
+            <a:prstDash val="solid"/>
+          </a:ln>
+          <a:effectLst>
+            <a:outerShdw sx="100000" sy="100000" kx="0" ky="0" algn="bl" rotWithShape="0" blurRad="127000" dist="25400" dir="5400000">
+              <a:srgbClr val="1A2233">
+                <a:alpha val="10000"/>
+              </a:srgbClr>
+            </a:outerShdw>
+          </a:effectLst>
+        </p:spPr>
+      </p:sp>
+      <p:sp>
+        <p:nvSpPr>
+          <p:cNvPr id="19" name="text-536"/>
+          <p:cNvSpPr txBox="1"/>
+          <p:nvPr/>
+        </p:nvSpPr>
+        <p:spPr>
+          <a:xfrm>
+            <a:off x="6565392" y="2212848"/>
+            <a:ext cx="2743200" cy="402336"/>
           </a:xfrm>
           <a:prstGeom prst="rect">
             <a:avLst/>
@@ -10735,178 +12397,42 @@
               <a:buNone/>
             </a:pPr>
             <a:r>
-              <a:rPr lang="zh-TW" altLang="en-US" sz="1400" dirty="0">
+              <a:rPr lang="zh-TW" altLang="en-US" sz="2100" b="1" dirty="0">
                 <a:solidFill>
                   <a:schemeClr val="tx1"/>
                 </a:solidFill>
               </a:rPr>
-              <a:t>文字語意比對：LIVE_PASS</a:t>
-            </a:r>
-            <a:endParaRPr lang="zh-TW" sz="1400" dirty="0"/>
-          </a:p>
-        </p:txBody>
-      </p:sp>
-      <p:sp>
-        <p:nvSpPr>
-          <p:cNvPr id="11" name="card-487"/>
-          <p:cNvSpPr/>
-          <p:nvPr/>
-        </p:nvSpPr>
-        <p:spPr>
-          <a:xfrm>
-            <a:off x="749808" y="3465576"/>
-            <a:ext cx="3118104" cy="822960"/>
+              <a:t>Session 候選</a:t>
+            </a:r>
+            <a:endParaRPr lang="zh-TW" sz="2100" dirty="0"/>
+          </a:p>
+        </p:txBody>
+      </p:sp>
+      <p:sp>
+        <p:nvSpPr>
+          <p:cNvPr id="20" name="chip-pass-537"/>
+          <p:cNvSpPr/>
+          <p:nvPr/>
+        </p:nvSpPr>
+        <p:spPr>
+          <a:xfrm>
+            <a:off x="9955530" y="2258568"/>
+            <a:ext cx="1368704" cy="311404"/>
           </a:xfrm>
           <a:prstGeom prst="roundRect">
             <a:avLst>
-              <a:gd name="adj" fmla="val 8889"/>
+              <a:gd name="adj" fmla="val 50000"/>
             </a:avLst>
           </a:prstGeom>
           <a:solidFill>
-            <a:schemeClr val="bg1"/>
-          </a:solidFill>
-          <a:ln/>
-        </p:spPr>
-      </p:sp>
-      <p:sp>
-        <p:nvSpPr>
-          <p:cNvPr id="12" name="text-488"/>
-          <p:cNvSpPr txBox="1"/>
-          <p:nvPr/>
-        </p:nvSpPr>
-        <p:spPr>
-          <a:xfrm>
-            <a:off x="914400" y="3465576"/>
-            <a:ext cx="2834640" cy="822960"/>
-          </a:xfrm>
-          <a:prstGeom prst="rect">
-            <a:avLst/>
-          </a:prstGeom>
-          <a:noFill/>
-          <a:ln/>
-        </p:spPr>
-        <p:txBody>
-          <a:bodyPr wrap="square" lIns="0" tIns="0" rIns="0" bIns="0" rtlCol="0" anchor="ctr"/>
-          <a:lstStyle/>
-          <a:p>
-            <a:pPr indent="0" marL="0">
-              <a:buNone/>
-            </a:pPr>
-            <a:r>
-              <a:rPr lang="zh-TW" altLang="en-US" sz="1400" dirty="0">
-                <a:solidFill>
-                  <a:schemeClr val="tx1"/>
-                </a:solidFill>
-              </a:rPr>
-              <a:t>補件工具流程：LIVE_PASS</a:t>
-            </a:r>
-            <a:endParaRPr lang="zh-TW" sz="1400" dirty="0"/>
-          </a:p>
-        </p:txBody>
-      </p:sp>
-      <p:sp>
-        <p:nvSpPr>
-          <p:cNvPr id="13" name="card-489"/>
-          <p:cNvSpPr/>
-          <p:nvPr/>
-        </p:nvSpPr>
-        <p:spPr>
-          <a:xfrm>
-            <a:off x="749808" y="4443984"/>
-            <a:ext cx="3118104" cy="822960"/>
-          </a:xfrm>
-          <a:prstGeom prst="roundRect">
-            <a:avLst>
-              <a:gd name="adj" fmla="val 8889"/>
-            </a:avLst>
-          </a:prstGeom>
-          <a:solidFill>
-            <a:schemeClr val="bg1"/>
-          </a:solidFill>
-          <a:ln/>
-        </p:spPr>
-      </p:sp>
-      <p:sp>
-        <p:nvSpPr>
-          <p:cNvPr id="14" name="text-490"/>
-          <p:cNvSpPr txBox="1"/>
-          <p:nvPr/>
-        </p:nvSpPr>
-        <p:spPr>
-          <a:xfrm>
-            <a:off x="914400" y="4443984"/>
-            <a:ext cx="2834640" cy="822960"/>
-          </a:xfrm>
-          <a:prstGeom prst="rect">
-            <a:avLst/>
-          </a:prstGeom>
-          <a:noFill/>
-          <a:ln/>
-        </p:spPr>
-        <p:txBody>
-          <a:bodyPr wrap="square" lIns="0" tIns="0" rIns="0" bIns="0" rtlCol="0" anchor="ctr"/>
-          <a:lstStyle/>
-          <a:p>
-            <a:pPr indent="0" marL="0">
-              <a:buNone/>
-            </a:pPr>
-            <a:r>
-              <a:rPr lang="zh-TW" altLang="en-US" sz="1400" dirty="0">
-                <a:solidFill>
-                  <a:schemeClr val="tx1"/>
-                </a:solidFill>
-              </a:rPr>
-              <a:t>Session 清除與跨人隔離</a:t>
-            </a:r>
-            <a:endParaRPr lang="zh-TW" sz="1400" dirty="0"/>
-          </a:p>
-        </p:txBody>
-      </p:sp>
-      <p:sp>
-        <p:nvSpPr>
-          <p:cNvPr id="15" name="card-491"/>
-          <p:cNvSpPr/>
-          <p:nvPr/>
-        </p:nvSpPr>
-        <p:spPr>
-          <a:xfrm>
-            <a:off x="4334256" y="1600200"/>
-            <a:ext cx="3520440" cy="3931920"/>
-          </a:xfrm>
-          <a:prstGeom prst="roundRect">
-            <a:avLst>
-              <a:gd name="adj" fmla="val 2078"/>
-            </a:avLst>
-          </a:prstGeom>
-          <a:solidFill>
-            <a:schemeClr val="bg2"/>
-          </a:solidFill>
-          <a:ln/>
-        </p:spPr>
-      </p:sp>
-      <p:sp>
-        <p:nvSpPr>
-          <p:cNvPr id="16" name="icon-bg-492"/>
-          <p:cNvSpPr/>
-          <p:nvPr/>
-        </p:nvSpPr>
-        <p:spPr>
-          <a:xfrm>
-            <a:off x="4562856" y="1801368"/>
-            <a:ext cx="457200" cy="457200"/>
-          </a:xfrm>
-          <a:prstGeom prst="ellipse">
-            <a:avLst/>
-          </a:prstGeom>
-          <a:solidFill>
-            <a:schemeClr val="accent3"/>
+            <a:schemeClr val="accent2"/>
           </a:solidFill>
           <a:ln/>
         </p:spPr>
       </p:sp>
       <p:pic>
         <p:nvPicPr>
-          <p:cNvPr id="17" name="icon-493" descr="Clock">    </p:cNvPr>
+          <p:cNvPr id="21" name="chip-icon-538" descr="LIVE_PASS">    </p:cNvPr>
           <p:cNvPicPr>
             <a:picLocks noChangeAspect="1"/>
           </p:cNvPicPr>
@@ -10920,8 +12446,8 @@
         </p:blipFill>
         <p:spPr>
           <a:xfrm>
-            <a:off x="4672584" y="1911096"/>
-            <a:ext cx="237744" cy="237744"/>
+            <a:off x="10065258" y="2320849"/>
+            <a:ext cx="186842" cy="186842"/>
           </a:xfrm>
           <a:prstGeom prst="rect">
             <a:avLst/>
@@ -10930,14 +12456,14 @@
       </p:pic>
       <p:sp>
         <p:nvSpPr>
-          <p:cNvPr id="18" name="text-494"/>
-          <p:cNvSpPr txBox="1"/>
-          <p:nvPr/>
-        </p:nvSpPr>
-        <p:spPr>
-          <a:xfrm>
-            <a:off x="5138928" y="1801368"/>
-            <a:ext cx="2651760" cy="457200"/>
+          <p:cNvPr id="22" name="chip-text-539"/>
+          <p:cNvSpPr txBox="1"/>
+          <p:nvPr/>
+        </p:nvSpPr>
+        <p:spPr>
+          <a:xfrm>
+            <a:off x="10316108" y="2258568"/>
+            <a:ext cx="998982" cy="311404"/>
           </a:xfrm>
           <a:prstGeom prst="rect">
             <a:avLst/>
@@ -10953,236 +12479,272 @@
               <a:buNone/>
             </a:pPr>
             <a:r>
-              <a:rPr lang="zh-TW" altLang="en-US" sz="1700" b="1" dirty="0">
-                <a:solidFill>
-                  <a:schemeClr val="accent3"/>
-                </a:solidFill>
-              </a:rPr>
-              <a:t>已實作，待真實驗證</a:t>
-            </a:r>
-            <a:endParaRPr lang="zh-TW" sz="1700" dirty="0"/>
-          </a:p>
-        </p:txBody>
-      </p:sp>
-      <p:sp>
-        <p:nvSpPr>
-          <p:cNvPr id="19" name="card-495"/>
-          <p:cNvSpPr/>
-          <p:nvPr/>
-        </p:nvSpPr>
-        <p:spPr>
-          <a:xfrm>
-            <a:off x="4535424" y="2487168"/>
-            <a:ext cx="3118104" cy="822960"/>
-          </a:xfrm>
-          <a:prstGeom prst="roundRect">
-            <a:avLst>
-              <a:gd name="adj" fmla="val 8889"/>
-            </a:avLst>
-          </a:prstGeom>
-          <a:solidFill>
-            <a:schemeClr val="bg1"/>
-          </a:solidFill>
-          <a:ln/>
-        </p:spPr>
-      </p:sp>
-      <p:sp>
-        <p:nvSpPr>
-          <p:cNvPr id="20" name="text-496"/>
-          <p:cNvSpPr txBox="1"/>
-          <p:nvPr/>
-        </p:nvSpPr>
-        <p:spPr>
-          <a:xfrm>
-            <a:off x="4700016" y="2487168"/>
-            <a:ext cx="2834640" cy="822960"/>
-          </a:xfrm>
-          <a:prstGeom prst="rect">
-            <a:avLst/>
-          </a:prstGeom>
-          <a:noFill/>
-          <a:ln/>
-        </p:spPr>
-        <p:txBody>
-          <a:bodyPr wrap="square" lIns="0" tIns="0" rIns="0" bIns="0" rtlCol="0" anchor="ctr"/>
-          <a:lstStyle/>
-          <a:p>
-            <a:pPr indent="0" marL="0">
-              <a:buNone/>
-            </a:pPr>
-            <a:r>
-              <a:rPr lang="zh-TW" altLang="en-US" sz="1400" dirty="0">
+              <a:rPr lang="zh-TW" altLang="en-US" sz="1300" b="1" dirty="0">
+                <a:solidFill>
+                  <a:schemeClr val="bg1"/>
+                </a:solidFill>
+              </a:rPr>
+              <a:t>LIVE_PASS</a:t>
+            </a:r>
+            <a:endParaRPr lang="zh-TW" sz="1300" dirty="0"/>
+          </a:p>
+        </p:txBody>
+      </p:sp>
+      <p:sp>
+        <p:nvSpPr>
+          <p:cNvPr id="23" name="text-540"/>
+          <p:cNvSpPr txBox="1"/>
+          <p:nvPr/>
+        </p:nvSpPr>
+        <p:spPr>
+          <a:xfrm>
+            <a:off x="6565392" y="2743200"/>
+            <a:ext cx="4754880" cy="822960"/>
+          </a:xfrm>
+          <a:prstGeom prst="rect">
+            <a:avLst/>
+          </a:prstGeom>
+          <a:noFill/>
+          <a:ln/>
+        </p:spPr>
+        <p:txBody>
+          <a:bodyPr wrap="square" lIns="0" tIns="0" rIns="0" bIns="0" rtlCol="0" anchor="t"/>
+          <a:lstStyle/>
+          <a:p>
+            <a:pPr indent="0" marL="0">
+              <a:buNone/>
+            </a:pPr>
+            <a:r>
+              <a:rPr lang="zh-TW" altLang="en-US" sz="1500" dirty="0">
                 <a:solidFill>
                   <a:schemeClr val="tx1"/>
                 </a:solidFill>
               </a:rPr>
-              <a:t>PDF 預檢：gpt-5.4 最終結果</a:t>
-            </a:r>
-            <a:endParaRPr lang="zh-TW" sz="1400" dirty="0"/>
-          </a:p>
-        </p:txBody>
-      </p:sp>
-      <p:sp>
-        <p:nvSpPr>
-          <p:cNvPr id="21" name="card-497"/>
-          <p:cNvSpPr/>
-          <p:nvPr/>
-        </p:nvSpPr>
-        <p:spPr>
-          <a:xfrm>
-            <a:off x="4535424" y="3465576"/>
-            <a:ext cx="3118104" cy="822960"/>
-          </a:xfrm>
-          <a:prstGeom prst="roundRect">
-            <a:avLst>
-              <a:gd name="adj" fmla="val 8889"/>
-            </a:avLst>
-          </a:prstGeom>
-          <a:solidFill>
-            <a:schemeClr val="bg1"/>
-          </a:solidFill>
-          <a:ln/>
-        </p:spPr>
-      </p:sp>
-      <p:sp>
-        <p:nvSpPr>
-          <p:cNvPr id="22" name="text-498"/>
-          <p:cNvSpPr txBox="1"/>
-          <p:nvPr/>
-        </p:nvSpPr>
-        <p:spPr>
-          <a:xfrm>
-            <a:off x="4700016" y="3465576"/>
-            <a:ext cx="2834640" cy="822960"/>
-          </a:xfrm>
-          <a:prstGeom prst="rect">
-            <a:avLst/>
-          </a:prstGeom>
-          <a:noFill/>
-          <a:ln/>
-        </p:spPr>
-        <p:txBody>
-          <a:bodyPr wrap="square" lIns="0" tIns="0" rIns="0" bIns="0" rtlCol="0" anchor="ctr"/>
-          <a:lstStyle/>
-          <a:p>
-            <a:pPr indent="0" marL="0">
-              <a:buNone/>
-            </a:pPr>
-            <a:r>
-              <a:rPr lang="zh-TW" altLang="en-US" sz="1400" dirty="0">
-                <a:solidFill>
-                  <a:schemeClr val="tx1"/>
-                </a:solidFill>
-              </a:rPr>
-              <a:t>來源 v2 排除：只有離線測試</a:t>
-            </a:r>
-            <a:endParaRPr lang="zh-TW" sz="1400" dirty="0"/>
-          </a:p>
-        </p:txBody>
-      </p:sp>
-      <p:sp>
-        <p:nvSpPr>
-          <p:cNvPr id="23" name="card-499"/>
-          <p:cNvSpPr/>
-          <p:nvPr/>
-        </p:nvSpPr>
-        <p:spPr>
-          <a:xfrm>
-            <a:off x="4535424" y="4443984"/>
-            <a:ext cx="3118104" cy="822960"/>
-          </a:xfrm>
-          <a:prstGeom prst="roundRect">
-            <a:avLst>
-              <a:gd name="adj" fmla="val 8889"/>
-            </a:avLst>
-          </a:prstGeom>
-          <a:solidFill>
-            <a:schemeClr val="bg1"/>
-          </a:solidFill>
-          <a:ln/>
-        </p:spPr>
-      </p:sp>
-      <p:sp>
-        <p:nvSpPr>
-          <p:cNvPr id="24" name="text-500"/>
-          <p:cNvSpPr txBox="1"/>
-          <p:nvPr/>
-        </p:nvSpPr>
-        <p:spPr>
-          <a:xfrm>
-            <a:off x="4700016" y="4443984"/>
-            <a:ext cx="2834640" cy="822960"/>
-          </a:xfrm>
-          <a:prstGeom prst="rect">
-            <a:avLst/>
-          </a:prstGeom>
-          <a:noFill/>
-          <a:ln/>
-        </p:spPr>
-        <p:txBody>
-          <a:bodyPr wrap="square" lIns="0" tIns="0" rIns="0" bIns="0" rtlCol="0" anchor="ctr"/>
-          <a:lstStyle/>
-          <a:p>
-            <a:pPr indent="0" marL="0">
-              <a:buNone/>
-            </a:pPr>
-            <a:r>
-              <a:rPr lang="zh-TW" altLang="en-US" sz="1400" dirty="0">
-                <a:solidFill>
-                  <a:schemeClr val="tx1"/>
-                </a:solidFill>
-              </a:rPr>
-              <a:t>估分區間：未與教師成績校準</a:t>
-            </a:r>
-            <a:endParaRPr lang="zh-TW" sz="1400" dirty="0"/>
-          </a:p>
-        </p:txBody>
-      </p:sp>
-      <p:sp>
-        <p:nvSpPr>
-          <p:cNvPr id="25" name="card-501"/>
-          <p:cNvSpPr/>
-          <p:nvPr/>
-        </p:nvSpPr>
-        <p:spPr>
-          <a:xfrm>
-            <a:off x="8119872" y="1600200"/>
-            <a:ext cx="3520440" cy="3931920"/>
-          </a:xfrm>
-          <a:prstGeom prst="roundRect">
-            <a:avLst>
-              <a:gd name="adj" fmla="val 2078"/>
-            </a:avLst>
-          </a:prstGeom>
-          <a:solidFill>
-            <a:schemeClr val="bg2"/>
-          </a:solidFill>
-          <a:ln/>
-        </p:spPr>
-      </p:sp>
-      <p:sp>
-        <p:nvSpPr>
-          <p:cNvPr id="26" name="icon-bg-502"/>
-          <p:cNvSpPr/>
-          <p:nvPr/>
-        </p:nvSpPr>
-        <p:spPr>
-          <a:xfrm>
-            <a:off x="8348472" y="1801368"/>
-            <a:ext cx="457200" cy="457200"/>
-          </a:xfrm>
-          <a:prstGeom prst="ellipse">
-            <a:avLst/>
-          </a:prstGeom>
-          <a:solidFill>
-            <a:schemeClr val="accent4"/>
-          </a:solidFill>
-          <a:ln/>
-        </p:spPr>
+              <a:t>依序提案、等待確認，使用者確認後完成草稿。</a:t>
+            </a:r>
+            <a:endParaRPr lang="zh-TW" sz="1500" dirty="0"/>
+          </a:p>
+        </p:txBody>
+      </p:sp>
+      <p:sp>
+        <p:nvSpPr>
+          <p:cNvPr id="24" name="text-541"/>
+          <p:cNvSpPr txBox="1"/>
+          <p:nvPr/>
+        </p:nvSpPr>
+        <p:spPr>
+          <a:xfrm>
+            <a:off x="6565392" y="3611880"/>
+            <a:ext cx="1554480" cy="548640"/>
+          </a:xfrm>
+          <a:prstGeom prst="rect">
+            <a:avLst/>
+          </a:prstGeom>
+          <a:noFill/>
+          <a:ln/>
+        </p:spPr>
+        <p:txBody>
+          <a:bodyPr wrap="square" lIns="0" tIns="0" rIns="0" bIns="0" rtlCol="0" anchor="b"/>
+          <a:lstStyle/>
+          <a:p>
+            <a:pPr indent="0" marL="0">
+              <a:buNone/>
+            </a:pPr>
+            <a:r>
+              <a:rPr lang="zh-TW" altLang="en-US" sz="2800" b="1" dirty="0">
+                <a:solidFill>
+                  <a:schemeClr val="accent2"/>
+                </a:solidFill>
+              </a:rPr>
+              <a:t>3</a:t>
+            </a:r>
+            <a:endParaRPr lang="zh-TW" sz="2800" dirty="0"/>
+          </a:p>
+        </p:txBody>
+      </p:sp>
+      <p:sp>
+        <p:nvSpPr>
+          <p:cNvPr id="25" name="text-542"/>
+          <p:cNvSpPr txBox="1"/>
+          <p:nvPr/>
+        </p:nvSpPr>
+        <p:spPr>
+          <a:xfrm>
+            <a:off x="6565392" y="4206240"/>
+            <a:ext cx="1554480" cy="274320"/>
+          </a:xfrm>
+          <a:prstGeom prst="rect">
+            <a:avLst/>
+          </a:prstGeom>
+          <a:noFill/>
+          <a:ln/>
+        </p:spPr>
+        <p:txBody>
+          <a:bodyPr wrap="square" lIns="0" tIns="0" rIns="0" bIns="0" rtlCol="0" anchor="t"/>
+          <a:lstStyle/>
+          <a:p>
+            <a:pPr indent="0" marL="0">
+              <a:buNone/>
+            </a:pPr>
+            <a:r>
+              <a:rPr lang="zh-TW" altLang="en-US" sz="1200" dirty="0">
+                <a:solidFill>
+                  <a:schemeClr val="accent6"/>
+                </a:solidFill>
+              </a:rPr>
+              <a:t>次模型回覆</a:t>
+            </a:r>
+            <a:endParaRPr lang="zh-TW" sz="1200" dirty="0"/>
+          </a:p>
+        </p:txBody>
+      </p:sp>
+      <p:sp>
+        <p:nvSpPr>
+          <p:cNvPr id="26" name="text-543"/>
+          <p:cNvSpPr txBox="1"/>
+          <p:nvPr/>
+        </p:nvSpPr>
+        <p:spPr>
+          <a:xfrm>
+            <a:off x="8165592" y="3611880"/>
+            <a:ext cx="1554480" cy="548640"/>
+          </a:xfrm>
+          <a:prstGeom prst="rect">
+            <a:avLst/>
+          </a:prstGeom>
+          <a:noFill/>
+          <a:ln/>
+        </p:spPr>
+        <p:txBody>
+          <a:bodyPr wrap="square" lIns="0" tIns="0" rIns="0" bIns="0" rtlCol="0" anchor="b"/>
+          <a:lstStyle/>
+          <a:p>
+            <a:pPr indent="0" marL="0">
+              <a:buNone/>
+            </a:pPr>
+            <a:r>
+              <a:rPr lang="zh-TW" altLang="en-US" sz="2800" b="1" dirty="0">
+                <a:solidFill>
+                  <a:schemeClr val="accent2"/>
+                </a:solidFill>
+              </a:rPr>
+              <a:t>4,352</a:t>
+            </a:r>
+            <a:endParaRPr lang="zh-TW" sz="2800" dirty="0"/>
+          </a:p>
+        </p:txBody>
+      </p:sp>
+      <p:sp>
+        <p:nvSpPr>
+          <p:cNvPr id="27" name="text-544"/>
+          <p:cNvSpPr txBox="1"/>
+          <p:nvPr/>
+        </p:nvSpPr>
+        <p:spPr>
+          <a:xfrm>
+            <a:off x="8165592" y="4206240"/>
+            <a:ext cx="1554480" cy="274320"/>
+          </a:xfrm>
+          <a:prstGeom prst="rect">
+            <a:avLst/>
+          </a:prstGeom>
+          <a:noFill/>
+          <a:ln/>
+        </p:spPr>
+        <p:txBody>
+          <a:bodyPr wrap="square" lIns="0" tIns="0" rIns="0" bIns="0" rtlCol="0" anchor="t"/>
+          <a:lstStyle/>
+          <a:p>
+            <a:pPr indent="0" marL="0">
+              <a:buNone/>
+            </a:pPr>
+            <a:r>
+              <a:rPr lang="zh-TW" altLang="en-US" sz="1200" dirty="0">
+                <a:solidFill>
+                  <a:schemeClr val="accent6"/>
+                </a:solidFill>
+              </a:rPr>
+              <a:t>tokens</a:t>
+            </a:r>
+            <a:endParaRPr lang="zh-TW" sz="1200" dirty="0"/>
+          </a:p>
+        </p:txBody>
+      </p:sp>
+      <p:sp>
+        <p:nvSpPr>
+          <p:cNvPr id="28" name="text-545"/>
+          <p:cNvSpPr txBox="1"/>
+          <p:nvPr/>
+        </p:nvSpPr>
+        <p:spPr>
+          <a:xfrm>
+            <a:off x="9765792" y="3611880"/>
+            <a:ext cx="1554480" cy="548640"/>
+          </a:xfrm>
+          <a:prstGeom prst="rect">
+            <a:avLst/>
+          </a:prstGeom>
+          <a:noFill/>
+          <a:ln/>
+        </p:spPr>
+        <p:txBody>
+          <a:bodyPr wrap="square" lIns="0" tIns="0" rIns="0" bIns="0" rtlCol="0" anchor="b"/>
+          <a:lstStyle/>
+          <a:p>
+            <a:pPr indent="0" marL="0">
+              <a:buNone/>
+            </a:pPr>
+            <a:r>
+              <a:rPr lang="zh-TW" altLang="en-US" sz="2800" b="1" dirty="0">
+                <a:solidFill>
+                  <a:schemeClr val="accent2"/>
+                </a:solidFill>
+              </a:rPr>
+              <a:t>5.183 s</a:t>
+            </a:r>
+            <a:endParaRPr lang="zh-TW" sz="2800" dirty="0"/>
+          </a:p>
+        </p:txBody>
+      </p:sp>
+      <p:sp>
+        <p:nvSpPr>
+          <p:cNvPr id="29" name="text-546"/>
+          <p:cNvSpPr txBox="1"/>
+          <p:nvPr/>
+        </p:nvSpPr>
+        <p:spPr>
+          <a:xfrm>
+            <a:off x="9765792" y="4206240"/>
+            <a:ext cx="1554480" cy="274320"/>
+          </a:xfrm>
+          <a:prstGeom prst="rect">
+            <a:avLst/>
+          </a:prstGeom>
+          <a:noFill/>
+          <a:ln/>
+        </p:spPr>
+        <p:txBody>
+          <a:bodyPr wrap="square" lIns="0" tIns="0" rIns="0" bIns="0" rtlCol="0" anchor="t"/>
+          <a:lstStyle/>
+          <a:p>
+            <a:pPr indent="0" marL="0">
+              <a:buNone/>
+            </a:pPr>
+            <a:r>
+              <a:rPr lang="zh-TW" altLang="en-US" sz="1200" dirty="0">
+                <a:solidFill>
+                  <a:schemeClr val="accent6"/>
+                </a:solidFill>
+              </a:rPr>
+              <a:t>觀測時間</a:t>
+            </a:r>
+            <a:endParaRPr lang="zh-TW" sz="1200" dirty="0"/>
+          </a:p>
+        </p:txBody>
       </p:sp>
       <p:pic>
         <p:nvPicPr>
-          <p:cNvPr id="27" name="icon-503" descr="Map">    </p:cNvPr>
+          <p:cNvPr id="30" name="icon-547" descr="TriangleAlert">    </p:cNvPr>
           <p:cNvPicPr>
             <a:picLocks noChangeAspect="1"/>
           </p:cNvPicPr>
@@ -11196,8 +12758,8 @@
         </p:blipFill>
         <p:spPr>
           <a:xfrm>
-            <a:off x="8458200" y="1911096"/>
-            <a:ext cx="237744" cy="237744"/>
+            <a:off x="548640" y="5230368"/>
+            <a:ext cx="329184" cy="329184"/>
           </a:xfrm>
           <a:prstGeom prst="rect">
             <a:avLst/>
@@ -11206,14 +12768,14 @@
       </p:pic>
       <p:sp>
         <p:nvSpPr>
-          <p:cNvPr id="28" name="text-504"/>
-          <p:cNvSpPr txBox="1"/>
-          <p:nvPr/>
-        </p:nvSpPr>
-        <p:spPr>
-          <a:xfrm>
-            <a:off x="8924544" y="1801368"/>
-            <a:ext cx="2651760" cy="457200"/>
+          <p:cNvPr id="31" name="text-548"/>
+          <p:cNvSpPr txBox="1"/>
+          <p:nvPr/>
+        </p:nvSpPr>
+        <p:spPr>
+          <a:xfrm>
+            <a:off x="1005840" y="5212080"/>
+            <a:ext cx="10607040" cy="365760"/>
           </a:xfrm>
           <a:prstGeom prst="rect">
             <a:avLst/>
@@ -11229,49 +12791,27 @@
               <a:buNone/>
             </a:pPr>
             <a:r>
-              <a:rPr lang="zh-TW" altLang="en-US" sz="1700" b="1" dirty="0">
-                <a:solidFill>
-                  <a:schemeClr val="accent4"/>
-                </a:solidFill>
-              </a:rPr>
-              <a:t>規劃中（期末前）</a:t>
-            </a:r>
-            <a:endParaRPr lang="zh-TW" sz="1700" dirty="0"/>
-          </a:p>
-        </p:txBody>
-      </p:sp>
-      <p:sp>
-        <p:nvSpPr>
-          <p:cNvPr id="29" name="card-505"/>
-          <p:cNvSpPr/>
-          <p:nvPr/>
-        </p:nvSpPr>
-        <p:spPr>
-          <a:xfrm>
-            <a:off x="8321040" y="2487168"/>
-            <a:ext cx="3118104" cy="822960"/>
-          </a:xfrm>
-          <a:prstGeom prst="roundRect">
-            <a:avLst>
-              <a:gd name="adj" fmla="val 8889"/>
-            </a:avLst>
-          </a:prstGeom>
-          <a:solidFill>
-            <a:schemeClr val="bg1"/>
-          </a:solidFill>
-          <a:ln/>
-        </p:spPr>
-      </p:sp>
-      <p:sp>
-        <p:nvSpPr>
-          <p:cNvPr id="30" name="text-506"/>
-          <p:cNvSpPr txBox="1"/>
-          <p:nvPr/>
-        </p:nvSpPr>
-        <p:spPr>
-          <a:xfrm>
-            <a:off x="8485632" y="2487168"/>
-            <a:ext cx="2834640" cy="822960"/>
+              <a:rPr lang="zh-TW" altLang="en-US" sz="1600" b="1" dirty="0">
+                <a:solidFill>
+                  <a:schemeClr val="accent3"/>
+                </a:solidFill>
+              </a:rPr>
+              <a:t>只有一組樣本，而且兩者完成的終點不同：不能宣稱記憶提升了品質或降低成本。</a:t>
+            </a:r>
+            <a:endParaRPr lang="zh-TW" sz="1600" dirty="0"/>
+          </a:p>
+        </p:txBody>
+      </p:sp>
+      <p:sp>
+        <p:nvSpPr>
+          <p:cNvPr id="32" name="text-549"/>
+          <p:cNvSpPr txBox="1"/>
+          <p:nvPr/>
+        </p:nvSpPr>
+        <p:spPr>
+          <a:xfrm>
+            <a:off x="1005840" y="5650992"/>
+            <a:ext cx="10607040" cy="329184"/>
           </a:xfrm>
           <a:prstGeom prst="rect">
             <a:avLst/>
@@ -11289,188 +12829,12 @@
             <a:r>
               <a:rPr lang="zh-TW" altLang="en-US" sz="1400" dirty="0">
                 <a:solidFill>
-                  <a:schemeClr val="tx1"/>
-                </a:solidFill>
-              </a:rPr>
-              <a:t>P0　判讀結果接入草稿工具</a:t>
+                  <a:schemeClr val="accent6"/>
+                </a:solidFill>
+              </a:rPr>
+              <a:t>課程指定的 Google Cloud／ADC Gemini：LIVE_NOT_RUN（依組員選擇使用 OpenAI，不能拿來替代）。</a:t>
             </a:r>
             <a:endParaRPr lang="zh-TW" sz="1400" dirty="0"/>
-          </a:p>
-        </p:txBody>
-      </p:sp>
-      <p:sp>
-        <p:nvSpPr>
-          <p:cNvPr id="31" name="card-507"/>
-          <p:cNvSpPr/>
-          <p:nvPr/>
-        </p:nvSpPr>
-        <p:spPr>
-          <a:xfrm>
-            <a:off x="8321040" y="3465576"/>
-            <a:ext cx="3118104" cy="822960"/>
-          </a:xfrm>
-          <a:prstGeom prst="roundRect">
-            <a:avLst>
-              <a:gd name="adj" fmla="val 8889"/>
-            </a:avLst>
-          </a:prstGeom>
-          <a:solidFill>
-            <a:schemeClr val="bg1"/>
-          </a:solidFill>
-          <a:ln/>
-        </p:spPr>
-      </p:sp>
-      <p:sp>
-        <p:nvSpPr>
-          <p:cNvPr id="32" name="text-508"/>
-          <p:cNvSpPr txBox="1"/>
-          <p:nvPr/>
-        </p:nvSpPr>
-        <p:spPr>
-          <a:xfrm>
-            <a:off x="8485632" y="3465576"/>
-            <a:ext cx="2834640" cy="822960"/>
-          </a:xfrm>
-          <a:prstGeom prst="rect">
-            <a:avLst/>
-          </a:prstGeom>
-          <a:noFill/>
-          <a:ln/>
-        </p:spPr>
-        <p:txBody>
-          <a:bodyPr wrap="square" lIns="0" tIns="0" rIns="0" bIns="0" rtlCol="0" anchor="ctr"/>
-          <a:lstStyle/>
-          <a:p>
-            <a:pPr indent="0" marL="0">
-              <a:buNone/>
-            </a:pPr>
-            <a:r>
-              <a:rPr lang="zh-TW" altLang="en-US" sz="1400" dirty="0">
-                <a:solidFill>
-                  <a:schemeClr val="tx1"/>
-                </a:solidFill>
-              </a:rPr>
-              <a:t>P0　20 組教師標註案例</a:t>
-            </a:r>
-            <a:endParaRPr lang="zh-TW" sz="1400" dirty="0"/>
-          </a:p>
-        </p:txBody>
-      </p:sp>
-      <p:sp>
-        <p:nvSpPr>
-          <p:cNvPr id="33" name="card-509"/>
-          <p:cNvSpPr/>
-          <p:nvPr/>
-        </p:nvSpPr>
-        <p:spPr>
-          <a:xfrm>
-            <a:off x="8321040" y="4443984"/>
-            <a:ext cx="3118104" cy="822960"/>
-          </a:xfrm>
-          <a:prstGeom prst="roundRect">
-            <a:avLst>
-              <a:gd name="adj" fmla="val 8889"/>
-            </a:avLst>
-          </a:prstGeom>
-          <a:solidFill>
-            <a:schemeClr val="bg1"/>
-          </a:solidFill>
-          <a:ln/>
-        </p:spPr>
-      </p:sp>
-      <p:sp>
-        <p:nvSpPr>
-          <p:cNvPr id="34" name="text-510"/>
-          <p:cNvSpPr txBox="1"/>
-          <p:nvPr/>
-        </p:nvSpPr>
-        <p:spPr>
-          <a:xfrm>
-            <a:off x="8485632" y="4443984"/>
-            <a:ext cx="2834640" cy="822960"/>
-          </a:xfrm>
-          <a:prstGeom prst="rect">
-            <a:avLst/>
-          </a:prstGeom>
-          <a:noFill/>
-          <a:ln/>
-        </p:spPr>
-        <p:txBody>
-          <a:bodyPr wrap="square" lIns="0" tIns="0" rIns="0" bIns="0" rtlCol="0" anchor="ctr"/>
-          <a:lstStyle/>
-          <a:p>
-            <a:pPr indent="0" marL="0">
-              <a:buNone/>
-            </a:pPr>
-            <a:r>
-              <a:rPr lang="zh-TW" altLang="en-US" sz="1400" dirty="0">
-                <a:solidFill>
-                  <a:schemeClr val="tx1"/>
-                </a:solidFill>
-              </a:rPr>
-              <a:t>P1　掃描 PDF OCR、正式登入</a:t>
-            </a:r>
-            <a:endParaRPr lang="zh-TW" sz="1400" dirty="0"/>
-          </a:p>
-        </p:txBody>
-      </p:sp>
-      <p:pic>
-        <p:nvPicPr>
-          <p:cNvPr id="35" name="icon-511" descr="Target">    </p:cNvPr>
-          <p:cNvPicPr>
-            <a:picLocks noChangeAspect="1"/>
-          </p:cNvPicPr>
-          <p:nvPr/>
-        </p:nvPicPr>
-        <p:blipFill>
-          <a:blip r:embed="rId4"/>
-          <a:stretch>
-            <a:fillRect/>
-          </a:stretch>
-        </p:blipFill>
-        <p:spPr>
-          <a:xfrm>
-            <a:off x="548640" y="5760720"/>
-            <a:ext cx="310896" cy="310896"/>
-          </a:xfrm>
-          <a:prstGeom prst="rect">
-            <a:avLst/>
-          </a:prstGeom>
-        </p:spPr>
-      </p:pic>
-      <p:sp>
-        <p:nvSpPr>
-          <p:cNvPr id="36" name="text-512"/>
-          <p:cNvSpPr txBox="1"/>
-          <p:nvPr/>
-        </p:nvSpPr>
-        <p:spPr>
-          <a:xfrm>
-            <a:off x="987552" y="5742432"/>
-            <a:ext cx="10607040" cy="365760"/>
-          </a:xfrm>
-          <a:prstGeom prst="rect">
-            <a:avLst/>
-          </a:prstGeom>
-          <a:noFill/>
-          <a:ln/>
-        </p:spPr>
-        <p:txBody>
-          <a:bodyPr wrap="square" lIns="0" tIns="0" rIns="0" bIns="0" rtlCol="0" anchor="ctr"/>
-          <a:lstStyle/>
-          <a:p>
-            <a:pPr indent="0" marL="0">
-              <a:buNone/>
-            </a:pPr>
-            <a:r>
-              <a:rPr lang="zh-TW" altLang="en-US" sz="1500" b="1" dirty="0">
-                <a:solidFill>
-                  <a:schemeClr val="tx1"/>
-                </a:solidFill>
-              </a:rPr>
-              <a:t>驗收：20 組標註案例 · 跨人隔離 · 來源變更拒寫 · 可重現 trace，並分開報告正確率與拒答率。</a:t>
-            </a:r>
-            <a:endParaRPr lang="zh-TW" sz="1500" dirty="0"/>
           </a:p>
         </p:txBody>
       </p:sp>
@@ -11573,10 +12937,10 @@
             <a:r>
               <a:rPr lang="zh-TW" altLang="en-US" sz="1300" b="1" dirty="0">
                 <a:solidFill>
-                  <a:schemeClr val="accent1"/>
-                </a:solidFill>
-              </a:rPr>
-              <a:t>團隊與後續</a:t>
+                  <a:schemeClr val="accent6"/>
+                </a:solidFill>
+              </a:rPr>
+              <a:t>已完成、待證明與規劃</a:t>
             </a:r>
             <a:endParaRPr lang="zh-TW" sz="1300" dirty="0"/>
           </a:p>
@@ -11611,6 +12975,1040 @@
             <a:r>
               <a:rPr lang="zh-TW" altLang="en-US" sz="3000" b="1" dirty="0">
                 <a:solidFill>
+                  <a:schemeClr val="tx1"/>
+                </a:solidFill>
+              </a:rPr>
+              <a:t>下一步：把判讀結果接進草稿工具</a:t>
+            </a:r>
+            <a:endParaRPr lang="zh-TW" sz="3000" dirty="0"/>
+          </a:p>
+        </p:txBody>
+      </p:sp>
+      <p:sp>
+        <p:nvSpPr>
+          <p:cNvPr id="5" name="card-550"/>
+          <p:cNvSpPr/>
+          <p:nvPr/>
+        </p:nvSpPr>
+        <p:spPr>
+          <a:xfrm>
+            <a:off x="548640" y="1600200"/>
+            <a:ext cx="3520440" cy="3931920"/>
+          </a:xfrm>
+          <a:prstGeom prst="roundRect">
+            <a:avLst>
+              <a:gd name="adj" fmla="val 2078"/>
+            </a:avLst>
+          </a:prstGeom>
+          <a:solidFill>
+            <a:schemeClr val="bg2"/>
+          </a:solidFill>
+          <a:ln/>
+        </p:spPr>
+      </p:sp>
+      <p:sp>
+        <p:nvSpPr>
+          <p:cNvPr id="6" name="icon-bg-551"/>
+          <p:cNvSpPr/>
+          <p:nvPr/>
+        </p:nvSpPr>
+        <p:spPr>
+          <a:xfrm>
+            <a:off x="777240" y="1801368"/>
+            <a:ext cx="457200" cy="457200"/>
+          </a:xfrm>
+          <a:prstGeom prst="ellipse">
+            <a:avLst/>
+          </a:prstGeom>
+          <a:solidFill>
+            <a:schemeClr val="accent2"/>
+          </a:solidFill>
+          <a:ln/>
+        </p:spPr>
+      </p:sp>
+      <p:pic>
+        <p:nvPicPr>
+          <p:cNvPr id="7" name="icon-552" descr="CircleCheck">    </p:cNvPr>
+          <p:cNvPicPr>
+            <a:picLocks noChangeAspect="1"/>
+          </p:cNvPicPr>
+          <p:nvPr/>
+        </p:nvPicPr>
+        <p:blipFill>
+          <a:blip r:embed="rId1"/>
+          <a:stretch>
+            <a:fillRect/>
+          </a:stretch>
+        </p:blipFill>
+        <p:spPr>
+          <a:xfrm>
+            <a:off x="886968" y="1911096"/>
+            <a:ext cx="237744" cy="237744"/>
+          </a:xfrm>
+          <a:prstGeom prst="rect">
+            <a:avLst/>
+          </a:prstGeom>
+        </p:spPr>
+      </p:pic>
+      <p:sp>
+        <p:nvSpPr>
+          <p:cNvPr id="8" name="text-553"/>
+          <p:cNvSpPr txBox="1"/>
+          <p:nvPr/>
+        </p:nvSpPr>
+        <p:spPr>
+          <a:xfrm>
+            <a:off x="1353312" y="1801368"/>
+            <a:ext cx="2651760" cy="457200"/>
+          </a:xfrm>
+          <a:prstGeom prst="rect">
+            <a:avLst/>
+          </a:prstGeom>
+          <a:noFill/>
+          <a:ln/>
+        </p:spPr>
+        <p:txBody>
+          <a:bodyPr wrap="square" lIns="0" tIns="0" rIns="0" bIns="0" rtlCol="0" anchor="ctr"/>
+          <a:lstStyle/>
+          <a:p>
+            <a:pPr indent="0" marL="0">
+              <a:buNone/>
+            </a:pPr>
+            <a:r>
+              <a:rPr lang="zh-TW" altLang="en-US" sz="1700" b="1" dirty="0">
+                <a:solidFill>
+                  <a:schemeClr val="accent2"/>
+                </a:solidFill>
+              </a:rPr>
+              <a:t>已完成且已驗證</a:t>
+            </a:r>
+            <a:endParaRPr lang="zh-TW" sz="1700" dirty="0"/>
+          </a:p>
+        </p:txBody>
+      </p:sp>
+      <p:sp>
+        <p:nvSpPr>
+          <p:cNvPr id="9" name="card-554"/>
+          <p:cNvSpPr/>
+          <p:nvPr/>
+        </p:nvSpPr>
+        <p:spPr>
+          <a:xfrm>
+            <a:off x="749808" y="2487168"/>
+            <a:ext cx="3118104" cy="822960"/>
+          </a:xfrm>
+          <a:prstGeom prst="roundRect">
+            <a:avLst>
+              <a:gd name="adj" fmla="val 8889"/>
+            </a:avLst>
+          </a:prstGeom>
+          <a:solidFill>
+            <a:schemeClr val="bg1"/>
+          </a:solidFill>
+          <a:ln/>
+        </p:spPr>
+      </p:sp>
+      <p:sp>
+        <p:nvSpPr>
+          <p:cNvPr id="10" name="text-555"/>
+          <p:cNvSpPr txBox="1"/>
+          <p:nvPr/>
+        </p:nvSpPr>
+        <p:spPr>
+          <a:xfrm>
+            <a:off x="914400" y="2487168"/>
+            <a:ext cx="2834640" cy="822960"/>
+          </a:xfrm>
+          <a:prstGeom prst="rect">
+            <a:avLst/>
+          </a:prstGeom>
+          <a:noFill/>
+          <a:ln/>
+        </p:spPr>
+        <p:txBody>
+          <a:bodyPr wrap="square" lIns="0" tIns="0" rIns="0" bIns="0" rtlCol="0" anchor="ctr"/>
+          <a:lstStyle/>
+          <a:p>
+            <a:pPr indent="0" marL="0">
+              <a:buNone/>
+            </a:pPr>
+            <a:r>
+              <a:rPr lang="zh-TW" altLang="en-US" sz="1400" dirty="0">
+                <a:solidFill>
+                  <a:schemeClr val="tx1"/>
+                </a:solidFill>
+              </a:rPr>
+              <a:t>文字語意比對：LIVE_PASS</a:t>
+            </a:r>
+            <a:endParaRPr lang="zh-TW" sz="1400" dirty="0"/>
+          </a:p>
+        </p:txBody>
+      </p:sp>
+      <p:sp>
+        <p:nvSpPr>
+          <p:cNvPr id="11" name="card-556"/>
+          <p:cNvSpPr/>
+          <p:nvPr/>
+        </p:nvSpPr>
+        <p:spPr>
+          <a:xfrm>
+            <a:off x="749808" y="3465576"/>
+            <a:ext cx="3118104" cy="822960"/>
+          </a:xfrm>
+          <a:prstGeom prst="roundRect">
+            <a:avLst>
+              <a:gd name="adj" fmla="val 8889"/>
+            </a:avLst>
+          </a:prstGeom>
+          <a:solidFill>
+            <a:schemeClr val="bg1"/>
+          </a:solidFill>
+          <a:ln/>
+        </p:spPr>
+      </p:sp>
+      <p:sp>
+        <p:nvSpPr>
+          <p:cNvPr id="12" name="text-557"/>
+          <p:cNvSpPr txBox="1"/>
+          <p:nvPr/>
+        </p:nvSpPr>
+        <p:spPr>
+          <a:xfrm>
+            <a:off x="914400" y="3465576"/>
+            <a:ext cx="2834640" cy="822960"/>
+          </a:xfrm>
+          <a:prstGeom prst="rect">
+            <a:avLst/>
+          </a:prstGeom>
+          <a:noFill/>
+          <a:ln/>
+        </p:spPr>
+        <p:txBody>
+          <a:bodyPr wrap="square" lIns="0" tIns="0" rIns="0" bIns="0" rtlCol="0" anchor="ctr"/>
+          <a:lstStyle/>
+          <a:p>
+            <a:pPr indent="0" marL="0">
+              <a:buNone/>
+            </a:pPr>
+            <a:r>
+              <a:rPr lang="zh-TW" altLang="en-US" sz="1400" dirty="0">
+                <a:solidFill>
+                  <a:schemeClr val="tx1"/>
+                </a:solidFill>
+              </a:rPr>
+              <a:t>補件工具流程：LIVE_PASS</a:t>
+            </a:r>
+            <a:endParaRPr lang="zh-TW" sz="1400" dirty="0"/>
+          </a:p>
+        </p:txBody>
+      </p:sp>
+      <p:sp>
+        <p:nvSpPr>
+          <p:cNvPr id="13" name="card-558"/>
+          <p:cNvSpPr/>
+          <p:nvPr/>
+        </p:nvSpPr>
+        <p:spPr>
+          <a:xfrm>
+            <a:off x="749808" y="4443984"/>
+            <a:ext cx="3118104" cy="822960"/>
+          </a:xfrm>
+          <a:prstGeom prst="roundRect">
+            <a:avLst>
+              <a:gd name="adj" fmla="val 8889"/>
+            </a:avLst>
+          </a:prstGeom>
+          <a:solidFill>
+            <a:schemeClr val="bg1"/>
+          </a:solidFill>
+          <a:ln/>
+        </p:spPr>
+      </p:sp>
+      <p:sp>
+        <p:nvSpPr>
+          <p:cNvPr id="14" name="text-559"/>
+          <p:cNvSpPr txBox="1"/>
+          <p:nvPr/>
+        </p:nvSpPr>
+        <p:spPr>
+          <a:xfrm>
+            <a:off x="914400" y="4443984"/>
+            <a:ext cx="2834640" cy="822960"/>
+          </a:xfrm>
+          <a:prstGeom prst="rect">
+            <a:avLst/>
+          </a:prstGeom>
+          <a:noFill/>
+          <a:ln/>
+        </p:spPr>
+        <p:txBody>
+          <a:bodyPr wrap="square" lIns="0" tIns="0" rIns="0" bIns="0" rtlCol="0" anchor="ctr"/>
+          <a:lstStyle/>
+          <a:p>
+            <a:pPr indent="0" marL="0">
+              <a:buNone/>
+            </a:pPr>
+            <a:r>
+              <a:rPr lang="zh-TW" altLang="en-US" sz="1400" dirty="0">
+                <a:solidFill>
+                  <a:schemeClr val="tx1"/>
+                </a:solidFill>
+              </a:rPr>
+              <a:t>Session 清除與跨人隔離</a:t>
+            </a:r>
+            <a:endParaRPr lang="zh-TW" sz="1400" dirty="0"/>
+          </a:p>
+        </p:txBody>
+      </p:sp>
+      <p:sp>
+        <p:nvSpPr>
+          <p:cNvPr id="15" name="card-560"/>
+          <p:cNvSpPr/>
+          <p:nvPr/>
+        </p:nvSpPr>
+        <p:spPr>
+          <a:xfrm>
+            <a:off x="4334256" y="1600200"/>
+            <a:ext cx="3520440" cy="3931920"/>
+          </a:xfrm>
+          <a:prstGeom prst="roundRect">
+            <a:avLst>
+              <a:gd name="adj" fmla="val 2078"/>
+            </a:avLst>
+          </a:prstGeom>
+          <a:solidFill>
+            <a:schemeClr val="bg2"/>
+          </a:solidFill>
+          <a:ln/>
+        </p:spPr>
+      </p:sp>
+      <p:sp>
+        <p:nvSpPr>
+          <p:cNvPr id="16" name="icon-bg-561"/>
+          <p:cNvSpPr/>
+          <p:nvPr/>
+        </p:nvSpPr>
+        <p:spPr>
+          <a:xfrm>
+            <a:off x="4562856" y="1801368"/>
+            <a:ext cx="457200" cy="457200"/>
+          </a:xfrm>
+          <a:prstGeom prst="ellipse">
+            <a:avLst/>
+          </a:prstGeom>
+          <a:solidFill>
+            <a:schemeClr val="accent3"/>
+          </a:solidFill>
+          <a:ln/>
+        </p:spPr>
+      </p:sp>
+      <p:pic>
+        <p:nvPicPr>
+          <p:cNvPr id="17" name="icon-562" descr="Clock">    </p:cNvPr>
+          <p:cNvPicPr>
+            <a:picLocks noChangeAspect="1"/>
+          </p:cNvPicPr>
+          <p:nvPr/>
+        </p:nvPicPr>
+        <p:blipFill>
+          <a:blip r:embed="rId2"/>
+          <a:stretch>
+            <a:fillRect/>
+          </a:stretch>
+        </p:blipFill>
+        <p:spPr>
+          <a:xfrm>
+            <a:off x="4672584" y="1911096"/>
+            <a:ext cx="237744" cy="237744"/>
+          </a:xfrm>
+          <a:prstGeom prst="rect">
+            <a:avLst/>
+          </a:prstGeom>
+        </p:spPr>
+      </p:pic>
+      <p:sp>
+        <p:nvSpPr>
+          <p:cNvPr id="18" name="text-563"/>
+          <p:cNvSpPr txBox="1"/>
+          <p:nvPr/>
+        </p:nvSpPr>
+        <p:spPr>
+          <a:xfrm>
+            <a:off x="5138928" y="1801368"/>
+            <a:ext cx="2651760" cy="457200"/>
+          </a:xfrm>
+          <a:prstGeom prst="rect">
+            <a:avLst/>
+          </a:prstGeom>
+          <a:noFill/>
+          <a:ln/>
+        </p:spPr>
+        <p:txBody>
+          <a:bodyPr wrap="square" lIns="0" tIns="0" rIns="0" bIns="0" rtlCol="0" anchor="ctr"/>
+          <a:lstStyle/>
+          <a:p>
+            <a:pPr indent="0" marL="0">
+              <a:buNone/>
+            </a:pPr>
+            <a:r>
+              <a:rPr lang="zh-TW" altLang="en-US" sz="1700" b="1" dirty="0">
+                <a:solidFill>
+                  <a:schemeClr val="accent3"/>
+                </a:solidFill>
+              </a:rPr>
+              <a:t>已實作，效果待證明</a:t>
+            </a:r>
+            <a:endParaRPr lang="zh-TW" sz="1700" dirty="0"/>
+          </a:p>
+        </p:txBody>
+      </p:sp>
+      <p:sp>
+        <p:nvSpPr>
+          <p:cNvPr id="19" name="card-564"/>
+          <p:cNvSpPr/>
+          <p:nvPr/>
+        </p:nvSpPr>
+        <p:spPr>
+          <a:xfrm>
+            <a:off x="4535424" y="2487168"/>
+            <a:ext cx="3118104" cy="822960"/>
+          </a:xfrm>
+          <a:prstGeom prst="roundRect">
+            <a:avLst>
+              <a:gd name="adj" fmla="val 8889"/>
+            </a:avLst>
+          </a:prstGeom>
+          <a:solidFill>
+            <a:schemeClr val="bg1"/>
+          </a:solidFill>
+          <a:ln/>
+        </p:spPr>
+      </p:sp>
+      <p:sp>
+        <p:nvSpPr>
+          <p:cNvPr id="20" name="text-565"/>
+          <p:cNvSpPr txBox="1"/>
+          <p:nvPr/>
+        </p:nvSpPr>
+        <p:spPr>
+          <a:xfrm>
+            <a:off x="4700016" y="2487168"/>
+            <a:ext cx="2834640" cy="822960"/>
+          </a:xfrm>
+          <a:prstGeom prst="rect">
+            <a:avLst/>
+          </a:prstGeom>
+          <a:noFill/>
+          <a:ln/>
+        </p:spPr>
+        <p:txBody>
+          <a:bodyPr wrap="square" lIns="0" tIns="0" rIns="0" bIns="0" rtlCol="0" anchor="ctr"/>
+          <a:lstStyle/>
+          <a:p>
+            <a:pPr indent="0" marL="0">
+              <a:buNone/>
+            </a:pPr>
+            <a:r>
+              <a:rPr lang="zh-TW" altLang="en-US" sz="1400" dirty="0">
+                <a:solidFill>
+                  <a:schemeClr val="tx1"/>
+                </a:solidFill>
+              </a:rPr>
+              <a:t>W6 評估後修訂：未證明改善</a:t>
+            </a:r>
+            <a:endParaRPr lang="zh-TW" sz="1400" dirty="0"/>
+          </a:p>
+        </p:txBody>
+      </p:sp>
+      <p:sp>
+        <p:nvSpPr>
+          <p:cNvPr id="21" name="card-566"/>
+          <p:cNvSpPr/>
+          <p:nvPr/>
+        </p:nvSpPr>
+        <p:spPr>
+          <a:xfrm>
+            <a:off x="4535424" y="3465576"/>
+            <a:ext cx="3118104" cy="822960"/>
+          </a:xfrm>
+          <a:prstGeom prst="roundRect">
+            <a:avLst>
+              <a:gd name="adj" fmla="val 8889"/>
+            </a:avLst>
+          </a:prstGeom>
+          <a:solidFill>
+            <a:schemeClr val="bg1"/>
+          </a:solidFill>
+          <a:ln/>
+        </p:spPr>
+      </p:sp>
+      <p:sp>
+        <p:nvSpPr>
+          <p:cNvPr id="22" name="text-567"/>
+          <p:cNvSpPr txBox="1"/>
+          <p:nvPr/>
+        </p:nvSpPr>
+        <p:spPr>
+          <a:xfrm>
+            <a:off x="4700016" y="3465576"/>
+            <a:ext cx="2834640" cy="822960"/>
+          </a:xfrm>
+          <a:prstGeom prst="rect">
+            <a:avLst/>
+          </a:prstGeom>
+          <a:noFill/>
+          <a:ln/>
+        </p:spPr>
+        <p:txBody>
+          <a:bodyPr wrap="square" lIns="0" tIns="0" rIns="0" bIns="0" rtlCol="0" anchor="ctr"/>
+          <a:lstStyle/>
+          <a:p>
+            <a:pPr indent="0" marL="0">
+              <a:buNone/>
+            </a:pPr>
+            <a:r>
+              <a:rPr lang="zh-TW" altLang="en-US" sz="1400" dirty="0">
+                <a:solidFill>
+                  <a:schemeClr val="tx1"/>
+                </a:solidFill>
+              </a:rPr>
+              <a:t>PDF 預檢：通過，業務預期 6／7</a:t>
+            </a:r>
+            <a:endParaRPr lang="zh-TW" sz="1400" dirty="0"/>
+          </a:p>
+        </p:txBody>
+      </p:sp>
+      <p:sp>
+        <p:nvSpPr>
+          <p:cNvPr id="23" name="card-568"/>
+          <p:cNvSpPr/>
+          <p:nvPr/>
+        </p:nvSpPr>
+        <p:spPr>
+          <a:xfrm>
+            <a:off x="4535424" y="4443984"/>
+            <a:ext cx="3118104" cy="822960"/>
+          </a:xfrm>
+          <a:prstGeom prst="roundRect">
+            <a:avLst>
+              <a:gd name="adj" fmla="val 8889"/>
+            </a:avLst>
+          </a:prstGeom>
+          <a:solidFill>
+            <a:schemeClr val="bg1"/>
+          </a:solidFill>
+          <a:ln/>
+        </p:spPr>
+      </p:sp>
+      <p:sp>
+        <p:nvSpPr>
+          <p:cNvPr id="24" name="text-569"/>
+          <p:cNvSpPr txBox="1"/>
+          <p:nvPr/>
+        </p:nvSpPr>
+        <p:spPr>
+          <a:xfrm>
+            <a:off x="4700016" y="4443984"/>
+            <a:ext cx="2834640" cy="822960"/>
+          </a:xfrm>
+          <a:prstGeom prst="rect">
+            <a:avLst/>
+          </a:prstGeom>
+          <a:noFill/>
+          <a:ln/>
+        </p:spPr>
+        <p:txBody>
+          <a:bodyPr wrap="square" lIns="0" tIns="0" rIns="0" bIns="0" rtlCol="0" anchor="ctr"/>
+          <a:lstStyle/>
+          <a:p>
+            <a:pPr indent="0" marL="0">
+              <a:buNone/>
+            </a:pPr>
+            <a:r>
+              <a:rPr lang="zh-TW" altLang="en-US" sz="1400" dirty="0">
+                <a:solidFill>
+                  <a:schemeClr val="tx1"/>
+                </a:solidFill>
+              </a:rPr>
+              <a:t>來源 v2 僅離線；估分未校準</a:t>
+            </a:r>
+            <a:endParaRPr lang="zh-TW" sz="1400" dirty="0"/>
+          </a:p>
+        </p:txBody>
+      </p:sp>
+      <p:sp>
+        <p:nvSpPr>
+          <p:cNvPr id="25" name="card-570"/>
+          <p:cNvSpPr/>
+          <p:nvPr/>
+        </p:nvSpPr>
+        <p:spPr>
+          <a:xfrm>
+            <a:off x="8119872" y="1600200"/>
+            <a:ext cx="3520440" cy="3931920"/>
+          </a:xfrm>
+          <a:prstGeom prst="roundRect">
+            <a:avLst>
+              <a:gd name="adj" fmla="val 2078"/>
+            </a:avLst>
+          </a:prstGeom>
+          <a:solidFill>
+            <a:schemeClr val="bg2"/>
+          </a:solidFill>
+          <a:ln/>
+        </p:spPr>
+      </p:sp>
+      <p:sp>
+        <p:nvSpPr>
+          <p:cNvPr id="26" name="icon-bg-571"/>
+          <p:cNvSpPr/>
+          <p:nvPr/>
+        </p:nvSpPr>
+        <p:spPr>
+          <a:xfrm>
+            <a:off x="8348472" y="1801368"/>
+            <a:ext cx="457200" cy="457200"/>
+          </a:xfrm>
+          <a:prstGeom prst="ellipse">
+            <a:avLst/>
+          </a:prstGeom>
+          <a:solidFill>
+            <a:schemeClr val="accent4"/>
+          </a:solidFill>
+          <a:ln/>
+        </p:spPr>
+      </p:sp>
+      <p:pic>
+        <p:nvPicPr>
+          <p:cNvPr id="27" name="icon-572" descr="Map">    </p:cNvPr>
+          <p:cNvPicPr>
+            <a:picLocks noChangeAspect="1"/>
+          </p:cNvPicPr>
+          <p:nvPr/>
+        </p:nvPicPr>
+        <p:blipFill>
+          <a:blip r:embed="rId3"/>
+          <a:stretch>
+            <a:fillRect/>
+          </a:stretch>
+        </p:blipFill>
+        <p:spPr>
+          <a:xfrm>
+            <a:off x="8458200" y="1911096"/>
+            <a:ext cx="237744" cy="237744"/>
+          </a:xfrm>
+          <a:prstGeom prst="rect">
+            <a:avLst/>
+          </a:prstGeom>
+        </p:spPr>
+      </p:pic>
+      <p:sp>
+        <p:nvSpPr>
+          <p:cNvPr id="28" name="text-573"/>
+          <p:cNvSpPr txBox="1"/>
+          <p:nvPr/>
+        </p:nvSpPr>
+        <p:spPr>
+          <a:xfrm>
+            <a:off x="8924544" y="1801368"/>
+            <a:ext cx="2651760" cy="457200"/>
+          </a:xfrm>
+          <a:prstGeom prst="rect">
+            <a:avLst/>
+          </a:prstGeom>
+          <a:noFill/>
+          <a:ln/>
+        </p:spPr>
+        <p:txBody>
+          <a:bodyPr wrap="square" lIns="0" tIns="0" rIns="0" bIns="0" rtlCol="0" anchor="ctr"/>
+          <a:lstStyle/>
+          <a:p>
+            <a:pPr indent="0" marL="0">
+              <a:buNone/>
+            </a:pPr>
+            <a:r>
+              <a:rPr lang="zh-TW" altLang="en-US" sz="1700" b="1" dirty="0">
+                <a:solidFill>
+                  <a:schemeClr val="accent4"/>
+                </a:solidFill>
+              </a:rPr>
+              <a:t>規劃中（期末前）</a:t>
+            </a:r>
+            <a:endParaRPr lang="zh-TW" sz="1700" dirty="0"/>
+          </a:p>
+        </p:txBody>
+      </p:sp>
+      <p:sp>
+        <p:nvSpPr>
+          <p:cNvPr id="29" name="card-574"/>
+          <p:cNvSpPr/>
+          <p:nvPr/>
+        </p:nvSpPr>
+        <p:spPr>
+          <a:xfrm>
+            <a:off x="8321040" y="2487168"/>
+            <a:ext cx="3118104" cy="822960"/>
+          </a:xfrm>
+          <a:prstGeom prst="roundRect">
+            <a:avLst>
+              <a:gd name="adj" fmla="val 8889"/>
+            </a:avLst>
+          </a:prstGeom>
+          <a:solidFill>
+            <a:schemeClr val="bg1"/>
+          </a:solidFill>
+          <a:ln/>
+        </p:spPr>
+      </p:sp>
+      <p:sp>
+        <p:nvSpPr>
+          <p:cNvPr id="30" name="text-575"/>
+          <p:cNvSpPr txBox="1"/>
+          <p:nvPr/>
+        </p:nvSpPr>
+        <p:spPr>
+          <a:xfrm>
+            <a:off x="8485632" y="2487168"/>
+            <a:ext cx="2834640" cy="822960"/>
+          </a:xfrm>
+          <a:prstGeom prst="rect">
+            <a:avLst/>
+          </a:prstGeom>
+          <a:noFill/>
+          <a:ln/>
+        </p:spPr>
+        <p:txBody>
+          <a:bodyPr wrap="square" lIns="0" tIns="0" rIns="0" bIns="0" rtlCol="0" anchor="ctr"/>
+          <a:lstStyle/>
+          <a:p>
+            <a:pPr indent="0" marL="0">
+              <a:buNone/>
+            </a:pPr>
+            <a:r>
+              <a:rPr lang="zh-TW" altLang="en-US" sz="1400" dirty="0">
+                <a:solidFill>
+                  <a:schemeClr val="tx1"/>
+                </a:solidFill>
+              </a:rPr>
+              <a:t>P0　判讀結果接入草稿工具</a:t>
+            </a:r>
+            <a:endParaRPr lang="zh-TW" sz="1400" dirty="0"/>
+          </a:p>
+        </p:txBody>
+      </p:sp>
+      <p:sp>
+        <p:nvSpPr>
+          <p:cNvPr id="31" name="card-576"/>
+          <p:cNvSpPr/>
+          <p:nvPr/>
+        </p:nvSpPr>
+        <p:spPr>
+          <a:xfrm>
+            <a:off x="8321040" y="3465576"/>
+            <a:ext cx="3118104" cy="822960"/>
+          </a:xfrm>
+          <a:prstGeom prst="roundRect">
+            <a:avLst>
+              <a:gd name="adj" fmla="val 8889"/>
+            </a:avLst>
+          </a:prstGeom>
+          <a:solidFill>
+            <a:schemeClr val="bg1"/>
+          </a:solidFill>
+          <a:ln/>
+        </p:spPr>
+      </p:sp>
+      <p:sp>
+        <p:nvSpPr>
+          <p:cNvPr id="32" name="text-577"/>
+          <p:cNvSpPr txBox="1"/>
+          <p:nvPr/>
+        </p:nvSpPr>
+        <p:spPr>
+          <a:xfrm>
+            <a:off x="8485632" y="3465576"/>
+            <a:ext cx="2834640" cy="822960"/>
+          </a:xfrm>
+          <a:prstGeom prst="rect">
+            <a:avLst/>
+          </a:prstGeom>
+          <a:noFill/>
+          <a:ln/>
+        </p:spPr>
+        <p:txBody>
+          <a:bodyPr wrap="square" lIns="0" tIns="0" rIns="0" bIns="0" rtlCol="0" anchor="ctr"/>
+          <a:lstStyle/>
+          <a:p>
+            <a:pPr indent="0" marL="0">
+              <a:buNone/>
+            </a:pPr>
+            <a:r>
+              <a:rPr lang="zh-TW" altLang="en-US" sz="1400" dirty="0">
+                <a:solidFill>
+                  <a:schemeClr val="tx1"/>
+                </a:solidFill>
+              </a:rPr>
+              <a:t>P0　20 組教師標註案例</a:t>
+            </a:r>
+            <a:endParaRPr lang="zh-TW" sz="1400" dirty="0"/>
+          </a:p>
+        </p:txBody>
+      </p:sp>
+      <p:sp>
+        <p:nvSpPr>
+          <p:cNvPr id="33" name="card-578"/>
+          <p:cNvSpPr/>
+          <p:nvPr/>
+        </p:nvSpPr>
+        <p:spPr>
+          <a:xfrm>
+            <a:off x="8321040" y="4443984"/>
+            <a:ext cx="3118104" cy="822960"/>
+          </a:xfrm>
+          <a:prstGeom prst="roundRect">
+            <a:avLst>
+              <a:gd name="adj" fmla="val 8889"/>
+            </a:avLst>
+          </a:prstGeom>
+          <a:solidFill>
+            <a:schemeClr val="bg1"/>
+          </a:solidFill>
+          <a:ln/>
+        </p:spPr>
+      </p:sp>
+      <p:sp>
+        <p:nvSpPr>
+          <p:cNvPr id="34" name="text-579"/>
+          <p:cNvSpPr txBox="1"/>
+          <p:nvPr/>
+        </p:nvSpPr>
+        <p:spPr>
+          <a:xfrm>
+            <a:off x="8485632" y="4443984"/>
+            <a:ext cx="2834640" cy="822960"/>
+          </a:xfrm>
+          <a:prstGeom prst="rect">
+            <a:avLst/>
+          </a:prstGeom>
+          <a:noFill/>
+          <a:ln/>
+        </p:spPr>
+        <p:txBody>
+          <a:bodyPr wrap="square" lIns="0" tIns="0" rIns="0" bIns="0" rtlCol="0" anchor="ctr"/>
+          <a:lstStyle/>
+          <a:p>
+            <a:pPr indent="0" marL="0">
+              <a:buNone/>
+            </a:pPr>
+            <a:r>
+              <a:rPr lang="zh-TW" altLang="en-US" sz="1400" dirty="0">
+                <a:solidFill>
+                  <a:schemeClr val="tx1"/>
+                </a:solidFill>
+              </a:rPr>
+              <a:t>P1　掃描 PDF OCR、正式登入</a:t>
+            </a:r>
+            <a:endParaRPr lang="zh-TW" sz="1400" dirty="0"/>
+          </a:p>
+        </p:txBody>
+      </p:sp>
+      <p:pic>
+        <p:nvPicPr>
+          <p:cNvPr id="35" name="icon-580" descr="Target">    </p:cNvPr>
+          <p:cNvPicPr>
+            <a:picLocks noChangeAspect="1"/>
+          </p:cNvPicPr>
+          <p:nvPr/>
+        </p:nvPicPr>
+        <p:blipFill>
+          <a:blip r:embed="rId4"/>
+          <a:stretch>
+            <a:fillRect/>
+          </a:stretch>
+        </p:blipFill>
+        <p:spPr>
+          <a:xfrm>
+            <a:off x="548640" y="5760720"/>
+            <a:ext cx="310896" cy="310896"/>
+          </a:xfrm>
+          <a:prstGeom prst="rect">
+            <a:avLst/>
+          </a:prstGeom>
+        </p:spPr>
+      </p:pic>
+      <p:sp>
+        <p:nvSpPr>
+          <p:cNvPr id="36" name="text-581"/>
+          <p:cNvSpPr txBox="1"/>
+          <p:nvPr/>
+        </p:nvSpPr>
+        <p:spPr>
+          <a:xfrm>
+            <a:off x="987552" y="5742432"/>
+            <a:ext cx="10607040" cy="365760"/>
+          </a:xfrm>
+          <a:prstGeom prst="rect">
+            <a:avLst/>
+          </a:prstGeom>
+          <a:noFill/>
+          <a:ln/>
+        </p:spPr>
+        <p:txBody>
+          <a:bodyPr wrap="square" lIns="0" tIns="0" rIns="0" bIns="0" rtlCol="0" anchor="ctr"/>
+          <a:lstStyle/>
+          <a:p>
+            <a:pPr indent="0" marL="0">
+              <a:buNone/>
+            </a:pPr>
+            <a:r>
+              <a:rPr lang="zh-TW" altLang="en-US" sz="1500" b="1" dirty="0">
+                <a:solidFill>
+                  <a:schemeClr val="tx1"/>
+                </a:solidFill>
+              </a:rPr>
+              <a:t>驗收：20 組標註案例 · 跨人隔離 · 來源變更拒寫 · 可重現 trace，並分開報告正確率與拒答率。</a:t>
+            </a:r>
+            <a:endParaRPr lang="zh-TW" sz="1500" dirty="0"/>
+          </a:p>
+        </p:txBody>
+      </p:sp>
+      <p:sp>
+        <p:nvSpPr>
+          <p:cNvPr id="25" name="Slide Number Placeholder 0"/>
+          <p:cNvSpPr>
+            <a:spLocks noGrp="1"/>
+          </p:cNvSpPr>
+          <p:nvPr>
+            <p:ph type="sldNum" sz="quarter" idx="4294967295"/>
+          </p:nvPr>
+        </p:nvSpPr>
+        <p:spPr>
+          <a:xfrm>
+            <a:off x="11091672" y="6400800"/>
+            <a:ext cx="548640" cy="256032"/>
+          </a:xfrm>
+          <a:prstGeom prst="rect">
+            <a:avLst/>
+          </a:prstGeom>
+          <a:extLst>
+            <a:ext uri="{C572A759-6A51-4108-AA02-DFA0A04FC94B}">
+              <ma14:wrappingTextBoxFlag xmlns:ma14="http://schemas.microsoft.com/office/mac/drawingml/2011/main" val="0"/>
+            </a:ext>
+          </a:extLst>
+        </p:spPr>
+        <p:txBody>
+          <a:bodyPr/>
+          <a:lstStyle>
+            <a:lvl1pPr>
+              <a:defRPr sz="1000">
+                <a:solidFill>
+                  <a:schemeClr val="accent6"/>
+                </a:solidFill>
+              </a:defRPr>
+            </a:lvl1pPr>
+          </a:lstStyle>
+          <a:p>
+            <a:pPr algn="r"/>
+            <a:fld id="{F7021451-1387-4CA6-816F-3879F97B5CBC}" type="slidenum">
+              <a:rPr b="0" lang="en-US"/>
+              <a:t>15</a:t>
+            </a:fld>
+            <a:endParaRPr lang="en-US"/>
+          </a:p>
+        </p:txBody>
+      </p:sp>
+    </p:spTree>
+  </p:cSld>
+  <p:clrMapOvr>
+    <a:masterClrMapping/>
+  </p:clrMapOvr>
+</p:sld>
+</file>
+
+<file path=ppt/slides/slide16.xml><?xml version="1.0" encoding="utf-8"?>
+<p:sld xmlns:a="http://schemas.openxmlformats.org/drawingml/2006/main" xmlns:r="http://schemas.openxmlformats.org/officeDocument/2006/relationships" xmlns:p="http://schemas.openxmlformats.org/presentationml/2006/main">
+  <p:cSld name="Slide 16">
+    <p:spTree>
+      <p:nvGrpSpPr>
+        <p:cNvPr id="1" name=""/>
+        <p:cNvGrpSpPr/>
+        <p:nvPr/>
+      </p:nvGrpSpPr>
+      <p:grpSpPr>
+        <a:xfrm>
+          <a:off x="0" y="0"/>
+          <a:ext cx="0" cy="0"/>
+          <a:chOff x="0" y="0"/>
+          <a:chExt cx="0" cy="0"/>
+        </a:xfrm>
+      </p:grpSpPr>
+      <p:sp>
+        <p:nvSpPr>
+          <p:cNvPr id="2" name="Text 0"/>
+          <p:cNvSpPr/>
+          <p:nvPr>
+            <p:ph idx="100" type="body" hasCustomPrompt="1"/>
+          </p:nvPr>
+        </p:nvSpPr>
+        <p:spPr>
+          <a:xfrm>
+            <a:off x="548640" y="365760"/>
+            <a:ext cx="8778240" cy="274320"/>
+          </a:xfrm>
+          <a:prstGeom prst="rect">
+            <a:avLst/>
+          </a:prstGeom>
+          <a:noFill/>
+          <a:ln/>
+        </p:spPr>
+        <p:txBody>
+          <a:bodyPr wrap="square" lIns="0" tIns="0" rIns="0" bIns="0" rtlCol="0" anchor="t"/>
+          <a:lstStyle/>
+          <a:p>
+            <a:pPr algn="l" indent="0" marL="0">
+              <a:buNone/>
+            </a:pPr>
+            <a:r>
+              <a:rPr lang="zh-TW" altLang="en-US" sz="1300" b="1" dirty="0">
+                <a:solidFill>
+                  <a:schemeClr val="accent1"/>
+                </a:solidFill>
+              </a:rPr>
+              <a:t>團隊與後續</a:t>
+            </a:r>
+            <a:endParaRPr lang="zh-TW" sz="1300" dirty="0"/>
+          </a:p>
+        </p:txBody>
+      </p:sp>
+      <p:sp>
+        <p:nvSpPr>
+          <p:cNvPr id="3" name="Text 0"/>
+          <p:cNvSpPr/>
+          <p:nvPr>
+            <p:ph idx="101" type="title" hasCustomPrompt="1"/>
+          </p:nvPr>
+        </p:nvSpPr>
+        <p:spPr>
+          <a:xfrm>
+            <a:off x="548640" y="658368"/>
+            <a:ext cx="11064240" cy="685800"/>
+          </a:xfrm>
+          <a:prstGeom prst="rect">
+            <a:avLst/>
+          </a:prstGeom>
+          <a:noFill/>
+          <a:ln/>
+        </p:spPr>
+        <p:txBody>
+          <a:bodyPr wrap="square" lIns="0" tIns="0" rIns="0" bIns="0" rtlCol="0" anchor="t"/>
+          <a:lstStyle/>
+          <a:p>
+            <a:pPr algn="l" indent="0" marL="0">
+              <a:buNone/>
+            </a:pPr>
+            <a:r>
+              <a:rPr lang="zh-TW" altLang="en-US" sz="3000" b="1" dirty="0">
+                <a:solidFill>
                   <a:schemeClr val="bg1"/>
                 </a:solidFill>
               </a:rPr>
@@ -11622,7 +14020,7 @@
       </p:sp>
       <p:sp>
         <p:nvSpPr>
-          <p:cNvPr id="5" name="member-card-513"/>
+          <p:cNvPr id="5" name="member-card-582"/>
           <p:cNvSpPr/>
           <p:nvPr/>
         </p:nvSpPr>
@@ -11653,7 +14051,7 @@
       </p:sp>
       <p:sp>
         <p:nvSpPr>
-          <p:cNvPr id="6" name="icon-bg-514"/>
+          <p:cNvPr id="6" name="icon-bg-583"/>
           <p:cNvSpPr/>
           <p:nvPr/>
         </p:nvSpPr>
@@ -11673,7 +14071,7 @@
       </p:sp>
       <p:pic>
         <p:nvPicPr>
-          <p:cNvPr id="7" name="icon-515" descr="User">    </p:cNvPr>
+          <p:cNvPr id="7" name="icon-584" descr="User">    </p:cNvPr>
           <p:cNvPicPr>
             <a:picLocks noChangeAspect="1"/>
           </p:cNvPicPr>
@@ -11697,7 +14095,7 @@
       </p:pic>
       <p:sp>
         <p:nvSpPr>
-          <p:cNvPr id="8" name="text-516"/>
+          <p:cNvPr id="8" name="text-585"/>
           <p:cNvSpPr txBox="1"/>
           <p:nvPr/>
         </p:nvSpPr>
@@ -11733,7 +14131,7 @@
       </p:sp>
       <p:sp>
         <p:nvSpPr>
-          <p:cNvPr id="9" name="text-517"/>
+          <p:cNvPr id="9" name="text-586"/>
           <p:cNvSpPr txBox="1"/>
           <p:nvPr/>
         </p:nvSpPr>
@@ -11769,7 +14167,7 @@
       </p:sp>
       <p:sp>
         <p:nvSpPr>
-          <p:cNvPr id="10" name="text-518"/>
+          <p:cNvPr id="10" name="text-587"/>
           <p:cNvSpPr txBox="1"/>
           <p:nvPr/>
         </p:nvSpPr>
@@ -11805,7 +14203,7 @@
       </p:sp>
       <p:sp>
         <p:nvSpPr>
-          <p:cNvPr id="11" name="text-519"/>
+          <p:cNvPr id="11" name="text-588"/>
           <p:cNvSpPr txBox="1"/>
           <p:nvPr/>
         </p:nvSpPr>
@@ -11841,7 +14239,7 @@
       </p:sp>
       <p:sp>
         <p:nvSpPr>
-          <p:cNvPr id="12" name="member-card-520"/>
+          <p:cNvPr id="12" name="member-card-589"/>
           <p:cNvSpPr/>
           <p:nvPr/>
         </p:nvSpPr>
@@ -11872,7 +14270,7 @@
       </p:sp>
       <p:sp>
         <p:nvSpPr>
-          <p:cNvPr id="13" name="icon-bg-521"/>
+          <p:cNvPr id="13" name="icon-bg-590"/>
           <p:cNvSpPr/>
           <p:nvPr/>
         </p:nvSpPr>
@@ -11892,7 +14290,7 @@
       </p:sp>
       <p:pic>
         <p:nvPicPr>
-          <p:cNvPr id="14" name="icon-522" descr="User">    </p:cNvPr>
+          <p:cNvPr id="14" name="icon-591" descr="User">    </p:cNvPr>
           <p:cNvPicPr>
             <a:picLocks noChangeAspect="1"/>
           </p:cNvPicPr>
@@ -11916,7 +14314,7 @@
       </p:pic>
       <p:sp>
         <p:nvSpPr>
-          <p:cNvPr id="15" name="text-523"/>
+          <p:cNvPr id="15" name="text-592"/>
           <p:cNvSpPr txBox="1"/>
           <p:nvPr/>
         </p:nvSpPr>
@@ -11944,7 +14342,7 @@
                   <a:schemeClr val="bg1"/>
                 </a:solidFill>
               </a:rPr>
-              <a:t>林崇偉</a:t>
+              <a:t>林崇瑋</a:t>
             </a:r>
             <a:endParaRPr lang="zh-TW" sz="2400" dirty="0"/>
           </a:p>
@@ -11952,7 +14350,7 @@
       </p:sp>
       <p:sp>
         <p:nvSpPr>
-          <p:cNvPr id="16" name="text-524"/>
+          <p:cNvPr id="16" name="text-593"/>
           <p:cNvSpPr txBox="1"/>
           <p:nvPr/>
         </p:nvSpPr>
@@ -11988,7 +14386,7 @@
       </p:sp>
       <p:sp>
         <p:nvSpPr>
-          <p:cNvPr id="17" name="text-525"/>
+          <p:cNvPr id="17" name="text-594"/>
           <p:cNvSpPr txBox="1"/>
           <p:nvPr/>
         </p:nvSpPr>
@@ -12024,7 +14422,7 @@
       </p:sp>
       <p:sp>
         <p:nvSpPr>
-          <p:cNvPr id="18" name="text-526"/>
+          <p:cNvPr id="18" name="text-595"/>
           <p:cNvSpPr txBox="1"/>
           <p:nvPr/>
         </p:nvSpPr>
@@ -12060,7 +14458,7 @@
       </p:sp>
       <p:sp>
         <p:nvSpPr>
-          <p:cNvPr id="19" name="text-527"/>
+          <p:cNvPr id="19" name="text-596"/>
           <p:cNvSpPr txBox="1"/>
           <p:nvPr/>
         </p:nvSpPr>
@@ -12096,7 +14494,7 @@
       </p:sp>
       <p:sp>
         <p:nvSpPr>
-          <p:cNvPr id="20" name="time-seg-528"/>
+          <p:cNvPr id="20" name="time-seg-597"/>
           <p:cNvSpPr/>
           <p:nvPr/>
         </p:nvSpPr>
@@ -12116,7 +14514,7 @@
       </p:sp>
       <p:sp>
         <p:nvSpPr>
-          <p:cNvPr id="21" name="text-529"/>
+          <p:cNvPr id="21" name="text-598"/>
           <p:cNvSpPr txBox="1"/>
           <p:nvPr/>
         </p:nvSpPr>
@@ -12152,7 +14550,7 @@
       </p:sp>
       <p:sp>
         <p:nvSpPr>
-          <p:cNvPr id="22" name="time-seg-530"/>
+          <p:cNvPr id="22" name="time-seg-599"/>
           <p:cNvSpPr/>
           <p:nvPr/>
         </p:nvSpPr>
@@ -12172,7 +14570,7 @@
       </p:sp>
       <p:sp>
         <p:nvSpPr>
-          <p:cNvPr id="23" name="text-531"/>
+          <p:cNvPr id="23" name="text-600"/>
           <p:cNvSpPr txBox="1"/>
           <p:nvPr/>
         </p:nvSpPr>
@@ -12208,7 +14606,7 @@
       </p:sp>
       <p:sp>
         <p:nvSpPr>
-          <p:cNvPr id="24" name="time-seg-532"/>
+          <p:cNvPr id="24" name="time-seg-601"/>
           <p:cNvSpPr/>
           <p:nvPr/>
         </p:nvSpPr>
@@ -12228,7 +14626,7 @@
       </p:sp>
       <p:sp>
         <p:nvSpPr>
-          <p:cNvPr id="25" name="text-533"/>
+          <p:cNvPr id="25" name="text-602"/>
           <p:cNvSpPr txBox="1"/>
           <p:nvPr/>
         </p:nvSpPr>
@@ -12264,7 +14662,7 @@
       </p:sp>
       <p:sp>
         <p:nvSpPr>
-          <p:cNvPr id="26" name="text-534"/>
+          <p:cNvPr id="26" name="text-603"/>
           <p:cNvSpPr txBox="1"/>
           <p:nvPr/>
         </p:nvSpPr>
@@ -12300,7 +14698,7 @@
       </p:sp>
       <p:sp>
         <p:nvSpPr>
-          <p:cNvPr id="27" name="text-535"/>
+          <p:cNvPr id="27" name="text-604"/>
           <p:cNvSpPr txBox="1"/>
           <p:nvPr/>
         </p:nvSpPr>
@@ -12373,7 +14771,7 @@
             <a:pPr algn="r"/>
             <a:fld id="{F7021451-1387-4CA6-816F-3879F97B5CBC}" type="slidenum">
               <a:rPr b="0" lang="en-US"/>
-              <a:t>15</a:t>
+              <a:t>16</a:t>
             </a:fld>
             <a:endParaRPr lang="en-US"/>
           </a:p>
@@ -14320,11 +16718,11 @@
             <a:avLst/>
           </a:prstGeom>
           <a:solidFill>
-            <a:schemeClr val="bg1"/>
+            <a:schemeClr val="accent2"/>
           </a:solidFill>
           <a:ln w="19050">
             <a:solidFill>
-              <a:schemeClr val="accent6"/>
+              <a:schemeClr val="accent2"/>
             </a:solidFill>
             <a:prstDash val="solid"/>
           </a:ln>
@@ -14357,7 +16755,7 @@
             <a:r>
               <a:rPr lang="zh-TW" altLang="en-US" sz="1500" b="1" dirty="0">
                 <a:solidFill>
-                  <a:schemeClr val="accent6"/>
+                  <a:schemeClr val="tx1"/>
                 </a:solidFill>
               </a:rPr>
               <a:t>W6</a:t>
@@ -14393,10 +16791,10 @@
             <a:r>
               <a:rPr lang="zh-TW" altLang="en-US" sz="1300" dirty="0">
                 <a:solidFill>
-                  <a:schemeClr val="accent6"/>
-                </a:solidFill>
-              </a:rPr>
-              <a:t>未提供</a:t>
+                  <a:schemeClr val="tx1"/>
+                </a:solidFill>
+              </a:rPr>
+              <a:t>評估後修訂</a:t>
             </a:r>
             <a:endParaRPr lang="zh-TW" sz="1300" dirty="0"/>
           </a:p>
@@ -14407,10 +16805,10 @@
             <a:r>
               <a:rPr lang="zh-TW" altLang="en-US" sz="1300" dirty="0">
                 <a:solidFill>
-                  <a:schemeClr val="accent6"/>
-                </a:solidFill>
-              </a:rPr>
-              <a:t>可核對材料</a:t>
+                  <a:schemeClr val="tx1"/>
+                </a:solidFill>
+              </a:rPr>
+              <a:t>（10/30 補交）</a:t>
             </a:r>
             <a:endParaRPr lang="zh-TW" sz="1300" dirty="0"/>
           </a:p>
@@ -14443,10 +16841,10 @@
             <a:r>
               <a:rPr lang="zh-TW" altLang="en-US" sz="1200" dirty="0">
                 <a:solidFill>
-                  <a:schemeClr val="accent6"/>
-                </a:solidFill>
-              </a:rPr>
-              <a:t>不列為完成</a:t>
+                  <a:schemeClr val="accent3"/>
+                </a:solidFill>
+              </a:rPr>
+              <a:t>live 未證明改善</a:t>
             </a:r>
             <a:endParaRPr lang="zh-TW" sz="1200" dirty="0"/>
           </a:p>
@@ -14740,7 +17138,7 @@
                   <a:schemeClr val="accent3"/>
                 </a:solidFill>
               </a:rPr>
-              <a:t>live 結果待記錄</a:t>
+              <a:t>語意仍有誤判</a:t>
             </a:r>
             <a:endParaRPr lang="zh-TW" sz="1200" dirty="0"/>
           </a:p>
@@ -15259,7 +17657,7 @@
             <a:avLst/>
           </a:prstGeom>
           <a:solidFill>
-            <a:schemeClr val="accent3"/>
+            <a:schemeClr val="tx2"/>
           </a:solidFill>
           <a:ln/>
         </p:spPr>
@@ -15354,7 +17752,7 @@
                   <a:schemeClr val="accent6"/>
                 </a:solidFill>
               </a:rPr>
-              <a:t>老師與學生 PDF 圖文比對，確認配分後才顯示估分區間</a:t>
+              <a:t>老師與學生 PDF 圖文比對，確認配分後才顯示估分；實測用合成 PDF</a:t>
             </a:r>
             <a:endParaRPr lang="zh-TW" sz="1300" dirty="0"/>
           </a:p>
@@ -15362,14 +17760,14 @@
       </p:sp>
       <p:sp>
         <p:nvSpPr>
-          <p:cNvPr id="54" name="chip-pending-125"/>
+          <p:cNvPr id="54" name="chip-pass-125"/>
           <p:cNvSpPr/>
           <p:nvPr/>
         </p:nvSpPr>
         <p:spPr>
           <a:xfrm>
             <a:off x="8366760" y="5230368"/>
-            <a:ext cx="1261262" cy="298704"/>
+            <a:ext cx="2282342" cy="298704"/>
           </a:xfrm>
           <a:prstGeom prst="roundRect">
             <a:avLst>
@@ -15377,14 +17775,14 @@
             </a:avLst>
           </a:prstGeom>
           <a:solidFill>
-            <a:schemeClr val="accent3"/>
+            <a:schemeClr val="accent2"/>
           </a:solidFill>
           <a:ln/>
         </p:spPr>
       </p:sp>
       <p:pic>
         <p:nvPicPr>
-          <p:cNvPr id="55" name="chip-icon-126" descr="待真實驗證">    </p:cNvPr>
+          <p:cNvPr id="55" name="chip-icon-126" descr="LIVE_PASS · 預期 6／7">    </p:cNvPr>
           <p:cNvPicPr>
             <a:picLocks noChangeAspect="1"/>
           </p:cNvPicPr>
@@ -15415,7 +17813,7 @@
         <p:spPr>
           <a:xfrm>
             <a:off x="8719718" y="5230368"/>
-            <a:ext cx="899160" cy="298704"/>
+            <a:ext cx="1920240" cy="298704"/>
           </a:xfrm>
           <a:prstGeom prst="rect">
             <a:avLst/>
@@ -15436,7 +17834,7 @@
                   <a:schemeClr val="bg1"/>
                 </a:solidFill>
               </a:rPr>
-              <a:t>待真實驗證</a:t>
+              <a:t>LIVE_PASS · 預期 6／7</a:t>
             </a:r>
             <a:endParaRPr lang="zh-TW" sz="1200" dirty="0"/>
           </a:p>
